--- a/SV12-2024.pptx
+++ b/SV12-2024.pptx
@@ -5,7 +5,7 @@
     <p:sldMasterId id="2147483684" r:id="rId1"/>
   </p:sldMasterIdLst>
   <p:notesMasterIdLst>
-    <p:notesMasterId r:id="rId18"/>
+    <p:notesMasterId r:id="rId22"/>
   </p:notesMasterIdLst>
   <p:sldIdLst>
     <p:sldId id="256" r:id="rId2"/>
@@ -14,30 +14,34 @@
     <p:sldId id="321" r:id="rId5"/>
     <p:sldId id="333" r:id="rId6"/>
     <p:sldId id="322" r:id="rId7"/>
-    <p:sldId id="323" r:id="rId8"/>
-    <p:sldId id="324" r:id="rId9"/>
-    <p:sldId id="325" r:id="rId10"/>
-    <p:sldId id="326" r:id="rId11"/>
-    <p:sldId id="327" r:id="rId12"/>
-    <p:sldId id="328" r:id="rId13"/>
-    <p:sldId id="329" r:id="rId14"/>
-    <p:sldId id="330" r:id="rId15"/>
-    <p:sldId id="331" r:id="rId16"/>
-    <p:sldId id="332" r:id="rId17"/>
+    <p:sldId id="334" r:id="rId8"/>
+    <p:sldId id="323" r:id="rId9"/>
+    <p:sldId id="335" r:id="rId10"/>
+    <p:sldId id="336" r:id="rId11"/>
+    <p:sldId id="325" r:id="rId12"/>
+    <p:sldId id="326" r:id="rId13"/>
+    <p:sldId id="337" r:id="rId14"/>
+    <p:sldId id="338" r:id="rId15"/>
+    <p:sldId id="327" r:id="rId16"/>
+    <p:sldId id="328" r:id="rId17"/>
+    <p:sldId id="329" r:id="rId18"/>
+    <p:sldId id="339" r:id="rId19"/>
+    <p:sldId id="330" r:id="rId20"/>
+    <p:sldId id="332" r:id="rId21"/>
   </p:sldIdLst>
   <p:sldSz cx="9144000" cy="5143500" type="screen16x9"/>
   <p:notesSz cx="6858000" cy="9144000"/>
   <p:embeddedFontLst>
     <p:embeddedFont>
       <p:font typeface="Questrial" panose="020B0604020202020204" charset="0"/>
-      <p:regular r:id="rId19"/>
+      <p:regular r:id="rId23"/>
     </p:embeddedFont>
     <p:embeddedFont>
       <p:font typeface="Albert Sans" panose="020B0604020202020204" charset="0"/>
-      <p:regular r:id="rId20"/>
-      <p:bold r:id="rId21"/>
-      <p:italic r:id="rId22"/>
-      <p:boldItalic r:id="rId23"/>
+      <p:regular r:id="rId24"/>
+      <p:bold r:id="rId25"/>
+      <p:italic r:id="rId26"/>
+      <p:boldItalic r:id="rId27"/>
     </p:embeddedFont>
   </p:embeddedFontLst>
   <p:defaultTextStyle>
@@ -286,6 +290,4466 @@
     </p:ext>
   </p:extLst>
 </p:presentation>
+</file>
+
+<file path=ppt/diagrams/colors1.xml><?xml version="1.0" encoding="utf-8"?>
+<dgm:colorsDef xmlns:dgm="http://schemas.openxmlformats.org/drawingml/2006/diagram" xmlns:a="http://schemas.openxmlformats.org/drawingml/2006/main" uniqueId="urn:microsoft.com/office/officeart/2005/8/colors/accent3_5">
+  <dgm:title val=""/>
+  <dgm:desc val=""/>
+  <dgm:catLst>
+    <dgm:cat type="accent3" pri="11500"/>
+  </dgm:catLst>
+  <dgm:styleLbl name="node0">
+    <dgm:fillClrLst meth="cycle">
+      <a:schemeClr val="accent3">
+        <a:alpha val="80000"/>
+      </a:schemeClr>
+    </dgm:fillClrLst>
+    <dgm:linClrLst meth="repeat">
+      <a:schemeClr val="lt1"/>
+    </dgm:linClrLst>
+    <dgm:effectClrLst/>
+    <dgm:txLinClrLst/>
+    <dgm:txFillClrLst/>
+    <dgm:txEffectClrLst/>
+  </dgm:styleLbl>
+  <dgm:styleLbl name="node1">
+    <dgm:fillClrLst>
+      <a:schemeClr val="accent3">
+        <a:alpha val="90000"/>
+      </a:schemeClr>
+      <a:schemeClr val="accent3">
+        <a:alpha val="50000"/>
+      </a:schemeClr>
+    </dgm:fillClrLst>
+    <dgm:linClrLst meth="repeat">
+      <a:schemeClr val="lt1"/>
+    </dgm:linClrLst>
+    <dgm:effectClrLst/>
+    <dgm:txLinClrLst/>
+    <dgm:txFillClrLst/>
+    <dgm:txEffectClrLst/>
+  </dgm:styleLbl>
+  <dgm:styleLbl name="alignNode1">
+    <dgm:fillClrLst>
+      <a:schemeClr val="accent3">
+        <a:alpha val="90000"/>
+      </a:schemeClr>
+      <a:schemeClr val="accent3">
+        <a:alpha val="50000"/>
+      </a:schemeClr>
+    </dgm:fillClrLst>
+    <dgm:linClrLst>
+      <a:schemeClr val="accent3">
+        <a:alpha val="90000"/>
+      </a:schemeClr>
+      <a:schemeClr val="accent3">
+        <a:alpha val="50000"/>
+      </a:schemeClr>
+    </dgm:linClrLst>
+    <dgm:effectClrLst/>
+    <dgm:txLinClrLst/>
+    <dgm:txFillClrLst/>
+    <dgm:txEffectClrLst/>
+  </dgm:styleLbl>
+  <dgm:styleLbl name="lnNode1">
+    <dgm:fillClrLst>
+      <a:schemeClr val="accent3">
+        <a:shade val="90000"/>
+      </a:schemeClr>
+      <a:schemeClr val="accent3">
+        <a:alpha val="50000"/>
+        <a:tint val="50000"/>
+      </a:schemeClr>
+    </dgm:fillClrLst>
+    <dgm:linClrLst meth="repeat">
+      <a:schemeClr val="lt1"/>
+    </dgm:linClrLst>
+    <dgm:effectClrLst/>
+    <dgm:txLinClrLst/>
+    <dgm:txFillClrLst/>
+    <dgm:txEffectClrLst/>
+  </dgm:styleLbl>
+  <dgm:styleLbl name="vennNode1">
+    <dgm:fillClrLst>
+      <a:schemeClr val="accent3">
+        <a:shade val="80000"/>
+        <a:alpha val="50000"/>
+      </a:schemeClr>
+      <a:schemeClr val="accent3">
+        <a:alpha val="80000"/>
+      </a:schemeClr>
+    </dgm:fillClrLst>
+    <dgm:linClrLst meth="repeat">
+      <a:schemeClr val="lt1"/>
+    </dgm:linClrLst>
+    <dgm:effectClrLst/>
+    <dgm:txLinClrLst/>
+    <dgm:txFillClrLst/>
+    <dgm:txEffectClrLst/>
+  </dgm:styleLbl>
+  <dgm:styleLbl name="node2">
+    <dgm:fillClrLst>
+      <a:schemeClr val="accent3">
+        <a:alpha val="70000"/>
+      </a:schemeClr>
+    </dgm:fillClrLst>
+    <dgm:linClrLst meth="repeat">
+      <a:schemeClr val="lt1"/>
+    </dgm:linClrLst>
+    <dgm:effectClrLst/>
+    <dgm:txLinClrLst/>
+    <dgm:txFillClrLst/>
+    <dgm:txEffectClrLst/>
+  </dgm:styleLbl>
+  <dgm:styleLbl name="node3">
+    <dgm:fillClrLst>
+      <a:schemeClr val="accent3">
+        <a:alpha val="50000"/>
+      </a:schemeClr>
+    </dgm:fillClrLst>
+    <dgm:linClrLst meth="repeat">
+      <a:schemeClr val="lt1"/>
+    </dgm:linClrLst>
+    <dgm:effectClrLst/>
+    <dgm:txLinClrLst/>
+    <dgm:txFillClrLst/>
+    <dgm:txEffectClrLst/>
+  </dgm:styleLbl>
+  <dgm:styleLbl name="node4">
+    <dgm:fillClrLst>
+      <a:schemeClr val="accent3">
+        <a:alpha val="30000"/>
+      </a:schemeClr>
+    </dgm:fillClrLst>
+    <dgm:linClrLst meth="repeat">
+      <a:schemeClr val="lt1"/>
+    </dgm:linClrLst>
+    <dgm:effectClrLst/>
+    <dgm:txLinClrLst/>
+    <dgm:txFillClrLst/>
+    <dgm:txEffectClrLst/>
+  </dgm:styleLbl>
+  <dgm:styleLbl name="fgImgPlace1">
+    <dgm:fillClrLst>
+      <a:schemeClr val="accent3">
+        <a:tint val="50000"/>
+        <a:alpha val="90000"/>
+      </a:schemeClr>
+      <a:schemeClr val="accent3">
+        <a:tint val="20000"/>
+        <a:alpha val="50000"/>
+      </a:schemeClr>
+    </dgm:fillClrLst>
+    <dgm:linClrLst meth="repeat">
+      <a:schemeClr val="lt1"/>
+    </dgm:linClrLst>
+    <dgm:effectClrLst/>
+    <dgm:txLinClrLst/>
+    <dgm:txFillClrLst meth="repeat">
+      <a:schemeClr val="lt1"/>
+    </dgm:txFillClrLst>
+    <dgm:txEffectClrLst/>
+  </dgm:styleLbl>
+  <dgm:styleLbl name="alignImgPlace1">
+    <dgm:fillClrLst>
+      <a:schemeClr val="accent3">
+        <a:tint val="50000"/>
+      </a:schemeClr>
+      <a:schemeClr val="accent3">
+        <a:tint val="20000"/>
+      </a:schemeClr>
+    </dgm:fillClrLst>
+    <dgm:linClrLst meth="repeat">
+      <a:schemeClr val="lt1"/>
+    </dgm:linClrLst>
+    <dgm:effectClrLst/>
+    <dgm:txLinClrLst/>
+    <dgm:txFillClrLst meth="repeat">
+      <a:schemeClr val="lt1"/>
+    </dgm:txFillClrLst>
+    <dgm:txEffectClrLst/>
+  </dgm:styleLbl>
+  <dgm:styleLbl name="bgImgPlace1">
+    <dgm:fillClrLst>
+      <a:schemeClr val="accent3">
+        <a:tint val="50000"/>
+      </a:schemeClr>
+      <a:schemeClr val="accent3">
+        <a:tint val="20000"/>
+      </a:schemeClr>
+    </dgm:fillClrLst>
+    <dgm:linClrLst meth="repeat">
+      <a:schemeClr val="lt1"/>
+    </dgm:linClrLst>
+    <dgm:effectClrLst/>
+    <dgm:txLinClrLst/>
+    <dgm:txFillClrLst meth="repeat">
+      <a:schemeClr val="lt1"/>
+    </dgm:txFillClrLst>
+    <dgm:txEffectClrLst/>
+  </dgm:styleLbl>
+  <dgm:styleLbl name="sibTrans2D1">
+    <dgm:fillClrLst>
+      <a:schemeClr val="accent3">
+        <a:shade val="90000"/>
+      </a:schemeClr>
+      <a:schemeClr val="accent3">
+        <a:tint val="50000"/>
+      </a:schemeClr>
+    </dgm:fillClrLst>
+    <dgm:linClrLst>
+      <a:schemeClr val="accent3">
+        <a:shade val="90000"/>
+      </a:schemeClr>
+      <a:schemeClr val="accent3">
+        <a:tint val="50000"/>
+      </a:schemeClr>
+    </dgm:linClrLst>
+    <dgm:effectClrLst/>
+    <dgm:txLinClrLst/>
+    <dgm:txFillClrLst/>
+    <dgm:txEffectClrLst/>
+  </dgm:styleLbl>
+  <dgm:styleLbl name="fgSibTrans2D1">
+    <dgm:fillClrLst>
+      <a:schemeClr val="accent3">
+        <a:shade val="90000"/>
+      </a:schemeClr>
+      <a:schemeClr val="accent3">
+        <a:tint val="50000"/>
+      </a:schemeClr>
+    </dgm:fillClrLst>
+    <dgm:linClrLst>
+      <a:schemeClr val="accent3">
+        <a:shade val="90000"/>
+      </a:schemeClr>
+      <a:schemeClr val="accent3">
+        <a:tint val="50000"/>
+      </a:schemeClr>
+    </dgm:linClrLst>
+    <dgm:effectClrLst/>
+    <dgm:txLinClrLst/>
+    <dgm:txFillClrLst/>
+    <dgm:txEffectClrLst/>
+  </dgm:styleLbl>
+  <dgm:styleLbl name="bgSibTrans2D1">
+    <dgm:fillClrLst>
+      <a:schemeClr val="accent3">
+        <a:shade val="90000"/>
+      </a:schemeClr>
+      <a:schemeClr val="accent3">
+        <a:tint val="50000"/>
+      </a:schemeClr>
+    </dgm:fillClrLst>
+    <dgm:linClrLst>
+      <a:schemeClr val="accent3">
+        <a:shade val="90000"/>
+      </a:schemeClr>
+      <a:schemeClr val="accent3">
+        <a:tint val="50000"/>
+      </a:schemeClr>
+    </dgm:linClrLst>
+    <dgm:effectClrLst/>
+    <dgm:txLinClrLst/>
+    <dgm:txFillClrLst/>
+    <dgm:txEffectClrLst/>
+  </dgm:styleLbl>
+  <dgm:styleLbl name="sibTrans1D1">
+    <dgm:fillClrLst>
+      <a:schemeClr val="accent3">
+        <a:shade val="90000"/>
+      </a:schemeClr>
+      <a:schemeClr val="accent3">
+        <a:tint val="50000"/>
+      </a:schemeClr>
+    </dgm:fillClrLst>
+    <dgm:linClrLst>
+      <a:schemeClr val="accent3">
+        <a:shade val="90000"/>
+      </a:schemeClr>
+      <a:schemeClr val="accent3">
+        <a:tint val="50000"/>
+      </a:schemeClr>
+    </dgm:linClrLst>
+    <dgm:effectClrLst/>
+    <dgm:txLinClrLst/>
+    <dgm:txFillClrLst meth="repeat">
+      <a:schemeClr val="tx1"/>
+    </dgm:txFillClrLst>
+    <dgm:txEffectClrLst/>
+  </dgm:styleLbl>
+  <dgm:styleLbl name="callout">
+    <dgm:fillClrLst meth="repeat">
+      <a:schemeClr val="accent3"/>
+    </dgm:fillClrLst>
+    <dgm:linClrLst meth="repeat">
+      <a:schemeClr val="accent3"/>
+    </dgm:linClrLst>
+    <dgm:effectClrLst/>
+    <dgm:txLinClrLst/>
+    <dgm:txFillClrLst meth="repeat">
+      <a:schemeClr val="tx1"/>
+    </dgm:txFillClrLst>
+    <dgm:txEffectClrLst/>
+  </dgm:styleLbl>
+  <dgm:styleLbl name="asst0">
+    <dgm:fillClrLst meth="repeat">
+      <a:schemeClr val="accent3">
+        <a:alpha val="90000"/>
+      </a:schemeClr>
+    </dgm:fillClrLst>
+    <dgm:linClrLst meth="repeat">
+      <a:schemeClr val="lt1"/>
+    </dgm:linClrLst>
+    <dgm:effectClrLst/>
+    <dgm:txLinClrLst/>
+    <dgm:txFillClrLst/>
+    <dgm:txEffectClrLst/>
+  </dgm:styleLbl>
+  <dgm:styleLbl name="asst1">
+    <dgm:fillClrLst meth="repeat">
+      <a:schemeClr val="accent3">
+        <a:alpha val="90000"/>
+      </a:schemeClr>
+    </dgm:fillClrLst>
+    <dgm:linClrLst meth="repeat">
+      <a:schemeClr val="lt1"/>
+    </dgm:linClrLst>
+    <dgm:effectClrLst/>
+    <dgm:txLinClrLst/>
+    <dgm:txFillClrLst/>
+    <dgm:txEffectClrLst/>
+  </dgm:styleLbl>
+  <dgm:styleLbl name="asst2">
+    <dgm:fillClrLst>
+      <a:schemeClr val="accent3">
+        <a:alpha val="90000"/>
+      </a:schemeClr>
+    </dgm:fillClrLst>
+    <dgm:linClrLst meth="repeat">
+      <a:schemeClr val="lt1"/>
+    </dgm:linClrLst>
+    <dgm:effectClrLst/>
+    <dgm:txLinClrLst/>
+    <dgm:txFillClrLst/>
+    <dgm:txEffectClrLst/>
+  </dgm:styleLbl>
+  <dgm:styleLbl name="asst3">
+    <dgm:fillClrLst>
+      <a:schemeClr val="accent3">
+        <a:alpha val="70000"/>
+      </a:schemeClr>
+    </dgm:fillClrLst>
+    <dgm:linClrLst meth="repeat">
+      <a:schemeClr val="lt1"/>
+    </dgm:linClrLst>
+    <dgm:effectClrLst/>
+    <dgm:txLinClrLst/>
+    <dgm:txFillClrLst/>
+    <dgm:txEffectClrLst/>
+  </dgm:styleLbl>
+  <dgm:styleLbl name="asst4">
+    <dgm:fillClrLst>
+      <a:schemeClr val="accent3">
+        <a:alpha val="50000"/>
+      </a:schemeClr>
+    </dgm:fillClrLst>
+    <dgm:linClrLst meth="repeat">
+      <a:schemeClr val="lt1"/>
+    </dgm:linClrLst>
+    <dgm:effectClrLst/>
+    <dgm:txLinClrLst/>
+    <dgm:txFillClrLst/>
+    <dgm:txEffectClrLst/>
+  </dgm:styleLbl>
+  <dgm:styleLbl name="parChTrans2D1">
+    <dgm:fillClrLst meth="repeat">
+      <a:schemeClr val="accent3">
+        <a:shade val="80000"/>
+      </a:schemeClr>
+    </dgm:fillClrLst>
+    <dgm:linClrLst meth="repeat">
+      <a:schemeClr val="accent3">
+        <a:shade val="80000"/>
+      </a:schemeClr>
+    </dgm:linClrLst>
+    <dgm:effectClrLst/>
+    <dgm:txLinClrLst/>
+    <dgm:txFillClrLst/>
+    <dgm:txEffectClrLst/>
+  </dgm:styleLbl>
+  <dgm:styleLbl name="parChTrans2D2">
+    <dgm:fillClrLst meth="repeat">
+      <a:schemeClr val="accent3">
+        <a:tint val="90000"/>
+      </a:schemeClr>
+    </dgm:fillClrLst>
+    <dgm:linClrLst meth="repeat">
+      <a:schemeClr val="accent3">
+        <a:tint val="90000"/>
+      </a:schemeClr>
+    </dgm:linClrLst>
+    <dgm:effectClrLst/>
+    <dgm:txLinClrLst/>
+    <dgm:txFillClrLst/>
+    <dgm:txEffectClrLst/>
+  </dgm:styleLbl>
+  <dgm:styleLbl name="parChTrans2D3">
+    <dgm:fillClrLst meth="repeat">
+      <a:schemeClr val="accent3">
+        <a:tint val="70000"/>
+      </a:schemeClr>
+    </dgm:fillClrLst>
+    <dgm:linClrLst meth="repeat">
+      <a:schemeClr val="accent3">
+        <a:tint val="70000"/>
+      </a:schemeClr>
+    </dgm:linClrLst>
+    <dgm:effectClrLst/>
+    <dgm:txLinClrLst/>
+    <dgm:txFillClrLst/>
+    <dgm:txEffectClrLst/>
+  </dgm:styleLbl>
+  <dgm:styleLbl name="parChTrans2D4">
+    <dgm:fillClrLst meth="repeat">
+      <a:schemeClr val="accent3">
+        <a:tint val="50000"/>
+      </a:schemeClr>
+    </dgm:fillClrLst>
+    <dgm:linClrLst meth="repeat">
+      <a:schemeClr val="accent3">
+        <a:tint val="50000"/>
+      </a:schemeClr>
+    </dgm:linClrLst>
+    <dgm:effectClrLst/>
+    <dgm:txLinClrLst/>
+    <dgm:txFillClrLst meth="repeat">
+      <a:schemeClr val="dk1"/>
+    </dgm:txFillClrLst>
+    <dgm:txEffectClrLst/>
+  </dgm:styleLbl>
+  <dgm:styleLbl name="parChTrans1D1">
+    <dgm:fillClrLst meth="repeat">
+      <a:schemeClr val="accent3">
+        <a:shade val="80000"/>
+      </a:schemeClr>
+    </dgm:fillClrLst>
+    <dgm:linClrLst meth="repeat">
+      <a:schemeClr val="accent3">
+        <a:shade val="80000"/>
+      </a:schemeClr>
+    </dgm:linClrLst>
+    <dgm:effectClrLst/>
+    <dgm:txLinClrLst/>
+    <dgm:txFillClrLst meth="repeat">
+      <a:schemeClr val="tx1"/>
+    </dgm:txFillClrLst>
+    <dgm:txEffectClrLst/>
+  </dgm:styleLbl>
+  <dgm:styleLbl name="parChTrans1D2">
+    <dgm:fillClrLst meth="repeat">
+      <a:schemeClr val="accent3">
+        <a:tint val="90000"/>
+      </a:schemeClr>
+    </dgm:fillClrLst>
+    <dgm:linClrLst meth="repeat">
+      <a:schemeClr val="accent3">
+        <a:tint val="90000"/>
+      </a:schemeClr>
+    </dgm:linClrLst>
+    <dgm:effectClrLst/>
+    <dgm:txLinClrLst/>
+    <dgm:txFillClrLst meth="repeat">
+      <a:schemeClr val="tx1"/>
+    </dgm:txFillClrLst>
+    <dgm:txEffectClrLst/>
+  </dgm:styleLbl>
+  <dgm:styleLbl name="parChTrans1D3">
+    <dgm:fillClrLst meth="repeat">
+      <a:schemeClr val="accent3">
+        <a:tint val="70000"/>
+      </a:schemeClr>
+    </dgm:fillClrLst>
+    <dgm:linClrLst meth="repeat">
+      <a:schemeClr val="accent3">
+        <a:tint val="70000"/>
+      </a:schemeClr>
+    </dgm:linClrLst>
+    <dgm:effectClrLst/>
+    <dgm:txLinClrLst/>
+    <dgm:txFillClrLst meth="repeat">
+      <a:schemeClr val="tx1"/>
+    </dgm:txFillClrLst>
+    <dgm:txEffectClrLst/>
+  </dgm:styleLbl>
+  <dgm:styleLbl name="parChTrans1D4">
+    <dgm:fillClrLst meth="repeat">
+      <a:schemeClr val="accent3">
+        <a:tint val="50000"/>
+      </a:schemeClr>
+    </dgm:fillClrLst>
+    <dgm:linClrLst meth="repeat">
+      <a:schemeClr val="accent3">
+        <a:tint val="50000"/>
+      </a:schemeClr>
+    </dgm:linClrLst>
+    <dgm:effectClrLst/>
+    <dgm:txLinClrLst/>
+    <dgm:txFillClrLst meth="repeat">
+      <a:schemeClr val="tx1"/>
+    </dgm:txFillClrLst>
+    <dgm:txEffectClrLst/>
+  </dgm:styleLbl>
+  <dgm:styleLbl name="fgAcc1">
+    <dgm:fillClrLst meth="repeat">
+      <a:schemeClr val="lt1">
+        <a:alpha val="90000"/>
+      </a:schemeClr>
+    </dgm:fillClrLst>
+    <dgm:linClrLst>
+      <a:schemeClr val="accent3">
+        <a:alpha val="90000"/>
+      </a:schemeClr>
+      <a:schemeClr val="accent3">
+        <a:alpha val="50000"/>
+      </a:schemeClr>
+    </dgm:linClrLst>
+    <dgm:effectClrLst/>
+    <dgm:txLinClrLst/>
+    <dgm:txFillClrLst meth="repeat">
+      <a:schemeClr val="dk1"/>
+    </dgm:txFillClrLst>
+    <dgm:txEffectClrLst/>
+  </dgm:styleLbl>
+  <dgm:styleLbl name="conFgAcc1">
+    <dgm:fillClrLst meth="repeat">
+      <a:schemeClr val="lt1">
+        <a:alpha val="90000"/>
+      </a:schemeClr>
+    </dgm:fillClrLst>
+    <dgm:linClrLst>
+      <a:schemeClr val="accent3">
+        <a:alpha val="90000"/>
+      </a:schemeClr>
+      <a:schemeClr val="accent3">
+        <a:alpha val="50000"/>
+      </a:schemeClr>
+    </dgm:linClrLst>
+    <dgm:effectClrLst/>
+    <dgm:txLinClrLst/>
+    <dgm:txFillClrLst meth="repeat">
+      <a:schemeClr val="dk1"/>
+    </dgm:txFillClrLst>
+    <dgm:txEffectClrLst/>
+  </dgm:styleLbl>
+  <dgm:styleLbl name="alignAcc1">
+    <dgm:fillClrLst meth="repeat">
+      <a:schemeClr val="lt1">
+        <a:alpha val="90000"/>
+      </a:schemeClr>
+    </dgm:fillClrLst>
+    <dgm:linClrLst>
+      <a:schemeClr val="accent3">
+        <a:alpha val="90000"/>
+      </a:schemeClr>
+      <a:schemeClr val="accent3">
+        <a:alpha val="50000"/>
+      </a:schemeClr>
+    </dgm:linClrLst>
+    <dgm:effectClrLst/>
+    <dgm:txLinClrLst/>
+    <dgm:txFillClrLst meth="repeat">
+      <a:schemeClr val="dk1"/>
+    </dgm:txFillClrLst>
+    <dgm:txEffectClrLst/>
+  </dgm:styleLbl>
+  <dgm:styleLbl name="trAlignAcc1">
+    <dgm:fillClrLst meth="repeat">
+      <a:schemeClr val="lt1">
+        <a:alpha val="40000"/>
+      </a:schemeClr>
+    </dgm:fillClrLst>
+    <dgm:linClrLst>
+      <a:schemeClr val="accent3">
+        <a:alpha val="90000"/>
+      </a:schemeClr>
+      <a:schemeClr val="accent3">
+        <a:alpha val="50000"/>
+      </a:schemeClr>
+    </dgm:linClrLst>
+    <dgm:effectClrLst/>
+    <dgm:txLinClrLst/>
+    <dgm:txFillClrLst meth="repeat">
+      <a:schemeClr val="dk1"/>
+    </dgm:txFillClrLst>
+    <dgm:txEffectClrLst/>
+  </dgm:styleLbl>
+  <dgm:styleLbl name="bgAcc1">
+    <dgm:fillClrLst meth="repeat">
+      <a:schemeClr val="lt1">
+        <a:alpha val="90000"/>
+      </a:schemeClr>
+    </dgm:fillClrLst>
+    <dgm:linClrLst>
+      <a:schemeClr val="accent3">
+        <a:alpha val="90000"/>
+      </a:schemeClr>
+      <a:schemeClr val="accent3">
+        <a:alpha val="50000"/>
+      </a:schemeClr>
+    </dgm:linClrLst>
+    <dgm:effectClrLst/>
+    <dgm:txLinClrLst/>
+    <dgm:txFillClrLst meth="repeat">
+      <a:schemeClr val="dk1"/>
+    </dgm:txFillClrLst>
+    <dgm:txEffectClrLst/>
+  </dgm:styleLbl>
+  <dgm:styleLbl name="solidFgAcc1">
+    <dgm:fillClrLst meth="repeat">
+      <a:schemeClr val="lt1"/>
+    </dgm:fillClrLst>
+    <dgm:linClrLst>
+      <a:schemeClr val="accent3">
+        <a:alpha val="90000"/>
+      </a:schemeClr>
+      <a:schemeClr val="accent3">
+        <a:alpha val="50000"/>
+      </a:schemeClr>
+    </dgm:linClrLst>
+    <dgm:effectClrLst/>
+    <dgm:txLinClrLst/>
+    <dgm:txFillClrLst meth="repeat">
+      <a:schemeClr val="dk1"/>
+    </dgm:txFillClrLst>
+    <dgm:txEffectClrLst/>
+  </dgm:styleLbl>
+  <dgm:styleLbl name="solidAlignAcc1">
+    <dgm:fillClrLst meth="repeat">
+      <a:schemeClr val="lt1"/>
+    </dgm:fillClrLst>
+    <dgm:linClrLst meth="repeat">
+      <a:schemeClr val="accent3"/>
+    </dgm:linClrLst>
+    <dgm:effectClrLst/>
+    <dgm:txLinClrLst/>
+    <dgm:txFillClrLst meth="repeat">
+      <a:schemeClr val="dk1"/>
+    </dgm:txFillClrLst>
+    <dgm:txEffectClrLst/>
+  </dgm:styleLbl>
+  <dgm:styleLbl name="solidBgAcc1">
+    <dgm:fillClrLst meth="repeat">
+      <a:schemeClr val="lt1"/>
+    </dgm:fillClrLst>
+    <dgm:linClrLst meth="repeat">
+      <a:schemeClr val="accent3"/>
+    </dgm:linClrLst>
+    <dgm:effectClrLst/>
+    <dgm:txLinClrLst/>
+    <dgm:txFillClrLst meth="repeat">
+      <a:schemeClr val="dk1"/>
+    </dgm:txFillClrLst>
+    <dgm:txEffectClrLst/>
+  </dgm:styleLbl>
+  <dgm:styleLbl name="fgAccFollowNode1">
+    <dgm:fillClrLst>
+      <a:schemeClr val="accent3">
+        <a:alpha val="90000"/>
+        <a:tint val="40000"/>
+      </a:schemeClr>
+      <a:schemeClr val="accent3">
+        <a:alpha val="50000"/>
+        <a:tint val="40000"/>
+      </a:schemeClr>
+    </dgm:fillClrLst>
+    <dgm:linClrLst meth="repeat">
+      <a:schemeClr val="accent3">
+        <a:alpha val="90000"/>
+        <a:tint val="40000"/>
+      </a:schemeClr>
+    </dgm:linClrLst>
+    <dgm:effectClrLst/>
+    <dgm:txLinClrLst/>
+    <dgm:txFillClrLst meth="repeat">
+      <a:schemeClr val="dk1"/>
+    </dgm:txFillClrLst>
+    <dgm:txEffectClrLst/>
+  </dgm:styleLbl>
+  <dgm:styleLbl name="alignAccFollowNode1">
+    <dgm:fillClrLst meth="repeat">
+      <a:schemeClr val="accent3">
+        <a:alpha val="90000"/>
+        <a:tint val="40000"/>
+      </a:schemeClr>
+    </dgm:fillClrLst>
+    <dgm:linClrLst meth="repeat">
+      <a:schemeClr val="accent3">
+        <a:alpha val="90000"/>
+        <a:tint val="40000"/>
+      </a:schemeClr>
+    </dgm:linClrLst>
+    <dgm:effectClrLst/>
+    <dgm:txLinClrLst/>
+    <dgm:txFillClrLst meth="repeat">
+      <a:schemeClr val="dk1"/>
+    </dgm:txFillClrLst>
+    <dgm:txEffectClrLst/>
+  </dgm:styleLbl>
+  <dgm:styleLbl name="bgAccFollowNode1">
+    <dgm:fillClrLst meth="repeat">
+      <a:schemeClr val="accent3">
+        <a:alpha val="90000"/>
+        <a:tint val="40000"/>
+      </a:schemeClr>
+    </dgm:fillClrLst>
+    <dgm:linClrLst meth="repeat">
+      <a:schemeClr val="lt1"/>
+    </dgm:linClrLst>
+    <dgm:effectClrLst/>
+    <dgm:txLinClrLst/>
+    <dgm:txFillClrLst meth="repeat">
+      <a:schemeClr val="dk1"/>
+    </dgm:txFillClrLst>
+    <dgm:txEffectClrLst/>
+  </dgm:styleLbl>
+  <dgm:styleLbl name="fgAcc0">
+    <dgm:fillClrLst meth="repeat">
+      <a:schemeClr val="lt1">
+        <a:alpha val="90000"/>
+      </a:schemeClr>
+    </dgm:fillClrLst>
+    <dgm:linClrLst meth="repeat">
+      <a:schemeClr val="accent3">
+        <a:shade val="80000"/>
+      </a:schemeClr>
+    </dgm:linClrLst>
+    <dgm:effectClrLst/>
+    <dgm:txLinClrLst/>
+    <dgm:txFillClrLst meth="repeat">
+      <a:schemeClr val="dk1"/>
+    </dgm:txFillClrLst>
+    <dgm:txEffectClrLst/>
+  </dgm:styleLbl>
+  <dgm:styleLbl name="fgAcc2">
+    <dgm:fillClrLst meth="repeat">
+      <a:schemeClr val="lt1">
+        <a:alpha val="90000"/>
+      </a:schemeClr>
+    </dgm:fillClrLst>
+    <dgm:linClrLst meth="repeat">
+      <a:schemeClr val="accent3">
+        <a:tint val="90000"/>
+      </a:schemeClr>
+    </dgm:linClrLst>
+    <dgm:effectClrLst/>
+    <dgm:txLinClrLst/>
+    <dgm:txFillClrLst meth="repeat">
+      <a:schemeClr val="dk1"/>
+    </dgm:txFillClrLst>
+    <dgm:txEffectClrLst/>
+  </dgm:styleLbl>
+  <dgm:styleLbl name="fgAcc3">
+    <dgm:fillClrLst meth="repeat">
+      <a:schemeClr val="lt1">
+        <a:alpha val="90000"/>
+      </a:schemeClr>
+    </dgm:fillClrLst>
+    <dgm:linClrLst meth="repeat">
+      <a:schemeClr val="accent3">
+        <a:tint val="70000"/>
+      </a:schemeClr>
+    </dgm:linClrLst>
+    <dgm:effectClrLst/>
+    <dgm:txLinClrLst/>
+    <dgm:txFillClrLst meth="repeat">
+      <a:schemeClr val="dk1"/>
+    </dgm:txFillClrLst>
+    <dgm:txEffectClrLst/>
+  </dgm:styleLbl>
+  <dgm:styleLbl name="fgAcc4">
+    <dgm:fillClrLst meth="repeat">
+      <a:schemeClr val="lt1">
+        <a:alpha val="90000"/>
+      </a:schemeClr>
+    </dgm:fillClrLst>
+    <dgm:linClrLst meth="repeat">
+      <a:schemeClr val="accent3">
+        <a:tint val="50000"/>
+      </a:schemeClr>
+    </dgm:linClrLst>
+    <dgm:effectClrLst/>
+    <dgm:txLinClrLst/>
+    <dgm:txFillClrLst meth="repeat">
+      <a:schemeClr val="dk1"/>
+    </dgm:txFillClrLst>
+    <dgm:txEffectClrLst/>
+  </dgm:styleLbl>
+  <dgm:styleLbl name="bgShp">
+    <dgm:fillClrLst meth="repeat">
+      <a:schemeClr val="accent3">
+        <a:tint val="40000"/>
+      </a:schemeClr>
+    </dgm:fillClrLst>
+    <dgm:linClrLst meth="repeat">
+      <a:schemeClr val="dk1"/>
+    </dgm:linClrLst>
+    <dgm:effectClrLst/>
+    <dgm:txLinClrLst/>
+    <dgm:txFillClrLst meth="repeat">
+      <a:schemeClr val="dk1"/>
+    </dgm:txFillClrLst>
+    <dgm:txEffectClrLst/>
+  </dgm:styleLbl>
+  <dgm:styleLbl name="dkBgShp">
+    <dgm:fillClrLst meth="repeat">
+      <a:schemeClr val="accent3">
+        <a:shade val="90000"/>
+      </a:schemeClr>
+    </dgm:fillClrLst>
+    <dgm:linClrLst meth="repeat">
+      <a:schemeClr val="dk1"/>
+    </dgm:linClrLst>
+    <dgm:effectClrLst/>
+    <dgm:txLinClrLst/>
+    <dgm:txFillClrLst meth="repeat">
+      <a:schemeClr val="lt1"/>
+    </dgm:txFillClrLst>
+    <dgm:txEffectClrLst/>
+  </dgm:styleLbl>
+  <dgm:styleLbl name="trBgShp">
+    <dgm:fillClrLst meth="repeat">
+      <a:schemeClr val="accent3">
+        <a:tint val="50000"/>
+        <a:alpha val="40000"/>
+      </a:schemeClr>
+    </dgm:fillClrLst>
+    <dgm:linClrLst meth="repeat">
+      <a:schemeClr val="accent3"/>
+    </dgm:linClrLst>
+    <dgm:effectClrLst/>
+    <dgm:txLinClrLst/>
+    <dgm:txFillClrLst meth="repeat">
+      <a:schemeClr val="lt1"/>
+    </dgm:txFillClrLst>
+    <dgm:txEffectClrLst/>
+  </dgm:styleLbl>
+  <dgm:styleLbl name="fgShp">
+    <dgm:fillClrLst meth="repeat">
+      <a:schemeClr val="accent3">
+        <a:tint val="40000"/>
+      </a:schemeClr>
+    </dgm:fillClrLst>
+    <dgm:linClrLst meth="repeat">
+      <a:schemeClr val="lt1"/>
+    </dgm:linClrLst>
+    <dgm:effectClrLst/>
+    <dgm:txLinClrLst/>
+    <dgm:txFillClrLst meth="repeat">
+      <a:schemeClr val="dk1"/>
+    </dgm:txFillClrLst>
+    <dgm:txEffectClrLst/>
+  </dgm:styleLbl>
+  <dgm:styleLbl name="revTx">
+    <dgm:fillClrLst meth="repeat">
+      <a:schemeClr val="lt1">
+        <a:alpha val="0"/>
+      </a:schemeClr>
+    </dgm:fillClrLst>
+    <dgm:linClrLst meth="repeat">
+      <a:schemeClr val="dk1">
+        <a:alpha val="0"/>
+      </a:schemeClr>
+    </dgm:linClrLst>
+    <dgm:effectClrLst/>
+    <dgm:txLinClrLst/>
+    <dgm:txFillClrLst meth="repeat">
+      <a:schemeClr val="tx1"/>
+    </dgm:txFillClrLst>
+    <dgm:txEffectClrLst/>
+  </dgm:styleLbl>
+</dgm:colorsDef>
+</file>
+
+<file path=ppt/diagrams/data1.xml><?xml version="1.0" encoding="utf-8"?>
+<dgm:dataModel xmlns:dgm="http://schemas.openxmlformats.org/drawingml/2006/diagram" xmlns:a="http://schemas.openxmlformats.org/drawingml/2006/main">
+  <dgm:ptLst>
+    <dgm:pt modelId="{2E85DB82-0A5A-4664-991F-3EE0C0585002}" type="doc">
+      <dgm:prSet loTypeId="urn:microsoft.com/office/officeart/2011/layout/TabList" loCatId="list" qsTypeId="urn:microsoft.com/office/officeart/2005/8/quickstyle/simple1" qsCatId="simple" csTypeId="urn:microsoft.com/office/officeart/2005/8/colors/accent3_5" csCatId="accent3" phldr="1"/>
+      <dgm:spPr/>
+      <dgm:t>
+        <a:bodyPr/>
+        <a:lstStyle/>
+        <a:p>
+          <a:endParaRPr lang="en-US"/>
+        </a:p>
+      </dgm:t>
+    </dgm:pt>
+    <dgm:pt modelId="{34CCA8B3-5497-4C05-B3EF-2218444D9B1F}">
+      <dgm:prSet phldrT="[Text]"/>
+      <dgm:spPr/>
+      <dgm:t>
+        <a:bodyPr/>
+        <a:lstStyle/>
+        <a:p>
+          <a:r>
+            <a:rPr lang="sr-Latn-RS" dirty="0" smtClean="0"/>
+            <a:t>1.</a:t>
+          </a:r>
+          <a:endParaRPr lang="en-US" dirty="0"/>
+        </a:p>
+      </dgm:t>
+    </dgm:pt>
+    <dgm:pt modelId="{05CEE680-58EB-4F15-AA7B-4AB218051155}" type="parTrans" cxnId="{38B044E4-3330-4462-A1AB-638DD581336F}">
+      <dgm:prSet/>
+      <dgm:spPr/>
+      <dgm:t>
+        <a:bodyPr/>
+        <a:lstStyle/>
+        <a:p>
+          <a:endParaRPr lang="en-US"/>
+        </a:p>
+      </dgm:t>
+    </dgm:pt>
+    <dgm:pt modelId="{ECE35D75-161C-4F2D-B94E-554A23E0DF6F}" type="sibTrans" cxnId="{38B044E4-3330-4462-A1AB-638DD581336F}">
+      <dgm:prSet/>
+      <dgm:spPr/>
+      <dgm:t>
+        <a:bodyPr/>
+        <a:lstStyle/>
+        <a:p>
+          <a:endParaRPr lang="en-US"/>
+        </a:p>
+      </dgm:t>
+    </dgm:pt>
+    <dgm:pt modelId="{685E50CC-D0C4-46E7-8A06-EA5A709EC4FD}">
+      <dgm:prSet phldrT="[Text]" custT="1"/>
+      <dgm:spPr/>
+      <dgm:t>
+        <a:bodyPr/>
+        <a:lstStyle/>
+        <a:p>
+          <a:r>
+            <a:rPr lang="sr-Latn-RS" sz="1200" b="1" dirty="0" smtClean="0"/>
+            <a:t>Uklanjanje karakteristika sa niskom varijansom</a:t>
+          </a:r>
+          <a:endParaRPr lang="en-US" sz="1200" b="1" dirty="0"/>
+        </a:p>
+      </dgm:t>
+    </dgm:pt>
+    <dgm:pt modelId="{B5CB5329-5AF8-4F92-822F-ACC86CCD13C5}" type="parTrans" cxnId="{80707B0C-BCDD-40C2-80B0-4ABE17D27FA6}">
+      <dgm:prSet/>
+      <dgm:spPr/>
+      <dgm:t>
+        <a:bodyPr/>
+        <a:lstStyle/>
+        <a:p>
+          <a:endParaRPr lang="en-US"/>
+        </a:p>
+      </dgm:t>
+    </dgm:pt>
+    <dgm:pt modelId="{BB8E41C4-1756-4C05-97E4-B0109C9D155C}" type="sibTrans" cxnId="{80707B0C-BCDD-40C2-80B0-4ABE17D27FA6}">
+      <dgm:prSet/>
+      <dgm:spPr/>
+      <dgm:t>
+        <a:bodyPr/>
+        <a:lstStyle/>
+        <a:p>
+          <a:endParaRPr lang="en-US"/>
+        </a:p>
+      </dgm:t>
+    </dgm:pt>
+    <dgm:pt modelId="{318F9EB4-8EB4-4FD6-9CF2-1AF58C91CF4A}">
+      <dgm:prSet phldrT="[Text]" custT="1"/>
+      <dgm:spPr/>
+      <dgm:t>
+        <a:bodyPr/>
+        <a:lstStyle/>
+        <a:p>
+          <a:r>
+            <a:rPr lang="sr-Latn-RS" sz="1100" dirty="0" smtClean="0"/>
+            <a:t>Karakteristike koje se gotovo ne menjaju kroz skup podataka ne mogu biti korisne za predikciju, predstavljaju šum</a:t>
+          </a:r>
+          <a:endParaRPr lang="en-US" sz="1100" dirty="0"/>
+        </a:p>
+      </dgm:t>
+    </dgm:pt>
+    <dgm:pt modelId="{9B96E8F6-E40B-4786-A149-BEFFCECCB23F}" type="parTrans" cxnId="{AB273872-3B24-4C4A-B754-316CD5EC79CF}">
+      <dgm:prSet/>
+      <dgm:spPr/>
+      <dgm:t>
+        <a:bodyPr/>
+        <a:lstStyle/>
+        <a:p>
+          <a:endParaRPr lang="en-US"/>
+        </a:p>
+      </dgm:t>
+    </dgm:pt>
+    <dgm:pt modelId="{833E2CE9-4EDB-415F-8962-F987937DF33D}" type="sibTrans" cxnId="{AB273872-3B24-4C4A-B754-316CD5EC79CF}">
+      <dgm:prSet/>
+      <dgm:spPr/>
+      <dgm:t>
+        <a:bodyPr/>
+        <a:lstStyle/>
+        <a:p>
+          <a:endParaRPr lang="en-US"/>
+        </a:p>
+      </dgm:t>
+    </dgm:pt>
+    <dgm:pt modelId="{37570603-119C-4284-9BD9-45B0CD5DF827}">
+      <dgm:prSet phldrT="[Text]"/>
+      <dgm:spPr/>
+      <dgm:t>
+        <a:bodyPr/>
+        <a:lstStyle/>
+        <a:p>
+          <a:r>
+            <a:rPr lang="sr-Latn-RS" dirty="0" smtClean="0"/>
+            <a:t>2.</a:t>
+          </a:r>
+          <a:endParaRPr lang="en-US" dirty="0"/>
+        </a:p>
+      </dgm:t>
+    </dgm:pt>
+    <dgm:pt modelId="{4E0DEBF3-0FAE-499F-A9B2-4DD1482D1CB7}" type="parTrans" cxnId="{F546A181-95EB-4619-AB86-92848EAF69EE}">
+      <dgm:prSet/>
+      <dgm:spPr/>
+      <dgm:t>
+        <a:bodyPr/>
+        <a:lstStyle/>
+        <a:p>
+          <a:endParaRPr lang="en-US"/>
+        </a:p>
+      </dgm:t>
+    </dgm:pt>
+    <dgm:pt modelId="{3D3A4124-DC76-4AC3-A42B-49CE948AE3C1}" type="sibTrans" cxnId="{F546A181-95EB-4619-AB86-92848EAF69EE}">
+      <dgm:prSet/>
+      <dgm:spPr/>
+      <dgm:t>
+        <a:bodyPr/>
+        <a:lstStyle/>
+        <a:p>
+          <a:endParaRPr lang="en-US"/>
+        </a:p>
+      </dgm:t>
+    </dgm:pt>
+    <dgm:pt modelId="{C492C268-CE9B-4775-AB75-21802159D415}">
+      <dgm:prSet phldrT="[Text]" custT="1"/>
+      <dgm:spPr/>
+      <dgm:t>
+        <a:bodyPr/>
+        <a:lstStyle/>
+        <a:p>
+          <a:r>
+            <a:rPr lang="sr-Latn-RS" sz="1200" b="1" dirty="0" smtClean="0"/>
+            <a:t>Uklanjanje visokokorelisanih parova</a:t>
+          </a:r>
+          <a:endParaRPr lang="en-US" sz="1200" b="1" dirty="0"/>
+        </a:p>
+      </dgm:t>
+    </dgm:pt>
+    <dgm:pt modelId="{C18B0511-005E-4379-B392-0CA73DAF3583}" type="parTrans" cxnId="{39266F3D-226E-4E60-9EEB-47DC5ED7A33A}">
+      <dgm:prSet/>
+      <dgm:spPr/>
+      <dgm:t>
+        <a:bodyPr/>
+        <a:lstStyle/>
+        <a:p>
+          <a:endParaRPr lang="en-US"/>
+        </a:p>
+      </dgm:t>
+    </dgm:pt>
+    <dgm:pt modelId="{E100D2FE-0465-491C-B919-807D11B3E9FB}" type="sibTrans" cxnId="{39266F3D-226E-4E60-9EEB-47DC5ED7A33A}">
+      <dgm:prSet/>
+      <dgm:spPr/>
+      <dgm:t>
+        <a:bodyPr/>
+        <a:lstStyle/>
+        <a:p>
+          <a:endParaRPr lang="en-US"/>
+        </a:p>
+      </dgm:t>
+    </dgm:pt>
+    <dgm:pt modelId="{6DDF566C-C327-4CA9-8F22-053D9405FB39}">
+      <dgm:prSet phldrT="[Text]" custT="1"/>
+      <dgm:spPr/>
+      <dgm:t>
+        <a:bodyPr/>
+        <a:lstStyle/>
+        <a:p>
+          <a:r>
+            <a:rPr lang="sr-Latn-RS" sz="1100" dirty="0" smtClean="0"/>
+            <a:t>Multikolinearnost(dve karakteristike savršeno korelisane) otežava interpretaciju i smanjuje stabilnost modela</a:t>
+          </a:r>
+          <a:endParaRPr lang="en-US" sz="1100" dirty="0"/>
+        </a:p>
+      </dgm:t>
+    </dgm:pt>
+    <dgm:pt modelId="{883C1031-DFD7-4771-B8D9-0DE2DB4BA883}" type="parTrans" cxnId="{7FF13542-BE99-48C3-BC36-9EB67CBB249E}">
+      <dgm:prSet/>
+      <dgm:spPr/>
+      <dgm:t>
+        <a:bodyPr/>
+        <a:lstStyle/>
+        <a:p>
+          <a:endParaRPr lang="en-US"/>
+        </a:p>
+      </dgm:t>
+    </dgm:pt>
+    <dgm:pt modelId="{754A9ABD-20A0-4A07-A45A-57C89D346943}" type="sibTrans" cxnId="{7FF13542-BE99-48C3-BC36-9EB67CBB249E}">
+      <dgm:prSet/>
+      <dgm:spPr/>
+      <dgm:t>
+        <a:bodyPr/>
+        <a:lstStyle/>
+        <a:p>
+          <a:endParaRPr lang="en-US"/>
+        </a:p>
+      </dgm:t>
+    </dgm:pt>
+    <dgm:pt modelId="{A2F7B3E4-1A04-4E39-9B9E-655D70E54262}">
+      <dgm:prSet phldrT="[Text]"/>
+      <dgm:spPr/>
+      <dgm:t>
+        <a:bodyPr/>
+        <a:lstStyle/>
+        <a:p>
+          <a:r>
+            <a:rPr lang="sr-Latn-RS" dirty="0" smtClean="0"/>
+            <a:t>3.</a:t>
+          </a:r>
+          <a:endParaRPr lang="en-US" dirty="0"/>
+        </a:p>
+      </dgm:t>
+    </dgm:pt>
+    <dgm:pt modelId="{C680E737-B752-452D-A8C5-D6CA064BD505}" type="parTrans" cxnId="{66709E33-156C-4738-AAEA-A924FD2514DE}">
+      <dgm:prSet/>
+      <dgm:spPr/>
+      <dgm:t>
+        <a:bodyPr/>
+        <a:lstStyle/>
+        <a:p>
+          <a:endParaRPr lang="en-US"/>
+        </a:p>
+      </dgm:t>
+    </dgm:pt>
+    <dgm:pt modelId="{76D197F0-DFD0-4784-BDA3-0855E5090B6C}" type="sibTrans" cxnId="{66709E33-156C-4738-AAEA-A924FD2514DE}">
+      <dgm:prSet/>
+      <dgm:spPr/>
+      <dgm:t>
+        <a:bodyPr/>
+        <a:lstStyle/>
+        <a:p>
+          <a:endParaRPr lang="en-US"/>
+        </a:p>
+      </dgm:t>
+    </dgm:pt>
+    <dgm:pt modelId="{C5CA0BCE-E008-47F0-9D10-40BF1F0BD503}">
+      <dgm:prSet phldrT="[Text]" custT="1"/>
+      <dgm:spPr/>
+      <dgm:t>
+        <a:bodyPr/>
+        <a:lstStyle/>
+        <a:p>
+          <a:r>
+            <a:rPr lang="sr-Latn-RS" sz="1200" b="1" dirty="0" smtClean="0"/>
+            <a:t>Selekcija top 200 karakteristika</a:t>
+          </a:r>
+          <a:endParaRPr lang="en-US" sz="1200" b="1" dirty="0"/>
+        </a:p>
+      </dgm:t>
+    </dgm:pt>
+    <dgm:pt modelId="{18B4527C-02EE-4543-BA0C-3CFC6922CE28}" type="parTrans" cxnId="{A1F608DD-8C76-4B5C-96C5-DB5CC421DF98}">
+      <dgm:prSet/>
+      <dgm:spPr/>
+      <dgm:t>
+        <a:bodyPr/>
+        <a:lstStyle/>
+        <a:p>
+          <a:endParaRPr lang="en-US"/>
+        </a:p>
+      </dgm:t>
+    </dgm:pt>
+    <dgm:pt modelId="{886BD27A-C79A-4D5E-9280-EB46AE23F230}" type="sibTrans" cxnId="{A1F608DD-8C76-4B5C-96C5-DB5CC421DF98}">
+      <dgm:prSet/>
+      <dgm:spPr/>
+      <dgm:t>
+        <a:bodyPr/>
+        <a:lstStyle/>
+        <a:p>
+          <a:endParaRPr lang="en-US"/>
+        </a:p>
+      </dgm:t>
+    </dgm:pt>
+    <dgm:pt modelId="{13062411-9DBE-47D5-9172-A822B4356437}">
+      <dgm:prSet phldrT="[Text]"/>
+      <dgm:spPr/>
+      <dgm:t>
+        <a:bodyPr/>
+        <a:lstStyle/>
+        <a:p>
+          <a:r>
+            <a:rPr lang="sr-Latn-RS" dirty="0" smtClean="0"/>
+            <a:t>4.</a:t>
+          </a:r>
+          <a:endParaRPr lang="en-US" dirty="0"/>
+        </a:p>
+      </dgm:t>
+    </dgm:pt>
+    <dgm:pt modelId="{14D4698A-6A94-4109-A5F2-920F7B01D2BA}" type="parTrans" cxnId="{BC7816FD-2965-4249-A7BD-C4986C6FB682}">
+      <dgm:prSet/>
+      <dgm:spPr/>
+      <dgm:t>
+        <a:bodyPr/>
+        <a:lstStyle/>
+        <a:p>
+          <a:endParaRPr lang="en-US"/>
+        </a:p>
+      </dgm:t>
+    </dgm:pt>
+    <dgm:pt modelId="{FB00C96A-728E-4600-8DE3-CE4853209D28}" type="sibTrans" cxnId="{BC7816FD-2965-4249-A7BD-C4986C6FB682}">
+      <dgm:prSet/>
+      <dgm:spPr/>
+      <dgm:t>
+        <a:bodyPr/>
+        <a:lstStyle/>
+        <a:p>
+          <a:endParaRPr lang="en-US"/>
+        </a:p>
+      </dgm:t>
+    </dgm:pt>
+    <dgm:pt modelId="{EED958BA-DE83-44BD-9099-50F023E7879B}">
+      <dgm:prSet phldrT="[Text]" custT="1"/>
+      <dgm:spPr/>
+      <dgm:t>
+        <a:bodyPr/>
+        <a:lstStyle/>
+        <a:p>
+          <a:r>
+            <a:rPr lang="sr-Latn-RS" sz="1100" dirty="0" smtClean="0"/>
+            <a:t>Zadržavamo one karakteristike koje su najjače povezane sa ciljnom promenljivom pKi</a:t>
+          </a:r>
+          <a:endParaRPr lang="en-US" sz="1100" dirty="0"/>
+        </a:p>
+      </dgm:t>
+    </dgm:pt>
+    <dgm:pt modelId="{0FDC6BCF-2357-48A2-BF56-35B8ADF258D9}" type="parTrans" cxnId="{774FF241-DB13-4069-8AE8-5B437D004F8F}">
+      <dgm:prSet/>
+      <dgm:spPr/>
+      <dgm:t>
+        <a:bodyPr/>
+        <a:lstStyle/>
+        <a:p>
+          <a:endParaRPr lang="en-US"/>
+        </a:p>
+      </dgm:t>
+    </dgm:pt>
+    <dgm:pt modelId="{D2F42C31-E681-453E-A0EA-11084AD7E550}" type="sibTrans" cxnId="{774FF241-DB13-4069-8AE8-5B437D004F8F}">
+      <dgm:prSet/>
+      <dgm:spPr/>
+      <dgm:t>
+        <a:bodyPr/>
+        <a:lstStyle/>
+        <a:p>
+          <a:endParaRPr lang="en-US"/>
+        </a:p>
+      </dgm:t>
+    </dgm:pt>
+    <dgm:pt modelId="{D19763BC-30CF-4E2C-A356-E3CF9AC7630A}">
+      <dgm:prSet custT="1"/>
+      <dgm:spPr/>
+      <dgm:t>
+        <a:bodyPr/>
+        <a:lstStyle/>
+        <a:p>
+          <a:r>
+            <a:rPr lang="sr-Latn-RS" sz="1200" b="1" dirty="0" smtClean="0"/>
+            <a:t>PCA (Principal Component Analysis)</a:t>
+          </a:r>
+          <a:endParaRPr lang="en-US" sz="1200" b="1" dirty="0"/>
+        </a:p>
+      </dgm:t>
+    </dgm:pt>
+    <dgm:pt modelId="{B6408CB4-A2E6-44B0-BF6B-EACFF3B7F3DD}" type="parTrans" cxnId="{FCE460F7-9FEE-4EA5-9715-FA9DE521B352}">
+      <dgm:prSet/>
+      <dgm:spPr/>
+      <dgm:t>
+        <a:bodyPr/>
+        <a:lstStyle/>
+        <a:p>
+          <a:endParaRPr lang="en-US"/>
+        </a:p>
+      </dgm:t>
+    </dgm:pt>
+    <dgm:pt modelId="{D1868C77-D862-4528-9595-A7B1C29ABB6B}" type="sibTrans" cxnId="{FCE460F7-9FEE-4EA5-9715-FA9DE521B352}">
+      <dgm:prSet/>
+      <dgm:spPr/>
+      <dgm:t>
+        <a:bodyPr/>
+        <a:lstStyle/>
+        <a:p>
+          <a:endParaRPr lang="en-US"/>
+        </a:p>
+      </dgm:t>
+    </dgm:pt>
+    <dgm:pt modelId="{A5BFAAC7-90E5-4A12-96B7-0A5F5E064845}">
+      <dgm:prSet custT="1"/>
+      <dgm:spPr/>
+      <dgm:t>
+        <a:bodyPr/>
+        <a:lstStyle/>
+        <a:p>
+          <a:r>
+            <a:rPr lang="sr-Latn-RS" sz="1100" dirty="0" smtClean="0"/>
+            <a:t>Tehnika koja stvara nove karakteristike kao linearne kombinacije originalnih, pri čemu su one međusobno nekorelisane</a:t>
+          </a:r>
+          <a:endParaRPr lang="en-US" sz="1100" dirty="0"/>
+        </a:p>
+      </dgm:t>
+    </dgm:pt>
+    <dgm:pt modelId="{5D110C41-0A6D-49D5-A730-24939C337BC1}" type="parTrans" cxnId="{9848396D-D8EC-413D-9116-B45B927154BB}">
+      <dgm:prSet/>
+      <dgm:spPr/>
+      <dgm:t>
+        <a:bodyPr/>
+        <a:lstStyle/>
+        <a:p>
+          <a:endParaRPr lang="en-US"/>
+        </a:p>
+      </dgm:t>
+    </dgm:pt>
+    <dgm:pt modelId="{9ED8FAEA-63C6-4BD7-B6D9-7B069AA188A4}" type="sibTrans" cxnId="{9848396D-D8EC-413D-9116-B45B927154BB}">
+      <dgm:prSet/>
+      <dgm:spPr/>
+      <dgm:t>
+        <a:bodyPr/>
+        <a:lstStyle/>
+        <a:p>
+          <a:endParaRPr lang="en-US"/>
+        </a:p>
+      </dgm:t>
+    </dgm:pt>
+    <dgm:pt modelId="{680B0A9C-CB44-4B50-ABC2-AED7445462A7}">
+      <dgm:prSet phldrT="[Text]" custT="1"/>
+      <dgm:spPr/>
+      <dgm:t>
+        <a:bodyPr/>
+        <a:lstStyle/>
+        <a:p>
+          <a:r>
+            <a:rPr lang="sr-Latn-RS" sz="1100" dirty="0" smtClean="0"/>
+            <a:t>F-test predstavlja statistički test koji meri linearnu zavisnost između svake karakteristike i pKi</a:t>
+          </a:r>
+          <a:endParaRPr lang="en-US" sz="1100" dirty="0"/>
+        </a:p>
+      </dgm:t>
+    </dgm:pt>
+    <dgm:pt modelId="{0AB6392A-7F77-4AC0-A2A7-A0619E5E04CD}" type="parTrans" cxnId="{0F4D0236-816E-4E52-AE32-E6FBAA8931E2}">
+      <dgm:prSet/>
+      <dgm:spPr/>
+      <dgm:t>
+        <a:bodyPr/>
+        <a:lstStyle/>
+        <a:p>
+          <a:endParaRPr lang="en-US"/>
+        </a:p>
+      </dgm:t>
+    </dgm:pt>
+    <dgm:pt modelId="{A8844169-46F9-49E7-A502-03E6A29455E2}" type="sibTrans" cxnId="{0F4D0236-816E-4E52-AE32-E6FBAA8931E2}">
+      <dgm:prSet/>
+      <dgm:spPr/>
+      <dgm:t>
+        <a:bodyPr/>
+        <a:lstStyle/>
+        <a:p>
+          <a:endParaRPr lang="en-US"/>
+        </a:p>
+      </dgm:t>
+    </dgm:pt>
+    <dgm:pt modelId="{F6BCA459-8E38-45C4-B61D-A8BB55FB7C2C}">
+      <dgm:prSet phldrT="[Text]" custT="1"/>
+      <dgm:spPr/>
+      <dgm:t>
+        <a:bodyPr/>
+        <a:lstStyle/>
+        <a:p>
+          <a:r>
+            <a:rPr lang="sr-Latn-RS" sz="1100" dirty="0" smtClean="0"/>
+            <a:t>Varijansa je računata za svaku od 2265 karakteristika i uklanjane su one čija varijansa je manja od 0.01 nakon standardizacije</a:t>
+          </a:r>
+          <a:endParaRPr lang="en-US" sz="1100" dirty="0"/>
+        </a:p>
+      </dgm:t>
+    </dgm:pt>
+    <dgm:pt modelId="{26935F13-1AE9-4253-A0BC-F6E85B6875AB}" type="parTrans" cxnId="{2CEE2E93-3008-4A7F-A521-C11B5304A5DF}">
+      <dgm:prSet/>
+      <dgm:spPr/>
+      <dgm:t>
+        <a:bodyPr/>
+        <a:lstStyle/>
+        <a:p>
+          <a:endParaRPr lang="en-US"/>
+        </a:p>
+      </dgm:t>
+    </dgm:pt>
+    <dgm:pt modelId="{AAF18ED0-0C19-4B8F-947F-9C37E7C09F02}" type="sibTrans" cxnId="{2CEE2E93-3008-4A7F-A521-C11B5304A5DF}">
+      <dgm:prSet/>
+      <dgm:spPr/>
+      <dgm:t>
+        <a:bodyPr/>
+        <a:lstStyle/>
+        <a:p>
+          <a:endParaRPr lang="en-US"/>
+        </a:p>
+      </dgm:t>
+    </dgm:pt>
+    <dgm:pt modelId="{4828F347-F971-4CF3-A035-FCC0EC22222C}">
+      <dgm:prSet phldrT="[Text]" custT="1"/>
+      <dgm:spPr/>
+      <dgm:t>
+        <a:bodyPr/>
+        <a:lstStyle/>
+        <a:p>
+          <a:r>
+            <a:rPr lang="sr-Latn-RS" sz="1100" dirty="0" smtClean="0"/>
+            <a:t>Ovaj korak je uklonio 259 karakteristika (11.8%) </a:t>
+          </a:r>
+          <a:endParaRPr lang="en-US" sz="1100" dirty="0"/>
+        </a:p>
+      </dgm:t>
+    </dgm:pt>
+    <dgm:pt modelId="{240B439C-AF2B-42D1-8A95-9A16F7FE38BD}" type="parTrans" cxnId="{74204BDB-3C93-4817-9A71-278664781890}">
+      <dgm:prSet/>
+      <dgm:spPr/>
+      <dgm:t>
+        <a:bodyPr/>
+        <a:lstStyle/>
+        <a:p>
+          <a:endParaRPr lang="en-US"/>
+        </a:p>
+      </dgm:t>
+    </dgm:pt>
+    <dgm:pt modelId="{D669401C-9530-4C0C-9D12-CD9BA0C81B5E}" type="sibTrans" cxnId="{74204BDB-3C93-4817-9A71-278664781890}">
+      <dgm:prSet/>
+      <dgm:spPr/>
+      <dgm:t>
+        <a:bodyPr/>
+        <a:lstStyle/>
+        <a:p>
+          <a:endParaRPr lang="en-US"/>
+        </a:p>
+      </dgm:t>
+    </dgm:pt>
+    <dgm:pt modelId="{2614C4AA-F171-4399-BB44-9EC210E3C60B}">
+      <dgm:prSet phldrT="[Text]" custT="1"/>
+      <dgm:spPr/>
+      <dgm:t>
+        <a:bodyPr/>
+        <a:lstStyle/>
+        <a:p>
+          <a:r>
+            <a:rPr lang="sr-Latn-RS" sz="1100" dirty="0" smtClean="0"/>
+            <a:t>Nakon računanja Pearson-ovog koeficijenta korelacije, za svaki par karakteristika koji imaju korelaciju &gt;0.95 uklanjamo jednu iz para</a:t>
+          </a:r>
+          <a:endParaRPr lang="en-US" sz="1100" dirty="0"/>
+        </a:p>
+      </dgm:t>
+    </dgm:pt>
+    <dgm:pt modelId="{56803282-5470-402D-AFAA-C81B57B3F2FF}" type="parTrans" cxnId="{68F68DB3-D466-4B07-AF51-DE5CB00564ED}">
+      <dgm:prSet/>
+      <dgm:spPr/>
+      <dgm:t>
+        <a:bodyPr/>
+        <a:lstStyle/>
+        <a:p>
+          <a:endParaRPr lang="en-US"/>
+        </a:p>
+      </dgm:t>
+    </dgm:pt>
+    <dgm:pt modelId="{B31105D1-9798-4208-BC3E-6066E14E3023}" type="sibTrans" cxnId="{68F68DB3-D466-4B07-AF51-DE5CB00564ED}">
+      <dgm:prSet/>
+      <dgm:spPr/>
+      <dgm:t>
+        <a:bodyPr/>
+        <a:lstStyle/>
+        <a:p>
+          <a:endParaRPr lang="en-US"/>
+        </a:p>
+      </dgm:t>
+    </dgm:pt>
+    <dgm:pt modelId="{B23CB917-6823-4BC4-B94E-57B37A1988EF}">
+      <dgm:prSet phldrT="[Text]" custT="1"/>
+      <dgm:spPr/>
+      <dgm:t>
+        <a:bodyPr/>
+        <a:lstStyle/>
+        <a:p>
+          <a:r>
+            <a:rPr lang="sr-Latn-RS" sz="1100" dirty="0" smtClean="0"/>
+            <a:t>Uklanjamo onu sa manjom varijansom; Ovaj korak je uklonio 150 karakteristika (7.5%)</a:t>
+          </a:r>
+          <a:endParaRPr lang="en-US" sz="1100" dirty="0"/>
+        </a:p>
+      </dgm:t>
+    </dgm:pt>
+    <dgm:pt modelId="{D8D36557-219E-4A0F-8B68-DDFE34782F1F}" type="parTrans" cxnId="{121062CC-BC70-4589-9DC1-7F654192CFC5}">
+      <dgm:prSet/>
+      <dgm:spPr/>
+      <dgm:t>
+        <a:bodyPr/>
+        <a:lstStyle/>
+        <a:p>
+          <a:endParaRPr lang="en-US"/>
+        </a:p>
+      </dgm:t>
+    </dgm:pt>
+    <dgm:pt modelId="{32CF4CB4-AD8E-48A1-BB97-8E4FAEC7DBC9}" type="sibTrans" cxnId="{121062CC-BC70-4589-9DC1-7F654192CFC5}">
+      <dgm:prSet/>
+      <dgm:spPr/>
+      <dgm:t>
+        <a:bodyPr/>
+        <a:lstStyle/>
+        <a:p>
+          <a:endParaRPr lang="en-US"/>
+        </a:p>
+      </dgm:t>
+    </dgm:pt>
+    <dgm:pt modelId="{6343A636-FAC8-4A99-A9FC-68FC0A774988}">
+      <dgm:prSet phldrT="[Text]" custT="1"/>
+      <dgm:spPr/>
+      <dgm:t>
+        <a:bodyPr/>
+        <a:lstStyle/>
+        <a:p>
+          <a:r>
+            <a:rPr lang="sr-Latn-RS" sz="1100" dirty="0" smtClean="0"/>
+            <a:t>Bira se 200 karakteristika sa najvišim rezultatom f-testa, jer najznačajnije doprinose predviđanju afiniteta; Zadržano je 10.8% originalnih karakteristika</a:t>
+          </a:r>
+          <a:endParaRPr lang="en-US" sz="1100" dirty="0"/>
+        </a:p>
+      </dgm:t>
+    </dgm:pt>
+    <dgm:pt modelId="{178E2D84-F731-4A69-B111-C58686B6F457}" type="parTrans" cxnId="{E3A044EB-FF68-4537-9503-EEDC6EFBF81A}">
+      <dgm:prSet/>
+      <dgm:spPr/>
+      <dgm:t>
+        <a:bodyPr/>
+        <a:lstStyle/>
+        <a:p>
+          <a:endParaRPr lang="en-US"/>
+        </a:p>
+      </dgm:t>
+    </dgm:pt>
+    <dgm:pt modelId="{06458334-BE96-4AF8-AC03-8E7EAD048E70}" type="sibTrans" cxnId="{E3A044EB-FF68-4537-9503-EEDC6EFBF81A}">
+      <dgm:prSet/>
+      <dgm:spPr/>
+      <dgm:t>
+        <a:bodyPr/>
+        <a:lstStyle/>
+        <a:p>
+          <a:endParaRPr lang="en-US"/>
+        </a:p>
+      </dgm:t>
+    </dgm:pt>
+    <dgm:pt modelId="{D952C7CE-AC06-4063-91A1-F8B93A64B0D6}">
+      <dgm:prSet custT="1"/>
+      <dgm:spPr/>
+      <dgm:t>
+        <a:bodyPr/>
+        <a:lstStyle/>
+        <a:p>
+          <a:r>
+            <a:rPr lang="sr-Latn-RS" sz="1100" dirty="0" smtClean="0"/>
+            <a:t>Prvih nekoliko glavnih komponenti objašnjava najveći deo varijanse(MFP,fr_COO2,fr_ester grupe tipicne za inhibitore tripsina, qed)</a:t>
+          </a:r>
+          <a:endParaRPr lang="en-US" sz="1100" dirty="0"/>
+        </a:p>
+      </dgm:t>
+    </dgm:pt>
+    <dgm:pt modelId="{688BB4E9-5B30-4834-9FC1-3104CBF2C83C}" type="parTrans" cxnId="{06AF05BF-809F-4CFC-AC91-1317387AA4C3}">
+      <dgm:prSet/>
+      <dgm:spPr/>
+      <dgm:t>
+        <a:bodyPr/>
+        <a:lstStyle/>
+        <a:p>
+          <a:endParaRPr lang="en-US"/>
+        </a:p>
+      </dgm:t>
+    </dgm:pt>
+    <dgm:pt modelId="{AA1307EE-6284-40F0-8998-046157855C1F}" type="sibTrans" cxnId="{06AF05BF-809F-4CFC-AC91-1317387AA4C3}">
+      <dgm:prSet/>
+      <dgm:spPr/>
+      <dgm:t>
+        <a:bodyPr/>
+        <a:lstStyle/>
+        <a:p>
+          <a:endParaRPr lang="en-US"/>
+        </a:p>
+      </dgm:t>
+    </dgm:pt>
+    <dgm:pt modelId="{D9C8A83A-E845-4EDD-B995-F5D319E5EDBE}">
+      <dgm:prSet custT="1"/>
+      <dgm:spPr/>
+      <dgm:t>
+        <a:bodyPr/>
+        <a:lstStyle/>
+        <a:p>
+          <a:r>
+            <a:rPr lang="sr-Latn-RS" sz="1100" dirty="0" smtClean="0"/>
+            <a:t>Zadržano 100 komponenti koje objašnjavaju ~97% ukupne varijanse originalnih podataka; Matrica postaje N x 100</a:t>
+          </a:r>
+          <a:endParaRPr lang="en-US" sz="1100" dirty="0"/>
+        </a:p>
+      </dgm:t>
+    </dgm:pt>
+    <dgm:pt modelId="{486F4411-F05B-4723-BF50-132E9BABBC5D}" type="parTrans" cxnId="{F49C7BEB-140E-4B8F-BFAB-D6BCB2834567}">
+      <dgm:prSet/>
+      <dgm:spPr/>
+      <dgm:t>
+        <a:bodyPr/>
+        <a:lstStyle/>
+        <a:p>
+          <a:endParaRPr lang="en-US"/>
+        </a:p>
+      </dgm:t>
+    </dgm:pt>
+    <dgm:pt modelId="{633E2482-F25B-4D11-9BCA-C0DC44CF5CBD}" type="sibTrans" cxnId="{F49C7BEB-140E-4B8F-BFAB-D6BCB2834567}">
+      <dgm:prSet/>
+      <dgm:spPr/>
+      <dgm:t>
+        <a:bodyPr/>
+        <a:lstStyle/>
+        <a:p>
+          <a:endParaRPr lang="en-US"/>
+        </a:p>
+      </dgm:t>
+    </dgm:pt>
+    <dgm:pt modelId="{53E17F5E-667B-4B68-BE32-37D1B06DDF66}" type="pres">
+      <dgm:prSet presAssocID="{2E85DB82-0A5A-4664-991F-3EE0C0585002}" presName="Name0" presStyleCnt="0">
+        <dgm:presLayoutVars>
+          <dgm:chMax/>
+          <dgm:chPref val="3"/>
+          <dgm:dir/>
+          <dgm:animOne val="branch"/>
+          <dgm:animLvl val="lvl"/>
+        </dgm:presLayoutVars>
+      </dgm:prSet>
+      <dgm:spPr/>
+      <dgm:t>
+        <a:bodyPr/>
+        <a:lstStyle/>
+        <a:p>
+          <a:endParaRPr lang="en-US"/>
+        </a:p>
+      </dgm:t>
+    </dgm:pt>
+    <dgm:pt modelId="{D2C91A6F-8A63-486F-8549-2D38888BD511}" type="pres">
+      <dgm:prSet presAssocID="{34CCA8B3-5497-4C05-B3EF-2218444D9B1F}" presName="composite" presStyleCnt="0"/>
+      <dgm:spPr/>
+    </dgm:pt>
+    <dgm:pt modelId="{2E57DE71-353C-4BB9-812A-92313BED41E3}" type="pres">
+      <dgm:prSet presAssocID="{34CCA8B3-5497-4C05-B3EF-2218444D9B1F}" presName="FirstChild" presStyleLbl="revTx" presStyleIdx="0" presStyleCnt="8">
+        <dgm:presLayoutVars>
+          <dgm:chMax val="0"/>
+          <dgm:chPref val="0"/>
+          <dgm:bulletEnabled val="1"/>
+        </dgm:presLayoutVars>
+      </dgm:prSet>
+      <dgm:spPr/>
+      <dgm:t>
+        <a:bodyPr/>
+        <a:lstStyle/>
+        <a:p>
+          <a:endParaRPr lang="en-US"/>
+        </a:p>
+      </dgm:t>
+    </dgm:pt>
+    <dgm:pt modelId="{6DF5B695-1029-4246-9ED1-7C8C3B62AC4F}" type="pres">
+      <dgm:prSet presAssocID="{34CCA8B3-5497-4C05-B3EF-2218444D9B1F}" presName="Parent" presStyleLbl="alignNode1" presStyleIdx="0" presStyleCnt="4">
+        <dgm:presLayoutVars>
+          <dgm:chMax val="3"/>
+          <dgm:chPref val="3"/>
+          <dgm:bulletEnabled val="1"/>
+        </dgm:presLayoutVars>
+      </dgm:prSet>
+      <dgm:spPr/>
+      <dgm:t>
+        <a:bodyPr/>
+        <a:lstStyle/>
+        <a:p>
+          <a:endParaRPr lang="en-US"/>
+        </a:p>
+      </dgm:t>
+    </dgm:pt>
+    <dgm:pt modelId="{A6C34C38-03C3-4B66-BCD5-A9BF019899EB}" type="pres">
+      <dgm:prSet presAssocID="{34CCA8B3-5497-4C05-B3EF-2218444D9B1F}" presName="Accent" presStyleLbl="parChTrans1D1" presStyleIdx="0" presStyleCnt="4"/>
+      <dgm:spPr/>
+    </dgm:pt>
+    <dgm:pt modelId="{C215B042-956E-4627-AA17-E29263C22E6B}" type="pres">
+      <dgm:prSet presAssocID="{34CCA8B3-5497-4C05-B3EF-2218444D9B1F}" presName="Child" presStyleLbl="revTx" presStyleIdx="1" presStyleCnt="8" custScaleY="140990">
+        <dgm:presLayoutVars>
+          <dgm:chMax val="0"/>
+          <dgm:chPref val="0"/>
+          <dgm:bulletEnabled val="1"/>
+        </dgm:presLayoutVars>
+      </dgm:prSet>
+      <dgm:spPr/>
+      <dgm:t>
+        <a:bodyPr/>
+        <a:lstStyle/>
+        <a:p>
+          <a:endParaRPr lang="en-US"/>
+        </a:p>
+      </dgm:t>
+    </dgm:pt>
+    <dgm:pt modelId="{961A4E20-F732-478B-8DEA-D278D59C07FB}" type="pres">
+      <dgm:prSet presAssocID="{ECE35D75-161C-4F2D-B94E-554A23E0DF6F}" presName="sibTrans" presStyleCnt="0"/>
+      <dgm:spPr/>
+    </dgm:pt>
+    <dgm:pt modelId="{67A58B9E-7D62-4450-973A-ED1C7A157E7F}" type="pres">
+      <dgm:prSet presAssocID="{37570603-119C-4284-9BD9-45B0CD5DF827}" presName="composite" presStyleCnt="0"/>
+      <dgm:spPr/>
+    </dgm:pt>
+    <dgm:pt modelId="{00FDAF1E-8B88-42B4-86E0-20EF52805209}" type="pres">
+      <dgm:prSet presAssocID="{37570603-119C-4284-9BD9-45B0CD5DF827}" presName="FirstChild" presStyleLbl="revTx" presStyleIdx="2" presStyleCnt="8">
+        <dgm:presLayoutVars>
+          <dgm:chMax val="0"/>
+          <dgm:chPref val="0"/>
+          <dgm:bulletEnabled val="1"/>
+        </dgm:presLayoutVars>
+      </dgm:prSet>
+      <dgm:spPr/>
+      <dgm:t>
+        <a:bodyPr/>
+        <a:lstStyle/>
+        <a:p>
+          <a:endParaRPr lang="en-US"/>
+        </a:p>
+      </dgm:t>
+    </dgm:pt>
+    <dgm:pt modelId="{B56BB830-F1BE-4FB3-A2EC-CC962CD9619A}" type="pres">
+      <dgm:prSet presAssocID="{37570603-119C-4284-9BD9-45B0CD5DF827}" presName="Parent" presStyleLbl="alignNode1" presStyleIdx="1" presStyleCnt="4">
+        <dgm:presLayoutVars>
+          <dgm:chMax val="3"/>
+          <dgm:chPref val="3"/>
+          <dgm:bulletEnabled val="1"/>
+        </dgm:presLayoutVars>
+      </dgm:prSet>
+      <dgm:spPr/>
+      <dgm:t>
+        <a:bodyPr/>
+        <a:lstStyle/>
+        <a:p>
+          <a:endParaRPr lang="en-US"/>
+        </a:p>
+      </dgm:t>
+    </dgm:pt>
+    <dgm:pt modelId="{DCFAF63F-3677-4C1B-9E3A-EDA2E9A21F46}" type="pres">
+      <dgm:prSet presAssocID="{37570603-119C-4284-9BD9-45B0CD5DF827}" presName="Accent" presStyleLbl="parChTrans1D1" presStyleIdx="1" presStyleCnt="4"/>
+      <dgm:spPr/>
+    </dgm:pt>
+    <dgm:pt modelId="{50C4994C-246F-49DF-A10E-85F0C980E1CB}" type="pres">
+      <dgm:prSet presAssocID="{37570603-119C-4284-9BD9-45B0CD5DF827}" presName="Child" presStyleLbl="revTx" presStyleIdx="3" presStyleCnt="8" custScaleY="163560">
+        <dgm:presLayoutVars>
+          <dgm:chMax val="0"/>
+          <dgm:chPref val="0"/>
+          <dgm:bulletEnabled val="1"/>
+        </dgm:presLayoutVars>
+      </dgm:prSet>
+      <dgm:spPr/>
+      <dgm:t>
+        <a:bodyPr/>
+        <a:lstStyle/>
+        <a:p>
+          <a:endParaRPr lang="en-US"/>
+        </a:p>
+      </dgm:t>
+    </dgm:pt>
+    <dgm:pt modelId="{01091FF1-4C8F-457C-A0A4-FC44E4F4ED78}" type="pres">
+      <dgm:prSet presAssocID="{3D3A4124-DC76-4AC3-A42B-49CE948AE3C1}" presName="sibTrans" presStyleCnt="0"/>
+      <dgm:spPr/>
+    </dgm:pt>
+    <dgm:pt modelId="{5D88D6D7-C9FC-436C-98D2-2192DCF564CA}" type="pres">
+      <dgm:prSet presAssocID="{A2F7B3E4-1A04-4E39-9B9E-655D70E54262}" presName="composite" presStyleCnt="0"/>
+      <dgm:spPr/>
+    </dgm:pt>
+    <dgm:pt modelId="{58207433-EC0C-475E-988A-AB7CCF84A465}" type="pres">
+      <dgm:prSet presAssocID="{A2F7B3E4-1A04-4E39-9B9E-655D70E54262}" presName="FirstChild" presStyleLbl="revTx" presStyleIdx="4" presStyleCnt="8">
+        <dgm:presLayoutVars>
+          <dgm:chMax val="0"/>
+          <dgm:chPref val="0"/>
+          <dgm:bulletEnabled val="1"/>
+        </dgm:presLayoutVars>
+      </dgm:prSet>
+      <dgm:spPr/>
+      <dgm:t>
+        <a:bodyPr/>
+        <a:lstStyle/>
+        <a:p>
+          <a:endParaRPr lang="en-US"/>
+        </a:p>
+      </dgm:t>
+    </dgm:pt>
+    <dgm:pt modelId="{2B458D91-829F-4352-9252-17CCD901164B}" type="pres">
+      <dgm:prSet presAssocID="{A2F7B3E4-1A04-4E39-9B9E-655D70E54262}" presName="Parent" presStyleLbl="alignNode1" presStyleIdx="2" presStyleCnt="4">
+        <dgm:presLayoutVars>
+          <dgm:chMax val="3"/>
+          <dgm:chPref val="3"/>
+          <dgm:bulletEnabled val="1"/>
+        </dgm:presLayoutVars>
+      </dgm:prSet>
+      <dgm:spPr/>
+      <dgm:t>
+        <a:bodyPr/>
+        <a:lstStyle/>
+        <a:p>
+          <a:endParaRPr lang="en-US"/>
+        </a:p>
+      </dgm:t>
+    </dgm:pt>
+    <dgm:pt modelId="{85B4DA00-5104-4042-A9D8-43B194EC6575}" type="pres">
+      <dgm:prSet presAssocID="{A2F7B3E4-1A04-4E39-9B9E-655D70E54262}" presName="Accent" presStyleLbl="parChTrans1D1" presStyleIdx="2" presStyleCnt="4"/>
+      <dgm:spPr/>
+    </dgm:pt>
+    <dgm:pt modelId="{B63E7B57-37DA-4350-BB4E-5E42A1642807}" type="pres">
+      <dgm:prSet presAssocID="{A2F7B3E4-1A04-4E39-9B9E-655D70E54262}" presName="Child" presStyleLbl="revTx" presStyleIdx="5" presStyleCnt="8" custScaleY="170828">
+        <dgm:presLayoutVars>
+          <dgm:chMax val="0"/>
+          <dgm:chPref val="0"/>
+          <dgm:bulletEnabled val="1"/>
+        </dgm:presLayoutVars>
+      </dgm:prSet>
+      <dgm:spPr/>
+      <dgm:t>
+        <a:bodyPr/>
+        <a:lstStyle/>
+        <a:p>
+          <a:endParaRPr lang="en-US"/>
+        </a:p>
+      </dgm:t>
+    </dgm:pt>
+    <dgm:pt modelId="{6EB9537A-D251-402C-8042-AAFB2E0CFAD9}" type="pres">
+      <dgm:prSet presAssocID="{76D197F0-DFD0-4784-BDA3-0855E5090B6C}" presName="sibTrans" presStyleCnt="0"/>
+      <dgm:spPr/>
+    </dgm:pt>
+    <dgm:pt modelId="{2BED4A2F-B2F1-4FD7-923E-E6EE589F69CE}" type="pres">
+      <dgm:prSet presAssocID="{13062411-9DBE-47D5-9172-A822B4356437}" presName="composite" presStyleCnt="0"/>
+      <dgm:spPr/>
+    </dgm:pt>
+    <dgm:pt modelId="{D6B8BC5A-22D9-496D-977E-9013414381D7}" type="pres">
+      <dgm:prSet presAssocID="{13062411-9DBE-47D5-9172-A822B4356437}" presName="FirstChild" presStyleLbl="revTx" presStyleIdx="6" presStyleCnt="8">
+        <dgm:presLayoutVars>
+          <dgm:chMax val="0"/>
+          <dgm:chPref val="0"/>
+          <dgm:bulletEnabled val="1"/>
+        </dgm:presLayoutVars>
+      </dgm:prSet>
+      <dgm:spPr/>
+      <dgm:t>
+        <a:bodyPr/>
+        <a:lstStyle/>
+        <a:p>
+          <a:endParaRPr lang="en-US"/>
+        </a:p>
+      </dgm:t>
+    </dgm:pt>
+    <dgm:pt modelId="{E64ED944-5590-4852-9C87-33FC53CA5C83}" type="pres">
+      <dgm:prSet presAssocID="{13062411-9DBE-47D5-9172-A822B4356437}" presName="Parent" presStyleLbl="alignNode1" presStyleIdx="3" presStyleCnt="4">
+        <dgm:presLayoutVars>
+          <dgm:chMax val="3"/>
+          <dgm:chPref val="3"/>
+          <dgm:bulletEnabled val="1"/>
+        </dgm:presLayoutVars>
+      </dgm:prSet>
+      <dgm:spPr/>
+      <dgm:t>
+        <a:bodyPr/>
+        <a:lstStyle/>
+        <a:p>
+          <a:endParaRPr lang="en-US"/>
+        </a:p>
+      </dgm:t>
+    </dgm:pt>
+    <dgm:pt modelId="{8B6944D2-A271-4E46-AEE7-61E9B8D832FE}" type="pres">
+      <dgm:prSet presAssocID="{13062411-9DBE-47D5-9172-A822B4356437}" presName="Accent" presStyleLbl="parChTrans1D1" presStyleIdx="3" presStyleCnt="4"/>
+      <dgm:spPr/>
+    </dgm:pt>
+    <dgm:pt modelId="{1315CD1F-A4E8-4CA8-B6CD-396F0B977DAC}" type="pres">
+      <dgm:prSet presAssocID="{13062411-9DBE-47D5-9172-A822B4356437}" presName="Child" presStyleLbl="revTx" presStyleIdx="7" presStyleCnt="8" custScaleY="134489">
+        <dgm:presLayoutVars>
+          <dgm:chMax val="0"/>
+          <dgm:chPref val="0"/>
+          <dgm:bulletEnabled val="1"/>
+        </dgm:presLayoutVars>
+      </dgm:prSet>
+      <dgm:spPr/>
+      <dgm:t>
+        <a:bodyPr/>
+        <a:lstStyle/>
+        <a:p>
+          <a:endParaRPr lang="en-US"/>
+        </a:p>
+      </dgm:t>
+    </dgm:pt>
+  </dgm:ptLst>
+  <dgm:cxnLst>
+    <dgm:cxn modelId="{26363667-9D03-4770-AFE9-631CE5CFF117}" type="presOf" srcId="{318F9EB4-8EB4-4FD6-9CF2-1AF58C91CF4A}" destId="{C215B042-956E-4627-AA17-E29263C22E6B}" srcOrd="0" destOrd="0" presId="urn:microsoft.com/office/officeart/2011/layout/TabList"/>
+    <dgm:cxn modelId="{39266F3D-226E-4E60-9EEB-47DC5ED7A33A}" srcId="{37570603-119C-4284-9BD9-45B0CD5DF827}" destId="{C492C268-CE9B-4775-AB75-21802159D415}" srcOrd="0" destOrd="0" parTransId="{C18B0511-005E-4379-B392-0CA73DAF3583}" sibTransId="{E100D2FE-0465-491C-B919-807D11B3E9FB}"/>
+    <dgm:cxn modelId="{702712D4-05BC-40D1-87BE-B3E7E08CA4FA}" type="presOf" srcId="{F6BCA459-8E38-45C4-B61D-A8BB55FB7C2C}" destId="{C215B042-956E-4627-AA17-E29263C22E6B}" srcOrd="0" destOrd="1" presId="urn:microsoft.com/office/officeart/2011/layout/TabList"/>
+    <dgm:cxn modelId="{5843BD16-B75C-47B0-85EB-0663B44CCF8E}" type="presOf" srcId="{A2F7B3E4-1A04-4E39-9B9E-655D70E54262}" destId="{2B458D91-829F-4352-9252-17CCD901164B}" srcOrd="0" destOrd="0" presId="urn:microsoft.com/office/officeart/2011/layout/TabList"/>
+    <dgm:cxn modelId="{65EEE0DB-029A-48F9-A3B8-ED96F97D98DC}" type="presOf" srcId="{13062411-9DBE-47D5-9172-A822B4356437}" destId="{E64ED944-5590-4852-9C87-33FC53CA5C83}" srcOrd="0" destOrd="0" presId="urn:microsoft.com/office/officeart/2011/layout/TabList"/>
+    <dgm:cxn modelId="{F546A181-95EB-4619-AB86-92848EAF69EE}" srcId="{2E85DB82-0A5A-4664-991F-3EE0C0585002}" destId="{37570603-119C-4284-9BD9-45B0CD5DF827}" srcOrd="1" destOrd="0" parTransId="{4E0DEBF3-0FAE-499F-A9B2-4DD1482D1CB7}" sibTransId="{3D3A4124-DC76-4AC3-A42B-49CE948AE3C1}"/>
+    <dgm:cxn modelId="{CB8E60D7-58E5-43BB-B371-92146E9A9229}" type="presOf" srcId="{B23CB917-6823-4BC4-B94E-57B37A1988EF}" destId="{50C4994C-246F-49DF-A10E-85F0C980E1CB}" srcOrd="0" destOrd="2" presId="urn:microsoft.com/office/officeart/2011/layout/TabList"/>
+    <dgm:cxn modelId="{2CEE2E93-3008-4A7F-A521-C11B5304A5DF}" srcId="{34CCA8B3-5497-4C05-B3EF-2218444D9B1F}" destId="{F6BCA459-8E38-45C4-B61D-A8BB55FB7C2C}" srcOrd="2" destOrd="0" parTransId="{26935F13-1AE9-4253-A0BC-F6E85B6875AB}" sibTransId="{AAF18ED0-0C19-4B8F-947F-9C37E7C09F02}"/>
+    <dgm:cxn modelId="{B18C269D-107E-45A1-8B41-863A4C12DDE3}" type="presOf" srcId="{2614C4AA-F171-4399-BB44-9EC210E3C60B}" destId="{50C4994C-246F-49DF-A10E-85F0C980E1CB}" srcOrd="0" destOrd="1" presId="urn:microsoft.com/office/officeart/2011/layout/TabList"/>
+    <dgm:cxn modelId="{2C74FD9B-47B1-408A-A60F-4114E2B0A5D2}" type="presOf" srcId="{A5BFAAC7-90E5-4A12-96B7-0A5F5E064845}" destId="{1315CD1F-A4E8-4CA8-B6CD-396F0B977DAC}" srcOrd="0" destOrd="0" presId="urn:microsoft.com/office/officeart/2011/layout/TabList"/>
+    <dgm:cxn modelId="{06AF05BF-809F-4CFC-AC91-1317387AA4C3}" srcId="{13062411-9DBE-47D5-9172-A822B4356437}" destId="{D952C7CE-AC06-4063-91A1-F8B93A64B0D6}" srcOrd="2" destOrd="0" parTransId="{688BB4E9-5B30-4834-9FC1-3104CBF2C83C}" sibTransId="{AA1307EE-6284-40F0-8998-046157855C1F}"/>
+    <dgm:cxn modelId="{139D624C-9198-4D53-B01D-E27A79F308B9}" type="presOf" srcId="{37570603-119C-4284-9BD9-45B0CD5DF827}" destId="{B56BB830-F1BE-4FB3-A2EC-CC962CD9619A}" srcOrd="0" destOrd="0" presId="urn:microsoft.com/office/officeart/2011/layout/TabList"/>
+    <dgm:cxn modelId="{AB273872-3B24-4C4A-B754-316CD5EC79CF}" srcId="{34CCA8B3-5497-4C05-B3EF-2218444D9B1F}" destId="{318F9EB4-8EB4-4FD6-9CF2-1AF58C91CF4A}" srcOrd="1" destOrd="0" parTransId="{9B96E8F6-E40B-4786-A149-BEFFCECCB23F}" sibTransId="{833E2CE9-4EDB-415F-8962-F987937DF33D}"/>
+    <dgm:cxn modelId="{68F68DB3-D466-4B07-AF51-DE5CB00564ED}" srcId="{37570603-119C-4284-9BD9-45B0CD5DF827}" destId="{2614C4AA-F171-4399-BB44-9EC210E3C60B}" srcOrd="2" destOrd="0" parTransId="{56803282-5470-402D-AFAA-C81B57B3F2FF}" sibTransId="{B31105D1-9798-4208-BC3E-6066E14E3023}"/>
+    <dgm:cxn modelId="{38B044E4-3330-4462-A1AB-638DD581336F}" srcId="{2E85DB82-0A5A-4664-991F-3EE0C0585002}" destId="{34CCA8B3-5497-4C05-B3EF-2218444D9B1F}" srcOrd="0" destOrd="0" parTransId="{05CEE680-58EB-4F15-AA7B-4AB218051155}" sibTransId="{ECE35D75-161C-4F2D-B94E-554A23E0DF6F}"/>
+    <dgm:cxn modelId="{72AF0FA9-CFBC-4185-AF27-626B22352EED}" type="presOf" srcId="{D9C8A83A-E845-4EDD-B995-F5D319E5EDBE}" destId="{1315CD1F-A4E8-4CA8-B6CD-396F0B977DAC}" srcOrd="0" destOrd="2" presId="urn:microsoft.com/office/officeart/2011/layout/TabList"/>
+    <dgm:cxn modelId="{FCE460F7-9FEE-4EA5-9715-FA9DE521B352}" srcId="{13062411-9DBE-47D5-9172-A822B4356437}" destId="{D19763BC-30CF-4E2C-A356-E3CF9AC7630A}" srcOrd="0" destOrd="0" parTransId="{B6408CB4-A2E6-44B0-BF6B-EACFF3B7F3DD}" sibTransId="{D1868C77-D862-4528-9595-A7B1C29ABB6B}"/>
+    <dgm:cxn modelId="{80707B0C-BCDD-40C2-80B0-4ABE17D27FA6}" srcId="{34CCA8B3-5497-4C05-B3EF-2218444D9B1F}" destId="{685E50CC-D0C4-46E7-8A06-EA5A709EC4FD}" srcOrd="0" destOrd="0" parTransId="{B5CB5329-5AF8-4F92-822F-ACC86CCD13C5}" sibTransId="{BB8E41C4-1756-4C05-97E4-B0109C9D155C}"/>
+    <dgm:cxn modelId="{D69F729E-E8F1-4B11-BDE9-5B2146C59E81}" type="presOf" srcId="{D19763BC-30CF-4E2C-A356-E3CF9AC7630A}" destId="{D6B8BC5A-22D9-496D-977E-9013414381D7}" srcOrd="0" destOrd="0" presId="urn:microsoft.com/office/officeart/2011/layout/TabList"/>
+    <dgm:cxn modelId="{121062CC-BC70-4589-9DC1-7F654192CFC5}" srcId="{37570603-119C-4284-9BD9-45B0CD5DF827}" destId="{B23CB917-6823-4BC4-B94E-57B37A1988EF}" srcOrd="3" destOrd="0" parTransId="{D8D36557-219E-4A0F-8B68-DDFE34782F1F}" sibTransId="{32CF4CB4-AD8E-48A1-BB97-8E4FAEC7DBC9}"/>
+    <dgm:cxn modelId="{CC64C40E-B325-4962-9518-2EB3E6003FE5}" type="presOf" srcId="{EED958BA-DE83-44BD-9099-50F023E7879B}" destId="{B63E7B57-37DA-4350-BB4E-5E42A1642807}" srcOrd="0" destOrd="0" presId="urn:microsoft.com/office/officeart/2011/layout/TabList"/>
+    <dgm:cxn modelId="{240757ED-866B-41EA-BDE9-58982995878F}" type="presOf" srcId="{6343A636-FAC8-4A99-A9FC-68FC0A774988}" destId="{B63E7B57-37DA-4350-BB4E-5E42A1642807}" srcOrd="0" destOrd="2" presId="urn:microsoft.com/office/officeart/2011/layout/TabList"/>
+    <dgm:cxn modelId="{BC7816FD-2965-4249-A7BD-C4986C6FB682}" srcId="{2E85DB82-0A5A-4664-991F-3EE0C0585002}" destId="{13062411-9DBE-47D5-9172-A822B4356437}" srcOrd="3" destOrd="0" parTransId="{14D4698A-6A94-4109-A5F2-920F7B01D2BA}" sibTransId="{FB00C96A-728E-4600-8DE3-CE4853209D28}"/>
+    <dgm:cxn modelId="{F49C7BEB-140E-4B8F-BFAB-D6BCB2834567}" srcId="{13062411-9DBE-47D5-9172-A822B4356437}" destId="{D9C8A83A-E845-4EDD-B995-F5D319E5EDBE}" srcOrd="3" destOrd="0" parTransId="{486F4411-F05B-4723-BF50-132E9BABBC5D}" sibTransId="{633E2482-F25B-4D11-9BCA-C0DC44CF5CBD}"/>
+    <dgm:cxn modelId="{4DF572E6-4C4C-46AC-A20C-24239B62346C}" type="presOf" srcId="{2E85DB82-0A5A-4664-991F-3EE0C0585002}" destId="{53E17F5E-667B-4B68-BE32-37D1B06DDF66}" srcOrd="0" destOrd="0" presId="urn:microsoft.com/office/officeart/2011/layout/TabList"/>
+    <dgm:cxn modelId="{D4509790-02C6-4094-BC70-23C4C62D6783}" type="presOf" srcId="{4828F347-F971-4CF3-A035-FCC0EC22222C}" destId="{C215B042-956E-4627-AA17-E29263C22E6B}" srcOrd="0" destOrd="2" presId="urn:microsoft.com/office/officeart/2011/layout/TabList"/>
+    <dgm:cxn modelId="{74204BDB-3C93-4817-9A71-278664781890}" srcId="{34CCA8B3-5497-4C05-B3EF-2218444D9B1F}" destId="{4828F347-F971-4CF3-A035-FCC0EC22222C}" srcOrd="3" destOrd="0" parTransId="{240B439C-AF2B-42D1-8A95-9A16F7FE38BD}" sibTransId="{D669401C-9530-4C0C-9D12-CD9BA0C81B5E}"/>
+    <dgm:cxn modelId="{C9CA2958-72BD-49D7-B108-D388F2481E1F}" type="presOf" srcId="{C5CA0BCE-E008-47F0-9D10-40BF1F0BD503}" destId="{58207433-EC0C-475E-988A-AB7CCF84A465}" srcOrd="0" destOrd="0" presId="urn:microsoft.com/office/officeart/2011/layout/TabList"/>
+    <dgm:cxn modelId="{7FF13542-BE99-48C3-BC36-9EB67CBB249E}" srcId="{37570603-119C-4284-9BD9-45B0CD5DF827}" destId="{6DDF566C-C327-4CA9-8F22-053D9405FB39}" srcOrd="1" destOrd="0" parTransId="{883C1031-DFD7-4771-B8D9-0DE2DB4BA883}" sibTransId="{754A9ABD-20A0-4A07-A45A-57C89D346943}"/>
+    <dgm:cxn modelId="{82373C04-ED08-406A-B569-4ADB8502F2D9}" type="presOf" srcId="{D952C7CE-AC06-4063-91A1-F8B93A64B0D6}" destId="{1315CD1F-A4E8-4CA8-B6CD-396F0B977DAC}" srcOrd="0" destOrd="1" presId="urn:microsoft.com/office/officeart/2011/layout/TabList"/>
+    <dgm:cxn modelId="{5612D6B7-42A4-49AD-9A70-3668614A9222}" type="presOf" srcId="{6DDF566C-C327-4CA9-8F22-053D9405FB39}" destId="{50C4994C-246F-49DF-A10E-85F0C980E1CB}" srcOrd="0" destOrd="0" presId="urn:microsoft.com/office/officeart/2011/layout/TabList"/>
+    <dgm:cxn modelId="{66709E33-156C-4738-AAEA-A924FD2514DE}" srcId="{2E85DB82-0A5A-4664-991F-3EE0C0585002}" destId="{A2F7B3E4-1A04-4E39-9B9E-655D70E54262}" srcOrd="2" destOrd="0" parTransId="{C680E737-B752-452D-A8C5-D6CA064BD505}" sibTransId="{76D197F0-DFD0-4784-BDA3-0855E5090B6C}"/>
+    <dgm:cxn modelId="{31EF0541-E7A9-4CE0-96EC-2215D30FD2BA}" type="presOf" srcId="{685E50CC-D0C4-46E7-8A06-EA5A709EC4FD}" destId="{2E57DE71-353C-4BB9-812A-92313BED41E3}" srcOrd="0" destOrd="0" presId="urn:microsoft.com/office/officeart/2011/layout/TabList"/>
+    <dgm:cxn modelId="{0F4D0236-816E-4E52-AE32-E6FBAA8931E2}" srcId="{A2F7B3E4-1A04-4E39-9B9E-655D70E54262}" destId="{680B0A9C-CB44-4B50-ABC2-AED7445462A7}" srcOrd="2" destOrd="0" parTransId="{0AB6392A-7F77-4AC0-A2A7-A0619E5E04CD}" sibTransId="{A8844169-46F9-49E7-A502-03E6A29455E2}"/>
+    <dgm:cxn modelId="{9848396D-D8EC-413D-9116-B45B927154BB}" srcId="{13062411-9DBE-47D5-9172-A822B4356437}" destId="{A5BFAAC7-90E5-4A12-96B7-0A5F5E064845}" srcOrd="1" destOrd="0" parTransId="{5D110C41-0A6D-49D5-A730-24939C337BC1}" sibTransId="{9ED8FAEA-63C6-4BD7-B6D9-7B069AA188A4}"/>
+    <dgm:cxn modelId="{774FF241-DB13-4069-8AE8-5B437D004F8F}" srcId="{A2F7B3E4-1A04-4E39-9B9E-655D70E54262}" destId="{EED958BA-DE83-44BD-9099-50F023E7879B}" srcOrd="1" destOrd="0" parTransId="{0FDC6BCF-2357-48A2-BF56-35B8ADF258D9}" sibTransId="{D2F42C31-E681-453E-A0EA-11084AD7E550}"/>
+    <dgm:cxn modelId="{18177139-E5E4-4A82-B4CB-1F045BFBCC0C}" type="presOf" srcId="{680B0A9C-CB44-4B50-ABC2-AED7445462A7}" destId="{B63E7B57-37DA-4350-BB4E-5E42A1642807}" srcOrd="0" destOrd="1" presId="urn:microsoft.com/office/officeart/2011/layout/TabList"/>
+    <dgm:cxn modelId="{0B75C79B-A41D-47E7-A515-62705BFCC412}" type="presOf" srcId="{34CCA8B3-5497-4C05-B3EF-2218444D9B1F}" destId="{6DF5B695-1029-4246-9ED1-7C8C3B62AC4F}" srcOrd="0" destOrd="0" presId="urn:microsoft.com/office/officeart/2011/layout/TabList"/>
+    <dgm:cxn modelId="{A1F608DD-8C76-4B5C-96C5-DB5CC421DF98}" srcId="{A2F7B3E4-1A04-4E39-9B9E-655D70E54262}" destId="{C5CA0BCE-E008-47F0-9D10-40BF1F0BD503}" srcOrd="0" destOrd="0" parTransId="{18B4527C-02EE-4543-BA0C-3CFC6922CE28}" sibTransId="{886BD27A-C79A-4D5E-9280-EB46AE23F230}"/>
+    <dgm:cxn modelId="{A65CF559-0CA1-4976-A0F6-787C2F3A4F47}" type="presOf" srcId="{C492C268-CE9B-4775-AB75-21802159D415}" destId="{00FDAF1E-8B88-42B4-86E0-20EF52805209}" srcOrd="0" destOrd="0" presId="urn:microsoft.com/office/officeart/2011/layout/TabList"/>
+    <dgm:cxn modelId="{E3A044EB-FF68-4537-9503-EEDC6EFBF81A}" srcId="{A2F7B3E4-1A04-4E39-9B9E-655D70E54262}" destId="{6343A636-FAC8-4A99-A9FC-68FC0A774988}" srcOrd="3" destOrd="0" parTransId="{178E2D84-F731-4A69-B111-C58686B6F457}" sibTransId="{06458334-BE96-4AF8-AC03-8E7EAD048E70}"/>
+    <dgm:cxn modelId="{28AB6044-9011-4FDD-91C7-B0086DBA4665}" type="presParOf" srcId="{53E17F5E-667B-4B68-BE32-37D1B06DDF66}" destId="{D2C91A6F-8A63-486F-8549-2D38888BD511}" srcOrd="0" destOrd="0" presId="urn:microsoft.com/office/officeart/2011/layout/TabList"/>
+    <dgm:cxn modelId="{18C089C5-A263-4A35-B82F-440131814EE2}" type="presParOf" srcId="{D2C91A6F-8A63-486F-8549-2D38888BD511}" destId="{2E57DE71-353C-4BB9-812A-92313BED41E3}" srcOrd="0" destOrd="0" presId="urn:microsoft.com/office/officeart/2011/layout/TabList"/>
+    <dgm:cxn modelId="{010264F4-081D-4E60-A512-2118FC1226D8}" type="presParOf" srcId="{D2C91A6F-8A63-486F-8549-2D38888BD511}" destId="{6DF5B695-1029-4246-9ED1-7C8C3B62AC4F}" srcOrd="1" destOrd="0" presId="urn:microsoft.com/office/officeart/2011/layout/TabList"/>
+    <dgm:cxn modelId="{E0208305-6AA4-4599-A71B-0E91F803DE0A}" type="presParOf" srcId="{D2C91A6F-8A63-486F-8549-2D38888BD511}" destId="{A6C34C38-03C3-4B66-BCD5-A9BF019899EB}" srcOrd="2" destOrd="0" presId="urn:microsoft.com/office/officeart/2011/layout/TabList"/>
+    <dgm:cxn modelId="{4578D6A3-1B7C-4E97-A2B0-C7A7ED84DECA}" type="presParOf" srcId="{53E17F5E-667B-4B68-BE32-37D1B06DDF66}" destId="{C215B042-956E-4627-AA17-E29263C22E6B}" srcOrd="1" destOrd="0" presId="urn:microsoft.com/office/officeart/2011/layout/TabList"/>
+    <dgm:cxn modelId="{EC418B2C-A73D-4850-AD27-21DB4721CA75}" type="presParOf" srcId="{53E17F5E-667B-4B68-BE32-37D1B06DDF66}" destId="{961A4E20-F732-478B-8DEA-D278D59C07FB}" srcOrd="2" destOrd="0" presId="urn:microsoft.com/office/officeart/2011/layout/TabList"/>
+    <dgm:cxn modelId="{C1E4A140-C5B4-4D7D-B5A5-6B50CC2FD3A9}" type="presParOf" srcId="{53E17F5E-667B-4B68-BE32-37D1B06DDF66}" destId="{67A58B9E-7D62-4450-973A-ED1C7A157E7F}" srcOrd="3" destOrd="0" presId="urn:microsoft.com/office/officeart/2011/layout/TabList"/>
+    <dgm:cxn modelId="{31C9628B-505A-4520-BBDF-3DA5B5094ACD}" type="presParOf" srcId="{67A58B9E-7D62-4450-973A-ED1C7A157E7F}" destId="{00FDAF1E-8B88-42B4-86E0-20EF52805209}" srcOrd="0" destOrd="0" presId="urn:microsoft.com/office/officeart/2011/layout/TabList"/>
+    <dgm:cxn modelId="{82C5B680-6AB6-497C-8436-29B74350F222}" type="presParOf" srcId="{67A58B9E-7D62-4450-973A-ED1C7A157E7F}" destId="{B56BB830-F1BE-4FB3-A2EC-CC962CD9619A}" srcOrd="1" destOrd="0" presId="urn:microsoft.com/office/officeart/2011/layout/TabList"/>
+    <dgm:cxn modelId="{CB033FD6-2168-4EC1-8BE0-32D8BD835909}" type="presParOf" srcId="{67A58B9E-7D62-4450-973A-ED1C7A157E7F}" destId="{DCFAF63F-3677-4C1B-9E3A-EDA2E9A21F46}" srcOrd="2" destOrd="0" presId="urn:microsoft.com/office/officeart/2011/layout/TabList"/>
+    <dgm:cxn modelId="{B0D8889C-22ED-4B04-8B09-8201D70516CD}" type="presParOf" srcId="{53E17F5E-667B-4B68-BE32-37D1B06DDF66}" destId="{50C4994C-246F-49DF-A10E-85F0C980E1CB}" srcOrd="4" destOrd="0" presId="urn:microsoft.com/office/officeart/2011/layout/TabList"/>
+    <dgm:cxn modelId="{6212BD1D-FE59-4012-80D2-323BF9889B64}" type="presParOf" srcId="{53E17F5E-667B-4B68-BE32-37D1B06DDF66}" destId="{01091FF1-4C8F-457C-A0A4-FC44E4F4ED78}" srcOrd="5" destOrd="0" presId="urn:microsoft.com/office/officeart/2011/layout/TabList"/>
+    <dgm:cxn modelId="{8F002374-F599-4CB3-82DF-C71935C067B6}" type="presParOf" srcId="{53E17F5E-667B-4B68-BE32-37D1B06DDF66}" destId="{5D88D6D7-C9FC-436C-98D2-2192DCF564CA}" srcOrd="6" destOrd="0" presId="urn:microsoft.com/office/officeart/2011/layout/TabList"/>
+    <dgm:cxn modelId="{8841A1F1-CB86-49A2-94C9-26BEF80C063A}" type="presParOf" srcId="{5D88D6D7-C9FC-436C-98D2-2192DCF564CA}" destId="{58207433-EC0C-475E-988A-AB7CCF84A465}" srcOrd="0" destOrd="0" presId="urn:microsoft.com/office/officeart/2011/layout/TabList"/>
+    <dgm:cxn modelId="{F3A2B1BC-A680-4780-B230-8FE89C591EBF}" type="presParOf" srcId="{5D88D6D7-C9FC-436C-98D2-2192DCF564CA}" destId="{2B458D91-829F-4352-9252-17CCD901164B}" srcOrd="1" destOrd="0" presId="urn:microsoft.com/office/officeart/2011/layout/TabList"/>
+    <dgm:cxn modelId="{32ED3575-76ED-41A8-BC72-82AC3E5BABE6}" type="presParOf" srcId="{5D88D6D7-C9FC-436C-98D2-2192DCF564CA}" destId="{85B4DA00-5104-4042-A9D8-43B194EC6575}" srcOrd="2" destOrd="0" presId="urn:microsoft.com/office/officeart/2011/layout/TabList"/>
+    <dgm:cxn modelId="{6DF17541-47EE-457D-80B8-893F2EBC5E6D}" type="presParOf" srcId="{53E17F5E-667B-4B68-BE32-37D1B06DDF66}" destId="{B63E7B57-37DA-4350-BB4E-5E42A1642807}" srcOrd="7" destOrd="0" presId="urn:microsoft.com/office/officeart/2011/layout/TabList"/>
+    <dgm:cxn modelId="{608B9D19-BC6C-4FE3-A846-2EDEB941E725}" type="presParOf" srcId="{53E17F5E-667B-4B68-BE32-37D1B06DDF66}" destId="{6EB9537A-D251-402C-8042-AAFB2E0CFAD9}" srcOrd="8" destOrd="0" presId="urn:microsoft.com/office/officeart/2011/layout/TabList"/>
+    <dgm:cxn modelId="{F49F30B1-0844-4E1B-B4F9-03AD7BD954DC}" type="presParOf" srcId="{53E17F5E-667B-4B68-BE32-37D1B06DDF66}" destId="{2BED4A2F-B2F1-4FD7-923E-E6EE589F69CE}" srcOrd="9" destOrd="0" presId="urn:microsoft.com/office/officeart/2011/layout/TabList"/>
+    <dgm:cxn modelId="{0B13D1DC-7049-49CD-9D1B-752888DEB08C}" type="presParOf" srcId="{2BED4A2F-B2F1-4FD7-923E-E6EE589F69CE}" destId="{D6B8BC5A-22D9-496D-977E-9013414381D7}" srcOrd="0" destOrd="0" presId="urn:microsoft.com/office/officeart/2011/layout/TabList"/>
+    <dgm:cxn modelId="{662197A4-0292-453B-A314-E4D03BBF5691}" type="presParOf" srcId="{2BED4A2F-B2F1-4FD7-923E-E6EE589F69CE}" destId="{E64ED944-5590-4852-9C87-33FC53CA5C83}" srcOrd="1" destOrd="0" presId="urn:microsoft.com/office/officeart/2011/layout/TabList"/>
+    <dgm:cxn modelId="{996C9860-1D9D-445A-B468-D8A399E68A04}" type="presParOf" srcId="{2BED4A2F-B2F1-4FD7-923E-E6EE589F69CE}" destId="{8B6944D2-A271-4E46-AEE7-61E9B8D832FE}" srcOrd="2" destOrd="0" presId="urn:microsoft.com/office/officeart/2011/layout/TabList"/>
+    <dgm:cxn modelId="{466C0798-8770-4116-B98D-41033904DB2A}" type="presParOf" srcId="{53E17F5E-667B-4B68-BE32-37D1B06DDF66}" destId="{1315CD1F-A4E8-4CA8-B6CD-396F0B977DAC}" srcOrd="10" destOrd="0" presId="urn:microsoft.com/office/officeart/2011/layout/TabList"/>
+  </dgm:cxnLst>
+  <dgm:bg/>
+  <dgm:whole/>
+  <dgm:extLst>
+    <a:ext uri="http://schemas.microsoft.com/office/drawing/2008/diagram">
+      <dsp:dataModelExt xmlns:dsp="http://schemas.microsoft.com/office/drawing/2008/diagram" relId="rId6" minVer="http://schemas.openxmlformats.org/drawingml/2006/diagram"/>
+    </a:ext>
+  </dgm:extLst>
+</dgm:dataModel>
+</file>
+
+<file path=ppt/diagrams/drawing1.xml><?xml version="1.0" encoding="utf-8"?>
+<dsp:drawing xmlns:dgm="http://schemas.openxmlformats.org/drawingml/2006/diagram" xmlns:dsp="http://schemas.microsoft.com/office/drawing/2008/diagram" xmlns:a="http://schemas.openxmlformats.org/drawingml/2006/main">
+  <dsp:spTree>
+    <dsp:nvGrpSpPr>
+      <dsp:cNvPr id="0" name=""/>
+      <dsp:cNvGrpSpPr/>
+    </dsp:nvGrpSpPr>
+    <dsp:grpSpPr/>
+    <dsp:sp modelId="{8B6944D2-A271-4E46-AEE7-61E9B8D832FE}">
+      <dsp:nvSpPr>
+        <dsp:cNvPr id="0" name=""/>
+        <dsp:cNvSpPr/>
+      </dsp:nvSpPr>
+      <dsp:spPr>
+        <a:xfrm>
+          <a:off x="0" y="2697913"/>
+          <a:ext cx="8222925" cy="0"/>
+        </a:xfrm>
+        <a:prstGeom prst="line">
+          <a:avLst/>
+        </a:prstGeom>
+        <a:noFill/>
+        <a:ln w="25400" cap="flat" cmpd="sng" algn="ctr">
+          <a:solidFill>
+            <a:schemeClr val="accent3">
+              <a:shade val="80000"/>
+              <a:hueOff val="0"/>
+              <a:satOff val="0"/>
+              <a:lumOff val="0"/>
+              <a:alphaOff val="0"/>
+            </a:schemeClr>
+          </a:solidFill>
+          <a:prstDash val="solid"/>
+        </a:ln>
+        <a:effectLst/>
+      </dsp:spPr>
+      <dsp:style>
+        <a:lnRef idx="2">
+          <a:scrgbClr r="0" g="0" b="0"/>
+        </a:lnRef>
+        <a:fillRef idx="0">
+          <a:scrgbClr r="0" g="0" b="0"/>
+        </a:fillRef>
+        <a:effectRef idx="0">
+          <a:scrgbClr r="0" g="0" b="0"/>
+        </a:effectRef>
+        <a:fontRef idx="minor"/>
+      </dsp:style>
+    </dsp:sp>
+    <dsp:sp modelId="{85B4DA00-5104-4042-A9D8-43B194EC6575}">
+      <dsp:nvSpPr>
+        <dsp:cNvPr id="0" name=""/>
+        <dsp:cNvSpPr/>
+      </dsp:nvSpPr>
+      <dsp:spPr>
+        <a:xfrm>
+          <a:off x="0" y="1816053"/>
+          <a:ext cx="8222925" cy="0"/>
+        </a:xfrm>
+        <a:prstGeom prst="line">
+          <a:avLst/>
+        </a:prstGeom>
+        <a:noFill/>
+        <a:ln w="25400" cap="flat" cmpd="sng" algn="ctr">
+          <a:solidFill>
+            <a:schemeClr val="accent3">
+              <a:shade val="80000"/>
+              <a:hueOff val="0"/>
+              <a:satOff val="0"/>
+              <a:lumOff val="0"/>
+              <a:alphaOff val="0"/>
+            </a:schemeClr>
+          </a:solidFill>
+          <a:prstDash val="solid"/>
+        </a:ln>
+        <a:effectLst/>
+      </dsp:spPr>
+      <dsp:style>
+        <a:lnRef idx="2">
+          <a:scrgbClr r="0" g="0" b="0"/>
+        </a:lnRef>
+        <a:fillRef idx="0">
+          <a:scrgbClr r="0" g="0" b="0"/>
+        </a:fillRef>
+        <a:effectRef idx="0">
+          <a:scrgbClr r="0" g="0" b="0"/>
+        </a:effectRef>
+        <a:fontRef idx="minor"/>
+      </dsp:style>
+    </dsp:sp>
+    <dsp:sp modelId="{DCFAF63F-3677-4C1B-9E3A-EDA2E9A21F46}">
+      <dsp:nvSpPr>
+        <dsp:cNvPr id="0" name=""/>
+        <dsp:cNvSpPr/>
+      </dsp:nvSpPr>
+      <dsp:spPr>
+        <a:xfrm>
+          <a:off x="0" y="962893"/>
+          <a:ext cx="8222925" cy="0"/>
+        </a:xfrm>
+        <a:prstGeom prst="line">
+          <a:avLst/>
+        </a:prstGeom>
+        <a:noFill/>
+        <a:ln w="25400" cap="flat" cmpd="sng" algn="ctr">
+          <a:solidFill>
+            <a:schemeClr val="accent3">
+              <a:shade val="80000"/>
+              <a:hueOff val="0"/>
+              <a:satOff val="0"/>
+              <a:lumOff val="0"/>
+              <a:alphaOff val="0"/>
+            </a:schemeClr>
+          </a:solidFill>
+          <a:prstDash val="solid"/>
+        </a:ln>
+        <a:effectLst/>
+      </dsp:spPr>
+      <dsp:style>
+        <a:lnRef idx="2">
+          <a:scrgbClr r="0" g="0" b="0"/>
+        </a:lnRef>
+        <a:fillRef idx="0">
+          <a:scrgbClr r="0" g="0" b="0"/>
+        </a:fillRef>
+        <a:effectRef idx="0">
+          <a:scrgbClr r="0" g="0" b="0"/>
+        </a:effectRef>
+        <a:fontRef idx="minor"/>
+      </dsp:style>
+    </dsp:sp>
+    <dsp:sp modelId="{A6C34C38-03C3-4B66-BCD5-A9BF019899EB}">
+      <dsp:nvSpPr>
+        <dsp:cNvPr id="0" name=""/>
+        <dsp:cNvSpPr/>
+      </dsp:nvSpPr>
+      <dsp:spPr>
+        <a:xfrm>
+          <a:off x="0" y="198859"/>
+          <a:ext cx="8222925" cy="0"/>
+        </a:xfrm>
+        <a:prstGeom prst="line">
+          <a:avLst/>
+        </a:prstGeom>
+        <a:noFill/>
+        <a:ln w="25400" cap="flat" cmpd="sng" algn="ctr">
+          <a:solidFill>
+            <a:schemeClr val="accent3">
+              <a:shade val="80000"/>
+              <a:hueOff val="0"/>
+              <a:satOff val="0"/>
+              <a:lumOff val="0"/>
+              <a:alphaOff val="0"/>
+            </a:schemeClr>
+          </a:solidFill>
+          <a:prstDash val="solid"/>
+        </a:ln>
+        <a:effectLst/>
+      </dsp:spPr>
+      <dsp:style>
+        <a:lnRef idx="2">
+          <a:scrgbClr r="0" g="0" b="0"/>
+        </a:lnRef>
+        <a:fillRef idx="0">
+          <a:scrgbClr r="0" g="0" b="0"/>
+        </a:fillRef>
+        <a:effectRef idx="0">
+          <a:scrgbClr r="0" g="0" b="0"/>
+        </a:effectRef>
+        <a:fontRef idx="minor"/>
+      </dsp:style>
+    </dsp:sp>
+    <dsp:sp modelId="{2E57DE71-353C-4BB9-812A-92313BED41E3}">
+      <dsp:nvSpPr>
+        <dsp:cNvPr id="0" name=""/>
+        <dsp:cNvSpPr/>
+      </dsp:nvSpPr>
+      <dsp:spPr>
+        <a:xfrm>
+          <a:off x="2137960" y="1446"/>
+          <a:ext cx="6084964" cy="197413"/>
+        </a:xfrm>
+        <a:prstGeom prst="rect">
+          <a:avLst/>
+        </a:prstGeom>
+        <a:noFill/>
+        <a:ln>
+          <a:noFill/>
+        </a:ln>
+        <a:effectLst/>
+      </dsp:spPr>
+      <dsp:style>
+        <a:lnRef idx="0">
+          <a:scrgbClr r="0" g="0" b="0"/>
+        </a:lnRef>
+        <a:fillRef idx="0">
+          <a:scrgbClr r="0" g="0" b="0"/>
+        </a:fillRef>
+        <a:effectRef idx="0">
+          <a:scrgbClr r="0" g="0" b="0"/>
+        </a:effectRef>
+        <a:fontRef idx="minor"/>
+      </dsp:style>
+      <dsp:txBody>
+        <a:bodyPr spcFirstLastPara="0" vert="horz" wrap="square" lIns="22860" tIns="22860" rIns="22860" bIns="22860" numCol="1" spcCol="1270" anchor="b" anchorCtr="0">
+          <a:noAutofit/>
+        </a:bodyPr>
+        <a:lstStyle/>
+        <a:p>
+          <a:pPr lvl="0" algn="l" defTabSz="533400">
+            <a:lnSpc>
+              <a:spcPct val="90000"/>
+            </a:lnSpc>
+            <a:spcBef>
+              <a:spcPct val="0"/>
+            </a:spcBef>
+            <a:spcAft>
+              <a:spcPct val="35000"/>
+            </a:spcAft>
+          </a:pPr>
+          <a:r>
+            <a:rPr lang="sr-Latn-RS" sz="1200" b="1" kern="1200" dirty="0" smtClean="0"/>
+            <a:t>Uklanjanje karakteristika sa niskom varijansom</a:t>
+          </a:r>
+          <a:endParaRPr lang="en-US" sz="1200" b="1" kern="1200" dirty="0"/>
+        </a:p>
+      </dsp:txBody>
+      <dsp:txXfrm>
+        <a:off x="2137960" y="1446"/>
+        <a:ext cx="6084964" cy="197413"/>
+      </dsp:txXfrm>
+    </dsp:sp>
+    <dsp:sp modelId="{6DF5B695-1029-4246-9ED1-7C8C3B62AC4F}">
+      <dsp:nvSpPr>
+        <dsp:cNvPr id="0" name=""/>
+        <dsp:cNvSpPr/>
+      </dsp:nvSpPr>
+      <dsp:spPr>
+        <a:xfrm>
+          <a:off x="0" y="1446"/>
+          <a:ext cx="2137960" cy="197413"/>
+        </a:xfrm>
+        <a:prstGeom prst="round2SameRect">
+          <a:avLst>
+            <a:gd name="adj1" fmla="val 16670"/>
+            <a:gd name="adj2" fmla="val 0"/>
+          </a:avLst>
+        </a:prstGeom>
+        <a:solidFill>
+          <a:schemeClr val="accent3">
+            <a:alpha val="90000"/>
+            <a:hueOff val="0"/>
+            <a:satOff val="0"/>
+            <a:lumOff val="0"/>
+            <a:alphaOff val="0"/>
+          </a:schemeClr>
+        </a:solidFill>
+        <a:ln w="25400" cap="flat" cmpd="sng" algn="ctr">
+          <a:solidFill>
+            <a:schemeClr val="accent3">
+              <a:alpha val="90000"/>
+              <a:hueOff val="0"/>
+              <a:satOff val="0"/>
+              <a:lumOff val="0"/>
+              <a:alphaOff val="0"/>
+            </a:schemeClr>
+          </a:solidFill>
+          <a:prstDash val="solid"/>
+        </a:ln>
+        <a:effectLst/>
+      </dsp:spPr>
+      <dsp:style>
+        <a:lnRef idx="2">
+          <a:scrgbClr r="0" g="0" b="0"/>
+        </a:lnRef>
+        <a:fillRef idx="1">
+          <a:scrgbClr r="0" g="0" b="0"/>
+        </a:fillRef>
+        <a:effectRef idx="0">
+          <a:scrgbClr r="0" g="0" b="0"/>
+        </a:effectRef>
+        <a:fontRef idx="minor">
+          <a:schemeClr val="lt1"/>
+        </a:fontRef>
+      </dsp:style>
+      <dsp:txBody>
+        <a:bodyPr spcFirstLastPara="0" vert="horz" wrap="square" lIns="20955" tIns="20955" rIns="20955" bIns="20955" numCol="1" spcCol="1270" anchor="ctr" anchorCtr="0">
+          <a:noAutofit/>
+        </a:bodyPr>
+        <a:lstStyle/>
+        <a:p>
+          <a:pPr lvl="0" algn="ctr" defTabSz="488950">
+            <a:lnSpc>
+              <a:spcPct val="90000"/>
+            </a:lnSpc>
+            <a:spcBef>
+              <a:spcPct val="0"/>
+            </a:spcBef>
+            <a:spcAft>
+              <a:spcPct val="35000"/>
+            </a:spcAft>
+          </a:pPr>
+          <a:r>
+            <a:rPr lang="sr-Latn-RS" sz="1100" kern="1200" dirty="0" smtClean="0"/>
+            <a:t>1.</a:t>
+          </a:r>
+          <a:endParaRPr lang="en-US" sz="1100" kern="1200" dirty="0"/>
+        </a:p>
+      </dsp:txBody>
+      <dsp:txXfrm>
+        <a:off x="9639" y="11085"/>
+        <a:ext cx="2118682" cy="187774"/>
+      </dsp:txXfrm>
+    </dsp:sp>
+    <dsp:sp modelId="{C215B042-956E-4627-AA17-E29263C22E6B}">
+      <dsp:nvSpPr>
+        <dsp:cNvPr id="0" name=""/>
+        <dsp:cNvSpPr/>
+      </dsp:nvSpPr>
+      <dsp:spPr>
+        <a:xfrm>
+          <a:off x="0" y="198859"/>
+          <a:ext cx="8222925" cy="556749"/>
+        </a:xfrm>
+        <a:prstGeom prst="rect">
+          <a:avLst/>
+        </a:prstGeom>
+        <a:noFill/>
+        <a:ln>
+          <a:noFill/>
+        </a:ln>
+        <a:effectLst/>
+      </dsp:spPr>
+      <dsp:style>
+        <a:lnRef idx="0">
+          <a:scrgbClr r="0" g="0" b="0"/>
+        </a:lnRef>
+        <a:fillRef idx="0">
+          <a:scrgbClr r="0" g="0" b="0"/>
+        </a:fillRef>
+        <a:effectRef idx="0">
+          <a:scrgbClr r="0" g="0" b="0"/>
+        </a:effectRef>
+        <a:fontRef idx="minor"/>
+      </dsp:style>
+      <dsp:txBody>
+        <a:bodyPr spcFirstLastPara="0" vert="horz" wrap="square" lIns="20955" tIns="20955" rIns="20955" bIns="20955" numCol="1" spcCol="1270" anchor="t" anchorCtr="0">
+          <a:noAutofit/>
+        </a:bodyPr>
+        <a:lstStyle/>
+        <a:p>
+          <a:pPr marL="57150" lvl="1" indent="-57150" algn="l" defTabSz="488950">
+            <a:lnSpc>
+              <a:spcPct val="90000"/>
+            </a:lnSpc>
+            <a:spcBef>
+              <a:spcPct val="0"/>
+            </a:spcBef>
+            <a:spcAft>
+              <a:spcPct val="15000"/>
+            </a:spcAft>
+            <a:buChar char="••"/>
+          </a:pPr>
+          <a:r>
+            <a:rPr lang="sr-Latn-RS" sz="1100" kern="1200" dirty="0" smtClean="0"/>
+            <a:t>Karakteristike koje se gotovo ne menjaju kroz skup podataka ne mogu biti korisne za predikciju, predstavljaju šum</a:t>
+          </a:r>
+          <a:endParaRPr lang="en-US" sz="1100" kern="1200" dirty="0"/>
+        </a:p>
+        <a:p>
+          <a:pPr marL="57150" lvl="1" indent="-57150" algn="l" defTabSz="488950">
+            <a:lnSpc>
+              <a:spcPct val="90000"/>
+            </a:lnSpc>
+            <a:spcBef>
+              <a:spcPct val="0"/>
+            </a:spcBef>
+            <a:spcAft>
+              <a:spcPct val="15000"/>
+            </a:spcAft>
+            <a:buChar char="••"/>
+          </a:pPr>
+          <a:r>
+            <a:rPr lang="sr-Latn-RS" sz="1100" kern="1200" dirty="0" smtClean="0"/>
+            <a:t>Varijansa je računata za svaku od 2265 karakteristika i uklanjane su one čija varijansa je manja od 0.01 nakon standardizacije</a:t>
+          </a:r>
+          <a:endParaRPr lang="en-US" sz="1100" kern="1200" dirty="0"/>
+        </a:p>
+        <a:p>
+          <a:pPr marL="57150" lvl="1" indent="-57150" algn="l" defTabSz="488950">
+            <a:lnSpc>
+              <a:spcPct val="90000"/>
+            </a:lnSpc>
+            <a:spcBef>
+              <a:spcPct val="0"/>
+            </a:spcBef>
+            <a:spcAft>
+              <a:spcPct val="15000"/>
+            </a:spcAft>
+            <a:buChar char="••"/>
+          </a:pPr>
+          <a:r>
+            <a:rPr lang="sr-Latn-RS" sz="1100" kern="1200" dirty="0" smtClean="0"/>
+            <a:t>Ovaj korak je uklonio 259 karakteristika (11.8%) </a:t>
+          </a:r>
+          <a:endParaRPr lang="en-US" sz="1100" kern="1200" dirty="0"/>
+        </a:p>
+      </dsp:txBody>
+      <dsp:txXfrm>
+        <a:off x="0" y="198859"/>
+        <a:ext cx="8222925" cy="556749"/>
+      </dsp:txXfrm>
+    </dsp:sp>
+    <dsp:sp modelId="{00FDAF1E-8B88-42B4-86E0-20EF52805209}">
+      <dsp:nvSpPr>
+        <dsp:cNvPr id="0" name=""/>
+        <dsp:cNvSpPr/>
+      </dsp:nvSpPr>
+      <dsp:spPr>
+        <a:xfrm>
+          <a:off x="2137960" y="765480"/>
+          <a:ext cx="6084964" cy="197413"/>
+        </a:xfrm>
+        <a:prstGeom prst="rect">
+          <a:avLst/>
+        </a:prstGeom>
+        <a:noFill/>
+        <a:ln>
+          <a:noFill/>
+        </a:ln>
+        <a:effectLst/>
+      </dsp:spPr>
+      <dsp:style>
+        <a:lnRef idx="0">
+          <a:scrgbClr r="0" g="0" b="0"/>
+        </a:lnRef>
+        <a:fillRef idx="0">
+          <a:scrgbClr r="0" g="0" b="0"/>
+        </a:fillRef>
+        <a:effectRef idx="0">
+          <a:scrgbClr r="0" g="0" b="0"/>
+        </a:effectRef>
+        <a:fontRef idx="minor"/>
+      </dsp:style>
+      <dsp:txBody>
+        <a:bodyPr spcFirstLastPara="0" vert="horz" wrap="square" lIns="22860" tIns="22860" rIns="22860" bIns="22860" numCol="1" spcCol="1270" anchor="b" anchorCtr="0">
+          <a:noAutofit/>
+        </a:bodyPr>
+        <a:lstStyle/>
+        <a:p>
+          <a:pPr lvl="0" algn="l" defTabSz="533400">
+            <a:lnSpc>
+              <a:spcPct val="90000"/>
+            </a:lnSpc>
+            <a:spcBef>
+              <a:spcPct val="0"/>
+            </a:spcBef>
+            <a:spcAft>
+              <a:spcPct val="35000"/>
+            </a:spcAft>
+          </a:pPr>
+          <a:r>
+            <a:rPr lang="sr-Latn-RS" sz="1200" b="1" kern="1200" dirty="0" smtClean="0"/>
+            <a:t>Uklanjanje visokokorelisanih parova</a:t>
+          </a:r>
+          <a:endParaRPr lang="en-US" sz="1200" b="1" kern="1200" dirty="0"/>
+        </a:p>
+      </dsp:txBody>
+      <dsp:txXfrm>
+        <a:off x="2137960" y="765480"/>
+        <a:ext cx="6084964" cy="197413"/>
+      </dsp:txXfrm>
+    </dsp:sp>
+    <dsp:sp modelId="{B56BB830-F1BE-4FB3-A2EC-CC962CD9619A}">
+      <dsp:nvSpPr>
+        <dsp:cNvPr id="0" name=""/>
+        <dsp:cNvSpPr/>
+      </dsp:nvSpPr>
+      <dsp:spPr>
+        <a:xfrm>
+          <a:off x="0" y="765480"/>
+          <a:ext cx="2137960" cy="197413"/>
+        </a:xfrm>
+        <a:prstGeom prst="round2SameRect">
+          <a:avLst>
+            <a:gd name="adj1" fmla="val 16670"/>
+            <a:gd name="adj2" fmla="val 0"/>
+          </a:avLst>
+        </a:prstGeom>
+        <a:solidFill>
+          <a:schemeClr val="accent3">
+            <a:alpha val="90000"/>
+            <a:hueOff val="0"/>
+            <a:satOff val="0"/>
+            <a:lumOff val="0"/>
+            <a:alphaOff val="-13333"/>
+          </a:schemeClr>
+        </a:solidFill>
+        <a:ln w="25400" cap="flat" cmpd="sng" algn="ctr">
+          <a:solidFill>
+            <a:schemeClr val="accent3">
+              <a:alpha val="90000"/>
+              <a:hueOff val="0"/>
+              <a:satOff val="0"/>
+              <a:lumOff val="0"/>
+              <a:alphaOff val="-13333"/>
+            </a:schemeClr>
+          </a:solidFill>
+          <a:prstDash val="solid"/>
+        </a:ln>
+        <a:effectLst/>
+      </dsp:spPr>
+      <dsp:style>
+        <a:lnRef idx="2">
+          <a:scrgbClr r="0" g="0" b="0"/>
+        </a:lnRef>
+        <a:fillRef idx="1">
+          <a:scrgbClr r="0" g="0" b="0"/>
+        </a:fillRef>
+        <a:effectRef idx="0">
+          <a:scrgbClr r="0" g="0" b="0"/>
+        </a:effectRef>
+        <a:fontRef idx="minor">
+          <a:schemeClr val="lt1"/>
+        </a:fontRef>
+      </dsp:style>
+      <dsp:txBody>
+        <a:bodyPr spcFirstLastPara="0" vert="horz" wrap="square" lIns="20955" tIns="20955" rIns="20955" bIns="20955" numCol="1" spcCol="1270" anchor="ctr" anchorCtr="0">
+          <a:noAutofit/>
+        </a:bodyPr>
+        <a:lstStyle/>
+        <a:p>
+          <a:pPr lvl="0" algn="ctr" defTabSz="488950">
+            <a:lnSpc>
+              <a:spcPct val="90000"/>
+            </a:lnSpc>
+            <a:spcBef>
+              <a:spcPct val="0"/>
+            </a:spcBef>
+            <a:spcAft>
+              <a:spcPct val="35000"/>
+            </a:spcAft>
+          </a:pPr>
+          <a:r>
+            <a:rPr lang="sr-Latn-RS" sz="1100" kern="1200" dirty="0" smtClean="0"/>
+            <a:t>2.</a:t>
+          </a:r>
+          <a:endParaRPr lang="en-US" sz="1100" kern="1200" dirty="0"/>
+        </a:p>
+      </dsp:txBody>
+      <dsp:txXfrm>
+        <a:off x="9639" y="775119"/>
+        <a:ext cx="2118682" cy="187774"/>
+      </dsp:txXfrm>
+    </dsp:sp>
+    <dsp:sp modelId="{50C4994C-246F-49DF-A10E-85F0C980E1CB}">
+      <dsp:nvSpPr>
+        <dsp:cNvPr id="0" name=""/>
+        <dsp:cNvSpPr/>
+      </dsp:nvSpPr>
+      <dsp:spPr>
+        <a:xfrm>
+          <a:off x="0" y="962893"/>
+          <a:ext cx="8222925" cy="645875"/>
+        </a:xfrm>
+        <a:prstGeom prst="rect">
+          <a:avLst/>
+        </a:prstGeom>
+        <a:noFill/>
+        <a:ln>
+          <a:noFill/>
+        </a:ln>
+        <a:effectLst/>
+      </dsp:spPr>
+      <dsp:style>
+        <a:lnRef idx="0">
+          <a:scrgbClr r="0" g="0" b="0"/>
+        </a:lnRef>
+        <a:fillRef idx="0">
+          <a:scrgbClr r="0" g="0" b="0"/>
+        </a:fillRef>
+        <a:effectRef idx="0">
+          <a:scrgbClr r="0" g="0" b="0"/>
+        </a:effectRef>
+        <a:fontRef idx="minor"/>
+      </dsp:style>
+      <dsp:txBody>
+        <a:bodyPr spcFirstLastPara="0" vert="horz" wrap="square" lIns="20955" tIns="20955" rIns="20955" bIns="20955" numCol="1" spcCol="1270" anchor="t" anchorCtr="0">
+          <a:noAutofit/>
+        </a:bodyPr>
+        <a:lstStyle/>
+        <a:p>
+          <a:pPr marL="57150" lvl="1" indent="-57150" algn="l" defTabSz="488950">
+            <a:lnSpc>
+              <a:spcPct val="90000"/>
+            </a:lnSpc>
+            <a:spcBef>
+              <a:spcPct val="0"/>
+            </a:spcBef>
+            <a:spcAft>
+              <a:spcPct val="15000"/>
+            </a:spcAft>
+            <a:buChar char="••"/>
+          </a:pPr>
+          <a:r>
+            <a:rPr lang="sr-Latn-RS" sz="1100" kern="1200" dirty="0" smtClean="0"/>
+            <a:t>Multikolinearnost(dve karakteristike savršeno korelisane) otežava interpretaciju i smanjuje stabilnost modela</a:t>
+          </a:r>
+          <a:endParaRPr lang="en-US" sz="1100" kern="1200" dirty="0"/>
+        </a:p>
+        <a:p>
+          <a:pPr marL="57150" lvl="1" indent="-57150" algn="l" defTabSz="488950">
+            <a:lnSpc>
+              <a:spcPct val="90000"/>
+            </a:lnSpc>
+            <a:spcBef>
+              <a:spcPct val="0"/>
+            </a:spcBef>
+            <a:spcAft>
+              <a:spcPct val="15000"/>
+            </a:spcAft>
+            <a:buChar char="••"/>
+          </a:pPr>
+          <a:r>
+            <a:rPr lang="sr-Latn-RS" sz="1100" kern="1200" dirty="0" smtClean="0"/>
+            <a:t>Nakon računanja Pearson-ovog koeficijenta korelacije, za svaki par karakteristika koji imaju korelaciju &gt;0.95 uklanjamo jednu iz para</a:t>
+          </a:r>
+          <a:endParaRPr lang="en-US" sz="1100" kern="1200" dirty="0"/>
+        </a:p>
+        <a:p>
+          <a:pPr marL="57150" lvl="1" indent="-57150" algn="l" defTabSz="488950">
+            <a:lnSpc>
+              <a:spcPct val="90000"/>
+            </a:lnSpc>
+            <a:spcBef>
+              <a:spcPct val="0"/>
+            </a:spcBef>
+            <a:spcAft>
+              <a:spcPct val="15000"/>
+            </a:spcAft>
+            <a:buChar char="••"/>
+          </a:pPr>
+          <a:r>
+            <a:rPr lang="sr-Latn-RS" sz="1100" kern="1200" dirty="0" smtClean="0"/>
+            <a:t>Uklanjamo onu sa manjom varijansom; Ovaj korak je uklonio 150 karakteristika (7.5%)</a:t>
+          </a:r>
+          <a:endParaRPr lang="en-US" sz="1100" kern="1200" dirty="0"/>
+        </a:p>
+      </dsp:txBody>
+      <dsp:txXfrm>
+        <a:off x="0" y="962893"/>
+        <a:ext cx="8222925" cy="645875"/>
+      </dsp:txXfrm>
+    </dsp:sp>
+    <dsp:sp modelId="{58207433-EC0C-475E-988A-AB7CCF84A465}">
+      <dsp:nvSpPr>
+        <dsp:cNvPr id="0" name=""/>
+        <dsp:cNvSpPr/>
+      </dsp:nvSpPr>
+      <dsp:spPr>
+        <a:xfrm>
+          <a:off x="2137960" y="1618639"/>
+          <a:ext cx="6084964" cy="197413"/>
+        </a:xfrm>
+        <a:prstGeom prst="rect">
+          <a:avLst/>
+        </a:prstGeom>
+        <a:noFill/>
+        <a:ln>
+          <a:noFill/>
+        </a:ln>
+        <a:effectLst/>
+      </dsp:spPr>
+      <dsp:style>
+        <a:lnRef idx="0">
+          <a:scrgbClr r="0" g="0" b="0"/>
+        </a:lnRef>
+        <a:fillRef idx="0">
+          <a:scrgbClr r="0" g="0" b="0"/>
+        </a:fillRef>
+        <a:effectRef idx="0">
+          <a:scrgbClr r="0" g="0" b="0"/>
+        </a:effectRef>
+        <a:fontRef idx="minor"/>
+      </dsp:style>
+      <dsp:txBody>
+        <a:bodyPr spcFirstLastPara="0" vert="horz" wrap="square" lIns="22860" tIns="22860" rIns="22860" bIns="22860" numCol="1" spcCol="1270" anchor="b" anchorCtr="0">
+          <a:noAutofit/>
+        </a:bodyPr>
+        <a:lstStyle/>
+        <a:p>
+          <a:pPr lvl="0" algn="l" defTabSz="533400">
+            <a:lnSpc>
+              <a:spcPct val="90000"/>
+            </a:lnSpc>
+            <a:spcBef>
+              <a:spcPct val="0"/>
+            </a:spcBef>
+            <a:spcAft>
+              <a:spcPct val="35000"/>
+            </a:spcAft>
+          </a:pPr>
+          <a:r>
+            <a:rPr lang="sr-Latn-RS" sz="1200" b="1" kern="1200" dirty="0" smtClean="0"/>
+            <a:t>Selekcija top 200 karakteristika</a:t>
+          </a:r>
+          <a:endParaRPr lang="en-US" sz="1200" b="1" kern="1200" dirty="0"/>
+        </a:p>
+      </dsp:txBody>
+      <dsp:txXfrm>
+        <a:off x="2137960" y="1618639"/>
+        <a:ext cx="6084964" cy="197413"/>
+      </dsp:txXfrm>
+    </dsp:sp>
+    <dsp:sp modelId="{2B458D91-829F-4352-9252-17CCD901164B}">
+      <dsp:nvSpPr>
+        <dsp:cNvPr id="0" name=""/>
+        <dsp:cNvSpPr/>
+      </dsp:nvSpPr>
+      <dsp:spPr>
+        <a:xfrm>
+          <a:off x="0" y="1618639"/>
+          <a:ext cx="2137960" cy="197413"/>
+        </a:xfrm>
+        <a:prstGeom prst="round2SameRect">
+          <a:avLst>
+            <a:gd name="adj1" fmla="val 16670"/>
+            <a:gd name="adj2" fmla="val 0"/>
+          </a:avLst>
+        </a:prstGeom>
+        <a:solidFill>
+          <a:schemeClr val="accent3">
+            <a:alpha val="90000"/>
+            <a:hueOff val="0"/>
+            <a:satOff val="0"/>
+            <a:lumOff val="0"/>
+            <a:alphaOff val="-26667"/>
+          </a:schemeClr>
+        </a:solidFill>
+        <a:ln w="25400" cap="flat" cmpd="sng" algn="ctr">
+          <a:solidFill>
+            <a:schemeClr val="accent3">
+              <a:alpha val="90000"/>
+              <a:hueOff val="0"/>
+              <a:satOff val="0"/>
+              <a:lumOff val="0"/>
+              <a:alphaOff val="-26667"/>
+            </a:schemeClr>
+          </a:solidFill>
+          <a:prstDash val="solid"/>
+        </a:ln>
+        <a:effectLst/>
+      </dsp:spPr>
+      <dsp:style>
+        <a:lnRef idx="2">
+          <a:scrgbClr r="0" g="0" b="0"/>
+        </a:lnRef>
+        <a:fillRef idx="1">
+          <a:scrgbClr r="0" g="0" b="0"/>
+        </a:fillRef>
+        <a:effectRef idx="0">
+          <a:scrgbClr r="0" g="0" b="0"/>
+        </a:effectRef>
+        <a:fontRef idx="minor">
+          <a:schemeClr val="lt1"/>
+        </a:fontRef>
+      </dsp:style>
+      <dsp:txBody>
+        <a:bodyPr spcFirstLastPara="0" vert="horz" wrap="square" lIns="20955" tIns="20955" rIns="20955" bIns="20955" numCol="1" spcCol="1270" anchor="ctr" anchorCtr="0">
+          <a:noAutofit/>
+        </a:bodyPr>
+        <a:lstStyle/>
+        <a:p>
+          <a:pPr lvl="0" algn="ctr" defTabSz="488950">
+            <a:lnSpc>
+              <a:spcPct val="90000"/>
+            </a:lnSpc>
+            <a:spcBef>
+              <a:spcPct val="0"/>
+            </a:spcBef>
+            <a:spcAft>
+              <a:spcPct val="35000"/>
+            </a:spcAft>
+          </a:pPr>
+          <a:r>
+            <a:rPr lang="sr-Latn-RS" sz="1100" kern="1200" dirty="0" smtClean="0"/>
+            <a:t>3.</a:t>
+          </a:r>
+          <a:endParaRPr lang="en-US" sz="1100" kern="1200" dirty="0"/>
+        </a:p>
+      </dsp:txBody>
+      <dsp:txXfrm>
+        <a:off x="9639" y="1628278"/>
+        <a:ext cx="2118682" cy="187774"/>
+      </dsp:txXfrm>
+    </dsp:sp>
+    <dsp:sp modelId="{B63E7B57-37DA-4350-BB4E-5E42A1642807}">
+      <dsp:nvSpPr>
+        <dsp:cNvPr id="0" name=""/>
+        <dsp:cNvSpPr/>
+      </dsp:nvSpPr>
+      <dsp:spPr>
+        <a:xfrm>
+          <a:off x="0" y="1816053"/>
+          <a:ext cx="8222925" cy="674576"/>
+        </a:xfrm>
+        <a:prstGeom prst="rect">
+          <a:avLst/>
+        </a:prstGeom>
+        <a:noFill/>
+        <a:ln>
+          <a:noFill/>
+        </a:ln>
+        <a:effectLst/>
+      </dsp:spPr>
+      <dsp:style>
+        <a:lnRef idx="0">
+          <a:scrgbClr r="0" g="0" b="0"/>
+        </a:lnRef>
+        <a:fillRef idx="0">
+          <a:scrgbClr r="0" g="0" b="0"/>
+        </a:fillRef>
+        <a:effectRef idx="0">
+          <a:scrgbClr r="0" g="0" b="0"/>
+        </a:effectRef>
+        <a:fontRef idx="minor"/>
+      </dsp:style>
+      <dsp:txBody>
+        <a:bodyPr spcFirstLastPara="0" vert="horz" wrap="square" lIns="20955" tIns="20955" rIns="20955" bIns="20955" numCol="1" spcCol="1270" anchor="t" anchorCtr="0">
+          <a:noAutofit/>
+        </a:bodyPr>
+        <a:lstStyle/>
+        <a:p>
+          <a:pPr marL="57150" lvl="1" indent="-57150" algn="l" defTabSz="488950">
+            <a:lnSpc>
+              <a:spcPct val="90000"/>
+            </a:lnSpc>
+            <a:spcBef>
+              <a:spcPct val="0"/>
+            </a:spcBef>
+            <a:spcAft>
+              <a:spcPct val="15000"/>
+            </a:spcAft>
+            <a:buChar char="••"/>
+          </a:pPr>
+          <a:r>
+            <a:rPr lang="sr-Latn-RS" sz="1100" kern="1200" dirty="0" smtClean="0"/>
+            <a:t>Zadržavamo one karakteristike koje su najjače povezane sa ciljnom promenljivom pKi</a:t>
+          </a:r>
+          <a:endParaRPr lang="en-US" sz="1100" kern="1200" dirty="0"/>
+        </a:p>
+        <a:p>
+          <a:pPr marL="57150" lvl="1" indent="-57150" algn="l" defTabSz="488950">
+            <a:lnSpc>
+              <a:spcPct val="90000"/>
+            </a:lnSpc>
+            <a:spcBef>
+              <a:spcPct val="0"/>
+            </a:spcBef>
+            <a:spcAft>
+              <a:spcPct val="15000"/>
+            </a:spcAft>
+            <a:buChar char="••"/>
+          </a:pPr>
+          <a:r>
+            <a:rPr lang="sr-Latn-RS" sz="1100" kern="1200" dirty="0" smtClean="0"/>
+            <a:t>F-test predstavlja statistički test koji meri linearnu zavisnost između svake karakteristike i pKi</a:t>
+          </a:r>
+          <a:endParaRPr lang="en-US" sz="1100" kern="1200" dirty="0"/>
+        </a:p>
+        <a:p>
+          <a:pPr marL="57150" lvl="1" indent="-57150" algn="l" defTabSz="488950">
+            <a:lnSpc>
+              <a:spcPct val="90000"/>
+            </a:lnSpc>
+            <a:spcBef>
+              <a:spcPct val="0"/>
+            </a:spcBef>
+            <a:spcAft>
+              <a:spcPct val="15000"/>
+            </a:spcAft>
+            <a:buChar char="••"/>
+          </a:pPr>
+          <a:r>
+            <a:rPr lang="sr-Latn-RS" sz="1100" kern="1200" dirty="0" smtClean="0"/>
+            <a:t>Bira se 200 karakteristika sa najvišim rezultatom f-testa, jer najznačajnije doprinose predviđanju afiniteta; Zadržano je 10.8% originalnih karakteristika</a:t>
+          </a:r>
+          <a:endParaRPr lang="en-US" sz="1100" kern="1200" dirty="0"/>
+        </a:p>
+      </dsp:txBody>
+      <dsp:txXfrm>
+        <a:off x="0" y="1816053"/>
+        <a:ext cx="8222925" cy="674576"/>
+      </dsp:txXfrm>
+    </dsp:sp>
+    <dsp:sp modelId="{D6B8BC5A-22D9-496D-977E-9013414381D7}">
+      <dsp:nvSpPr>
+        <dsp:cNvPr id="0" name=""/>
+        <dsp:cNvSpPr/>
+      </dsp:nvSpPr>
+      <dsp:spPr>
+        <a:xfrm>
+          <a:off x="2137960" y="2500500"/>
+          <a:ext cx="6084964" cy="197413"/>
+        </a:xfrm>
+        <a:prstGeom prst="rect">
+          <a:avLst/>
+        </a:prstGeom>
+        <a:noFill/>
+        <a:ln>
+          <a:noFill/>
+        </a:ln>
+        <a:effectLst/>
+      </dsp:spPr>
+      <dsp:style>
+        <a:lnRef idx="0">
+          <a:scrgbClr r="0" g="0" b="0"/>
+        </a:lnRef>
+        <a:fillRef idx="0">
+          <a:scrgbClr r="0" g="0" b="0"/>
+        </a:fillRef>
+        <a:effectRef idx="0">
+          <a:scrgbClr r="0" g="0" b="0"/>
+        </a:effectRef>
+        <a:fontRef idx="minor"/>
+      </dsp:style>
+      <dsp:txBody>
+        <a:bodyPr spcFirstLastPara="0" vert="horz" wrap="square" lIns="22860" tIns="22860" rIns="22860" bIns="22860" numCol="1" spcCol="1270" anchor="b" anchorCtr="0">
+          <a:noAutofit/>
+        </a:bodyPr>
+        <a:lstStyle/>
+        <a:p>
+          <a:pPr lvl="0" algn="l" defTabSz="533400">
+            <a:lnSpc>
+              <a:spcPct val="90000"/>
+            </a:lnSpc>
+            <a:spcBef>
+              <a:spcPct val="0"/>
+            </a:spcBef>
+            <a:spcAft>
+              <a:spcPct val="35000"/>
+            </a:spcAft>
+          </a:pPr>
+          <a:r>
+            <a:rPr lang="sr-Latn-RS" sz="1200" b="1" kern="1200" dirty="0" smtClean="0"/>
+            <a:t>PCA (Principal Component Analysis)</a:t>
+          </a:r>
+          <a:endParaRPr lang="en-US" sz="1200" b="1" kern="1200" dirty="0"/>
+        </a:p>
+      </dsp:txBody>
+      <dsp:txXfrm>
+        <a:off x="2137960" y="2500500"/>
+        <a:ext cx="6084964" cy="197413"/>
+      </dsp:txXfrm>
+    </dsp:sp>
+    <dsp:sp modelId="{E64ED944-5590-4852-9C87-33FC53CA5C83}">
+      <dsp:nvSpPr>
+        <dsp:cNvPr id="0" name=""/>
+        <dsp:cNvSpPr/>
+      </dsp:nvSpPr>
+      <dsp:spPr>
+        <a:xfrm>
+          <a:off x="0" y="2500500"/>
+          <a:ext cx="2137960" cy="197413"/>
+        </a:xfrm>
+        <a:prstGeom prst="round2SameRect">
+          <a:avLst>
+            <a:gd name="adj1" fmla="val 16670"/>
+            <a:gd name="adj2" fmla="val 0"/>
+          </a:avLst>
+        </a:prstGeom>
+        <a:solidFill>
+          <a:schemeClr val="accent3">
+            <a:alpha val="90000"/>
+            <a:hueOff val="0"/>
+            <a:satOff val="0"/>
+            <a:lumOff val="0"/>
+            <a:alphaOff val="-40000"/>
+          </a:schemeClr>
+        </a:solidFill>
+        <a:ln w="25400" cap="flat" cmpd="sng" algn="ctr">
+          <a:solidFill>
+            <a:schemeClr val="accent3">
+              <a:alpha val="90000"/>
+              <a:hueOff val="0"/>
+              <a:satOff val="0"/>
+              <a:lumOff val="0"/>
+              <a:alphaOff val="-40000"/>
+            </a:schemeClr>
+          </a:solidFill>
+          <a:prstDash val="solid"/>
+        </a:ln>
+        <a:effectLst/>
+      </dsp:spPr>
+      <dsp:style>
+        <a:lnRef idx="2">
+          <a:scrgbClr r="0" g="0" b="0"/>
+        </a:lnRef>
+        <a:fillRef idx="1">
+          <a:scrgbClr r="0" g="0" b="0"/>
+        </a:fillRef>
+        <a:effectRef idx="0">
+          <a:scrgbClr r="0" g="0" b="0"/>
+        </a:effectRef>
+        <a:fontRef idx="minor">
+          <a:schemeClr val="lt1"/>
+        </a:fontRef>
+      </dsp:style>
+      <dsp:txBody>
+        <a:bodyPr spcFirstLastPara="0" vert="horz" wrap="square" lIns="20955" tIns="20955" rIns="20955" bIns="20955" numCol="1" spcCol="1270" anchor="ctr" anchorCtr="0">
+          <a:noAutofit/>
+        </a:bodyPr>
+        <a:lstStyle/>
+        <a:p>
+          <a:pPr lvl="0" algn="ctr" defTabSz="488950">
+            <a:lnSpc>
+              <a:spcPct val="90000"/>
+            </a:lnSpc>
+            <a:spcBef>
+              <a:spcPct val="0"/>
+            </a:spcBef>
+            <a:spcAft>
+              <a:spcPct val="35000"/>
+            </a:spcAft>
+          </a:pPr>
+          <a:r>
+            <a:rPr lang="sr-Latn-RS" sz="1100" kern="1200" dirty="0" smtClean="0"/>
+            <a:t>4.</a:t>
+          </a:r>
+          <a:endParaRPr lang="en-US" sz="1100" kern="1200" dirty="0"/>
+        </a:p>
+      </dsp:txBody>
+      <dsp:txXfrm>
+        <a:off x="9639" y="2510139"/>
+        <a:ext cx="2118682" cy="187774"/>
+      </dsp:txXfrm>
+    </dsp:sp>
+    <dsp:sp modelId="{1315CD1F-A4E8-4CA8-B6CD-396F0B977DAC}">
+      <dsp:nvSpPr>
+        <dsp:cNvPr id="0" name=""/>
+        <dsp:cNvSpPr/>
+      </dsp:nvSpPr>
+      <dsp:spPr>
+        <a:xfrm>
+          <a:off x="0" y="2697913"/>
+          <a:ext cx="8222925" cy="531078"/>
+        </a:xfrm>
+        <a:prstGeom prst="rect">
+          <a:avLst/>
+        </a:prstGeom>
+        <a:noFill/>
+        <a:ln>
+          <a:noFill/>
+        </a:ln>
+        <a:effectLst/>
+      </dsp:spPr>
+      <dsp:style>
+        <a:lnRef idx="0">
+          <a:scrgbClr r="0" g="0" b="0"/>
+        </a:lnRef>
+        <a:fillRef idx="0">
+          <a:scrgbClr r="0" g="0" b="0"/>
+        </a:fillRef>
+        <a:effectRef idx="0">
+          <a:scrgbClr r="0" g="0" b="0"/>
+        </a:effectRef>
+        <a:fontRef idx="minor"/>
+      </dsp:style>
+      <dsp:txBody>
+        <a:bodyPr spcFirstLastPara="0" vert="horz" wrap="square" lIns="20955" tIns="20955" rIns="20955" bIns="20955" numCol="1" spcCol="1270" anchor="t" anchorCtr="0">
+          <a:noAutofit/>
+        </a:bodyPr>
+        <a:lstStyle/>
+        <a:p>
+          <a:pPr marL="57150" lvl="1" indent="-57150" algn="l" defTabSz="488950">
+            <a:lnSpc>
+              <a:spcPct val="90000"/>
+            </a:lnSpc>
+            <a:spcBef>
+              <a:spcPct val="0"/>
+            </a:spcBef>
+            <a:spcAft>
+              <a:spcPct val="15000"/>
+            </a:spcAft>
+            <a:buChar char="••"/>
+          </a:pPr>
+          <a:r>
+            <a:rPr lang="sr-Latn-RS" sz="1100" kern="1200" dirty="0" smtClean="0"/>
+            <a:t>Tehnika koja stvara nove karakteristike kao linearne kombinacije originalnih, pri čemu su one međusobno nekorelisane</a:t>
+          </a:r>
+          <a:endParaRPr lang="en-US" sz="1100" kern="1200" dirty="0"/>
+        </a:p>
+        <a:p>
+          <a:pPr marL="57150" lvl="1" indent="-57150" algn="l" defTabSz="488950">
+            <a:lnSpc>
+              <a:spcPct val="90000"/>
+            </a:lnSpc>
+            <a:spcBef>
+              <a:spcPct val="0"/>
+            </a:spcBef>
+            <a:spcAft>
+              <a:spcPct val="15000"/>
+            </a:spcAft>
+            <a:buChar char="••"/>
+          </a:pPr>
+          <a:r>
+            <a:rPr lang="sr-Latn-RS" sz="1100" kern="1200" dirty="0" smtClean="0"/>
+            <a:t>Prvih nekoliko glavnih komponenti objašnjava najveći deo varijanse(MFP,fr_COO2,fr_ester grupe tipicne za inhibitore tripsina, qed)</a:t>
+          </a:r>
+          <a:endParaRPr lang="en-US" sz="1100" kern="1200" dirty="0"/>
+        </a:p>
+        <a:p>
+          <a:pPr marL="57150" lvl="1" indent="-57150" algn="l" defTabSz="488950">
+            <a:lnSpc>
+              <a:spcPct val="90000"/>
+            </a:lnSpc>
+            <a:spcBef>
+              <a:spcPct val="0"/>
+            </a:spcBef>
+            <a:spcAft>
+              <a:spcPct val="15000"/>
+            </a:spcAft>
+            <a:buChar char="••"/>
+          </a:pPr>
+          <a:r>
+            <a:rPr lang="sr-Latn-RS" sz="1100" kern="1200" dirty="0" smtClean="0"/>
+            <a:t>Zadržano 100 komponenti koje objašnjavaju ~97% ukupne varijanse originalnih podataka; Matrica postaje N x 100</a:t>
+          </a:r>
+          <a:endParaRPr lang="en-US" sz="1100" kern="1200" dirty="0"/>
+        </a:p>
+      </dsp:txBody>
+      <dsp:txXfrm>
+        <a:off x="0" y="2697913"/>
+        <a:ext cx="8222925" cy="531078"/>
+      </dsp:txXfrm>
+    </dsp:sp>
+  </dsp:spTree>
+</dsp:drawing>
+</file>
+
+<file path=ppt/diagrams/layout1.xml><?xml version="1.0" encoding="utf-8"?>
+<dgm:layoutDef xmlns:dgm="http://schemas.openxmlformats.org/drawingml/2006/diagram" xmlns:a="http://schemas.openxmlformats.org/drawingml/2006/main" uniqueId="urn:microsoft.com/office/officeart/2011/layout/TabList">
+  <dgm:title val="Tab List"/>
+  <dgm:desc val="Use to show non-sequential or grouped blocks of information. Works well for lists with a small amount of Level 1 text. The first Level 2 displays next to the Level 1 text  and the remaining Level 2 text appears beneath the Level 1 text."/>
+  <dgm:catLst>
+    <dgm:cat type="list" pri="4500"/>
+    <dgm:cat type="officeonline" pri="11000"/>
+  </dgm:catLst>
+  <dgm:sampData>
+    <dgm:dataModel>
+      <dgm:ptLst>
+        <dgm:pt modelId="0" type="doc"/>
+        <dgm:pt modelId="10">
+          <dgm:prSet phldr="1"/>
+        </dgm:pt>
+        <dgm:pt modelId="11">
+          <dgm:prSet phldr="1"/>
+        </dgm:pt>
+        <dgm:pt modelId="12">
+          <dgm:prSet phldr="1"/>
+        </dgm:pt>
+        <dgm:pt modelId="20">
+          <dgm:prSet phldr="1"/>
+        </dgm:pt>
+        <dgm:pt modelId="21">
+          <dgm:prSet phldr="1"/>
+        </dgm:pt>
+        <dgm:pt modelId="22">
+          <dgm:prSet phldr="1"/>
+        </dgm:pt>
+        <dgm:pt modelId="30">
+          <dgm:prSet phldr="1"/>
+        </dgm:pt>
+        <dgm:pt modelId="31">
+          <dgm:prSet phldr="1"/>
+        </dgm:pt>
+        <dgm:pt modelId="32">
+          <dgm:prSet phldr="1"/>
+        </dgm:pt>
+      </dgm:ptLst>
+      <dgm:cxnLst>
+        <dgm:cxn modelId="40" srcId="0" destId="10" srcOrd="0" destOrd="0"/>
+        <dgm:cxn modelId="41" srcId="10" destId="11" srcOrd="0" destOrd="0"/>
+        <dgm:cxn modelId="42" srcId="10" destId="12" srcOrd="0" destOrd="0"/>
+        <dgm:cxn modelId="50" srcId="0" destId="20" srcOrd="1" destOrd="0"/>
+        <dgm:cxn modelId="51" srcId="20" destId="21" srcOrd="1" destOrd="0"/>
+        <dgm:cxn modelId="52" srcId="20" destId="22" srcOrd="1" destOrd="0"/>
+        <dgm:cxn modelId="60" srcId="0" destId="30" srcOrd="2" destOrd="0"/>
+        <dgm:cxn modelId="61" srcId="30" destId="31" srcOrd="2" destOrd="0"/>
+        <dgm:cxn modelId="62" srcId="30" destId="32" srcOrd="2" destOrd="0"/>
+      </dgm:cxnLst>
+      <dgm:bg/>
+      <dgm:whole/>
+    </dgm:dataModel>
+  </dgm:sampData>
+  <dgm:styleData>
+    <dgm:dataModel>
+      <dgm:ptLst>
+        <dgm:pt modelId="0" type="doc"/>
+        <dgm:pt modelId="10">
+          <dgm:prSet phldr="1"/>
+        </dgm:pt>
+        <dgm:pt modelId="20">
+          <dgm:prSet phldr="1"/>
+        </dgm:pt>
+      </dgm:ptLst>
+      <dgm:cxnLst>
+        <dgm:cxn modelId="30" srcId="0" destId="10" srcOrd="0" destOrd="0"/>
+        <dgm:cxn modelId="40" srcId="0" destId="20" srcOrd="1" destOrd="0"/>
+      </dgm:cxnLst>
+      <dgm:bg/>
+      <dgm:whole/>
+    </dgm:dataModel>
+  </dgm:styleData>
+  <dgm:clrData>
+    <dgm:dataModel>
+      <dgm:ptLst>
+        <dgm:pt modelId="0" type="doc"/>
+        <dgm:pt modelId="10">
+          <dgm:prSet phldr="1"/>
+        </dgm:pt>
+        <dgm:pt modelId="20">
+          <dgm:prSet phldr="1"/>
+        </dgm:pt>
+        <dgm:pt modelId="30">
+          <dgm:prSet phldr="1"/>
+        </dgm:pt>
+        <dgm:pt modelId="40">
+          <dgm:prSet phldr="1"/>
+        </dgm:pt>
+      </dgm:ptLst>
+      <dgm:cxnLst>
+        <dgm:cxn modelId="50" srcId="0" destId="10" srcOrd="0" destOrd="0"/>
+        <dgm:cxn modelId="60" srcId="0" destId="20" srcOrd="1" destOrd="0"/>
+        <dgm:cxn modelId="70" srcId="0" destId="30" srcOrd="2" destOrd="0"/>
+        <dgm:cxn modelId="80" srcId="0" destId="40" srcOrd="3" destOrd="0"/>
+      </dgm:cxnLst>
+      <dgm:bg/>
+      <dgm:whole/>
+    </dgm:dataModel>
+  </dgm:clrData>
+  <dgm:layoutNode name="Name0">
+    <dgm:varLst>
+      <dgm:chMax/>
+      <dgm:chPref val="3"/>
+      <dgm:dir/>
+      <dgm:animOne val="branch"/>
+      <dgm:animLvl val="lvl"/>
+    </dgm:varLst>
+    <dgm:alg type="lin">
+      <dgm:param type="linDir" val="fromT"/>
+    </dgm:alg>
+    <dgm:shape xmlns:r="http://schemas.openxmlformats.org/officeDocument/2006/relationships" r:blip="">
+      <dgm:adjLst/>
+    </dgm:shape>
+    <dgm:constrLst>
+      <dgm:constr type="w" for="ch" forName="Child" refType="w"/>
+      <dgm:constr type="h" for="ch" forName="Child" refType="h" fact="0.6667"/>
+      <dgm:constr type="primFontSz" for="des" forName="Parent" op="equ" val="65"/>
+      <dgm:constr type="primFontSz" for="des" forName="Child" op="equ" val="65"/>
+      <dgm:constr type="primFontSz" for="des" forName="FirstChild" op="equ" val="65"/>
+      <dgm:constr type="primFontSz" for="des" forName="Child" refType="primFontSz" refFor="des" refForName="Parent" op="lte"/>
+      <dgm:constr type="primFontSz" for="des" forName="FirstChild" refType="primFontSz" refFor="des" refForName="Parent" op="lte"/>
+      <dgm:constr type="primFontSz" for="des" forName="Child" refType="primFontSz" refFor="des" refForName="FirstChild" op="lte"/>
+      <dgm:constr type="w" for="ch" forName="composite" refType="w"/>
+      <dgm:constr type="h" for="ch" forName="composite" refType="h" fact="0.3333"/>
+      <dgm:constr type="sp" refType="h" refFor="ch" refForName="composite" op="equ" fact="0.05"/>
+      <dgm:constr type="h" for="ch" forName="sibTrans" refType="h" refFor="ch" refForName="composite" op="equ" fact="0.05"/>
+      <dgm:constr type="w" for="ch" forName="sibTrans" refType="h" refFor="ch" refForName="sibTrans" op="equ"/>
+    </dgm:constrLst>
+    <dgm:forEach name="nodesForEach" axis="ch" ptType="node">
+      <dgm:layoutNode name="composite">
+        <dgm:alg type="composite"/>
+        <dgm:shape xmlns:r="http://schemas.openxmlformats.org/officeDocument/2006/relationships" r:blip="">
+          <dgm:adjLst/>
+        </dgm:shape>
+        <dgm:choose name="Name1">
+          <dgm:if name="Name2" func="var" arg="dir" op="equ" val="norm">
+            <dgm:constrLst>
+              <dgm:constr type="l" for="ch" forName="Accent" refType="w" fact="0"/>
+              <dgm:constr type="b" for="ch" forName="Accent" refType="h"/>
+              <dgm:constr type="w" for="ch" forName="Accent" refType="w"/>
+              <dgm:constr type="h" for="ch" forName="Accent" refType="h" fact="0"/>
+              <dgm:constr type="l" for="ch" forName="FirstChild" refType="w" fact="0.26"/>
+              <dgm:constr type="t" for="ch" forName="FirstChild" refType="h" fact="0"/>
+              <dgm:constr type="w" for="ch" forName="FirstChild" refType="w" fact="0.74"/>
+              <dgm:constr type="h" for="ch" forName="FirstChild" refType="h"/>
+              <dgm:constr type="l" for="ch" forName="Parent" refType="w" fact="0"/>
+              <dgm:constr type="t" for="ch" forName="Parent" refType="h" fact="0"/>
+              <dgm:constr type="w" for="ch" forName="Parent" refType="w" fact="0.26"/>
+              <dgm:constr type="h" for="ch" forName="Parent" refType="h"/>
+            </dgm:constrLst>
+          </dgm:if>
+          <dgm:else name="Name3">
+            <dgm:constrLst>
+              <dgm:constr type="l" for="ch" forName="Accent" refType="w" fact="0"/>
+              <dgm:constr type="b" for="ch" forName="Accent" refType="h"/>
+              <dgm:constr type="w" for="ch" forName="Accent" refType="w"/>
+              <dgm:constr type="h" for="ch" forName="Accent" refType="h" fact="0"/>
+              <dgm:constr type="r" for="ch" forName="FirstChild" refType="w" fact="0.74"/>
+              <dgm:constr type="t" for="ch" forName="FirstChild" refType="h" fact="0"/>
+              <dgm:constr type="w" for="ch" forName="FirstChild" refType="w" fact="0.74"/>
+              <dgm:constr type="h" for="ch" forName="FirstChild" refType="h"/>
+              <dgm:constr type="r" for="ch" forName="Parent" refType="w"/>
+              <dgm:constr type="t" for="ch" forName="Parent" refType="h" fact="0"/>
+              <dgm:constr type="w" for="ch" forName="Parent" refType="w" fact="0.26"/>
+              <dgm:constr type="h" for="ch" forName="Parent" refType="h"/>
+            </dgm:constrLst>
+          </dgm:else>
+        </dgm:choose>
+        <dgm:layoutNode name="FirstChild" styleLbl="revTx">
+          <dgm:varLst>
+            <dgm:chMax val="0"/>
+            <dgm:chPref val="0"/>
+            <dgm:bulletEnabled val="1"/>
+          </dgm:varLst>
+          <dgm:choose name="Name4">
+            <dgm:if name="Name5" func="var" arg="dir" op="equ" val="norm">
+              <dgm:alg type="tx">
+                <dgm:param type="parTxLTRAlign" val="l"/>
+                <dgm:param type="txAnchorVert" val="b"/>
+                <dgm:param type="txAnchorVertCh" val="b"/>
+                <dgm:param type="parTxRTLAlign" val="l"/>
+              </dgm:alg>
+            </dgm:if>
+            <dgm:else name="Name6">
+              <dgm:alg type="tx">
+                <dgm:param type="parTxLTRAlign" val="r"/>
+                <dgm:param type="shpTxLTRAlignCh" val="r"/>
+                <dgm:param type="txAnchorVert" val="b"/>
+                <dgm:param type="txAnchorVertCh" val="b"/>
+                <dgm:param type="parTxRTLAlign" val="r"/>
+              </dgm:alg>
+            </dgm:else>
+          </dgm:choose>
+          <dgm:shape xmlns:r="http://schemas.openxmlformats.org/officeDocument/2006/relationships" type="rect" r:blip="">
+            <dgm:adjLst/>
+          </dgm:shape>
+          <dgm:choose name="Name7">
+            <dgm:if name="Name8" axis="ch" ptType="node" func="cnt" op="gte" val="1">
+              <dgm:presOf axis="ch desOrSelf" ptType="node node" st="1 1" cnt="1 0"/>
+            </dgm:if>
+            <dgm:else name="Name9">
+              <dgm:presOf/>
+            </dgm:else>
+          </dgm:choose>
+          <dgm:constrLst>
+            <dgm:constr type="lMarg" refType="primFontSz" fact="0.15"/>
+            <dgm:constr type="rMarg" refType="primFontSz" fact="0.15"/>
+            <dgm:constr type="tMarg" refType="primFontSz" fact="0.15"/>
+            <dgm:constr type="bMarg" refType="primFontSz" fact="0.15"/>
+          </dgm:constrLst>
+          <dgm:ruleLst>
+            <dgm:rule type="primFontSz" val="5" fact="NaN" max="NaN"/>
+          </dgm:ruleLst>
+        </dgm:layoutNode>
+        <dgm:layoutNode name="Parent" styleLbl="alignNode1">
+          <dgm:varLst>
+            <dgm:chMax val="3"/>
+            <dgm:chPref val="3"/>
+            <dgm:bulletEnabled val="1"/>
+          </dgm:varLst>
+          <dgm:alg type="tx">
+            <dgm:param type="shpTxLTRAlignCh" val="ctr"/>
+            <dgm:param type="txAnchorVertCh" val="mid"/>
+          </dgm:alg>
+          <dgm:shape xmlns:r="http://schemas.openxmlformats.org/officeDocument/2006/relationships" type="round2SameRect" r:blip="">
+            <dgm:adjLst>
+              <dgm:adj idx="1" val="0.1667"/>
+              <dgm:adj idx="2" val="0"/>
+            </dgm:adjLst>
+          </dgm:shape>
+          <dgm:presOf axis="self" ptType="node"/>
+          <dgm:constrLst>
+            <dgm:constr type="lMarg" refType="primFontSz" fact="0.15"/>
+            <dgm:constr type="rMarg" refType="primFontSz" fact="0.15"/>
+            <dgm:constr type="tMarg" refType="primFontSz" fact="0.15"/>
+            <dgm:constr type="bMarg" refType="primFontSz" fact="0.15"/>
+          </dgm:constrLst>
+          <dgm:ruleLst>
+            <dgm:rule type="primFontSz" val="5" fact="NaN" max="NaN"/>
+          </dgm:ruleLst>
+        </dgm:layoutNode>
+        <dgm:layoutNode name="Accent" styleLbl="parChTrans1D1">
+          <dgm:alg type="sp"/>
+          <dgm:shape xmlns:r="http://schemas.openxmlformats.org/officeDocument/2006/relationships" type="line" r:blip="" zOrderOff="-99999">
+            <dgm:adjLst/>
+          </dgm:shape>
+          <dgm:presOf/>
+        </dgm:layoutNode>
+      </dgm:layoutNode>
+      <dgm:choose name="Name10">
+        <dgm:if name="Name11" axis="ch" ptType="node" st="2" cnt="1" func="cnt" op="gte" val="1">
+          <dgm:layoutNode name="Child" styleLbl="revTx">
+            <dgm:varLst>
+              <dgm:chMax val="0"/>
+              <dgm:chPref val="0"/>
+              <dgm:bulletEnabled val="1"/>
+            </dgm:varLst>
+            <dgm:choose name="Name12">
+              <dgm:if name="Name13" func="var" arg="dir" op="equ" val="norm">
+                <dgm:alg type="tx">
+                  <dgm:param type="stBulletLvl" val="1"/>
+                  <dgm:param type="parTxLTRAlign" val="l"/>
+                  <dgm:param type="parTxRTLAlign" val="l"/>
+                  <dgm:param type="txAnchorVert" val="t"/>
+                </dgm:alg>
+              </dgm:if>
+              <dgm:else name="Name14">
+                <dgm:alg type="tx">
+                  <dgm:param type="stBulletLvl" val="1"/>
+                  <dgm:param type="parTxLTRAlign" val="r"/>
+                  <dgm:param type="shpTxLTRAlignCh" val="r"/>
+                  <dgm:param type="txAnchorVert" val="t"/>
+                  <dgm:param type="parTxRTLAlign" val="r"/>
+                </dgm:alg>
+              </dgm:else>
+            </dgm:choose>
+            <dgm:shape xmlns:r="http://schemas.openxmlformats.org/officeDocument/2006/relationships" type="rect" r:blip="">
+              <dgm:adjLst/>
+            </dgm:shape>
+            <dgm:presOf axis="ch desOrSelf" ptType="node node" st="2 1" cnt="0 0"/>
+            <dgm:constrLst>
+              <dgm:constr type="lMarg" refType="primFontSz" fact="0.15"/>
+              <dgm:constr type="rMarg" refType="primFontSz" fact="0.15"/>
+              <dgm:constr type="tMarg" refType="primFontSz" fact="0.15"/>
+              <dgm:constr type="bMarg" refType="primFontSz" fact="0.15"/>
+            </dgm:constrLst>
+            <dgm:ruleLst>
+              <dgm:rule type="primFontSz" val="5" fact="NaN" max="NaN"/>
+            </dgm:ruleLst>
+          </dgm:layoutNode>
+        </dgm:if>
+        <dgm:else name="Name15"/>
+      </dgm:choose>
+      <dgm:forEach name="sibTransForEach" axis="followSib" ptType="sibTrans" cnt="1">
+        <dgm:layoutNode name="sibTrans">
+          <dgm:alg type="sp"/>
+          <dgm:shape xmlns:r="http://schemas.openxmlformats.org/officeDocument/2006/relationships" r:blip="">
+            <dgm:adjLst/>
+          </dgm:shape>
+        </dgm:layoutNode>
+      </dgm:forEach>
+    </dgm:forEach>
+  </dgm:layoutNode>
+</dgm:layoutDef>
+</file>
+
+<file path=ppt/diagrams/quickStyle1.xml><?xml version="1.0" encoding="utf-8"?>
+<dgm:styleDef xmlns:dgm="http://schemas.openxmlformats.org/drawingml/2006/diagram" xmlns:a="http://schemas.openxmlformats.org/drawingml/2006/main" uniqueId="urn:microsoft.com/office/officeart/2005/8/quickstyle/simple1">
+  <dgm:title val=""/>
+  <dgm:desc val=""/>
+  <dgm:catLst>
+    <dgm:cat type="simple" pri="10100"/>
+  </dgm:catLst>
+  <dgm:scene3d>
+    <a:camera prst="orthographicFront"/>
+    <a:lightRig rig="threePt" dir="t"/>
+  </dgm:scene3d>
+  <dgm:styleLbl name="node0">
+    <dgm:scene3d>
+      <a:camera prst="orthographicFront"/>
+      <a:lightRig rig="threePt" dir="t"/>
+    </dgm:scene3d>
+    <dgm:sp3d/>
+    <dgm:txPr/>
+    <dgm:style>
+      <a:lnRef idx="2">
+        <a:scrgbClr r="0" g="0" b="0"/>
+      </a:lnRef>
+      <a:fillRef idx="1">
+        <a:scrgbClr r="0" g="0" b="0"/>
+      </a:fillRef>
+      <a:effectRef idx="0">
+        <a:scrgbClr r="0" g="0" b="0"/>
+      </a:effectRef>
+      <a:fontRef idx="minor">
+        <a:schemeClr val="lt1"/>
+      </a:fontRef>
+    </dgm:style>
+  </dgm:styleLbl>
+  <dgm:styleLbl name="lnNode1">
+    <dgm:scene3d>
+      <a:camera prst="orthographicFront"/>
+      <a:lightRig rig="threePt" dir="t"/>
+    </dgm:scene3d>
+    <dgm:sp3d/>
+    <dgm:txPr/>
+    <dgm:style>
+      <a:lnRef idx="2">
+        <a:scrgbClr r="0" g="0" b="0"/>
+      </a:lnRef>
+      <a:fillRef idx="1">
+        <a:scrgbClr r="0" g="0" b="0"/>
+      </a:fillRef>
+      <a:effectRef idx="0">
+        <a:scrgbClr r="0" g="0" b="0"/>
+      </a:effectRef>
+      <a:fontRef idx="minor">
+        <a:schemeClr val="lt1"/>
+      </a:fontRef>
+    </dgm:style>
+  </dgm:styleLbl>
+  <dgm:styleLbl name="vennNode1">
+    <dgm:scene3d>
+      <a:camera prst="orthographicFront"/>
+      <a:lightRig rig="threePt" dir="t"/>
+    </dgm:scene3d>
+    <dgm:sp3d/>
+    <dgm:txPr/>
+    <dgm:style>
+      <a:lnRef idx="2">
+        <a:scrgbClr r="0" g="0" b="0"/>
+      </a:lnRef>
+      <a:fillRef idx="1">
+        <a:scrgbClr r="0" g="0" b="0"/>
+      </a:fillRef>
+      <a:effectRef idx="0">
+        <a:scrgbClr r="0" g="0" b="0"/>
+      </a:effectRef>
+      <a:fontRef idx="minor">
+        <a:schemeClr val="tx1"/>
+      </a:fontRef>
+    </dgm:style>
+  </dgm:styleLbl>
+  <dgm:styleLbl name="alignNode1">
+    <dgm:scene3d>
+      <a:camera prst="orthographicFront"/>
+      <a:lightRig rig="threePt" dir="t"/>
+    </dgm:scene3d>
+    <dgm:sp3d/>
+    <dgm:txPr/>
+    <dgm:style>
+      <a:lnRef idx="2">
+        <a:scrgbClr r="0" g="0" b="0"/>
+      </a:lnRef>
+      <a:fillRef idx="1">
+        <a:scrgbClr r="0" g="0" b="0"/>
+      </a:fillRef>
+      <a:effectRef idx="0">
+        <a:scrgbClr r="0" g="0" b="0"/>
+      </a:effectRef>
+      <a:fontRef idx="minor">
+        <a:schemeClr val="lt1"/>
+      </a:fontRef>
+    </dgm:style>
+  </dgm:styleLbl>
+  <dgm:styleLbl name="node1">
+    <dgm:scene3d>
+      <a:camera prst="orthographicFront"/>
+      <a:lightRig rig="threePt" dir="t"/>
+    </dgm:scene3d>
+    <dgm:sp3d/>
+    <dgm:txPr/>
+    <dgm:style>
+      <a:lnRef idx="2">
+        <a:scrgbClr r="0" g="0" b="0"/>
+      </a:lnRef>
+      <a:fillRef idx="1">
+        <a:scrgbClr r="0" g="0" b="0"/>
+      </a:fillRef>
+      <a:effectRef idx="0">
+        <a:scrgbClr r="0" g="0" b="0"/>
+      </a:effectRef>
+      <a:fontRef idx="minor">
+        <a:schemeClr val="lt1"/>
+      </a:fontRef>
+    </dgm:style>
+  </dgm:styleLbl>
+  <dgm:styleLbl name="node2">
+    <dgm:scene3d>
+      <a:camera prst="orthographicFront"/>
+      <a:lightRig rig="threePt" dir="t"/>
+    </dgm:scene3d>
+    <dgm:sp3d/>
+    <dgm:txPr/>
+    <dgm:style>
+      <a:lnRef idx="2">
+        <a:scrgbClr r="0" g="0" b="0"/>
+      </a:lnRef>
+      <a:fillRef idx="1">
+        <a:scrgbClr r="0" g="0" b="0"/>
+      </a:fillRef>
+      <a:effectRef idx="0">
+        <a:scrgbClr r="0" g="0" b="0"/>
+      </a:effectRef>
+      <a:fontRef idx="minor">
+        <a:schemeClr val="lt1"/>
+      </a:fontRef>
+    </dgm:style>
+  </dgm:styleLbl>
+  <dgm:styleLbl name="node3">
+    <dgm:scene3d>
+      <a:camera prst="orthographicFront"/>
+      <a:lightRig rig="threePt" dir="t"/>
+    </dgm:scene3d>
+    <dgm:sp3d/>
+    <dgm:txPr/>
+    <dgm:style>
+      <a:lnRef idx="2">
+        <a:scrgbClr r="0" g="0" b="0"/>
+      </a:lnRef>
+      <a:fillRef idx="1">
+        <a:scrgbClr r="0" g="0" b="0"/>
+      </a:fillRef>
+      <a:effectRef idx="0">
+        <a:scrgbClr r="0" g="0" b="0"/>
+      </a:effectRef>
+      <a:fontRef idx="minor">
+        <a:schemeClr val="lt1"/>
+      </a:fontRef>
+    </dgm:style>
+  </dgm:styleLbl>
+  <dgm:styleLbl name="node4">
+    <dgm:scene3d>
+      <a:camera prst="orthographicFront"/>
+      <a:lightRig rig="threePt" dir="t"/>
+    </dgm:scene3d>
+    <dgm:sp3d/>
+    <dgm:txPr/>
+    <dgm:style>
+      <a:lnRef idx="2">
+        <a:scrgbClr r="0" g="0" b="0"/>
+      </a:lnRef>
+      <a:fillRef idx="1">
+        <a:scrgbClr r="0" g="0" b="0"/>
+      </a:fillRef>
+      <a:effectRef idx="0">
+        <a:scrgbClr r="0" g="0" b="0"/>
+      </a:effectRef>
+      <a:fontRef idx="minor">
+        <a:schemeClr val="lt1"/>
+      </a:fontRef>
+    </dgm:style>
+  </dgm:styleLbl>
+  <dgm:styleLbl name="fgImgPlace1">
+    <dgm:scene3d>
+      <a:camera prst="orthographicFront"/>
+      <a:lightRig rig="threePt" dir="t"/>
+    </dgm:scene3d>
+    <dgm:sp3d/>
+    <dgm:txPr/>
+    <dgm:style>
+      <a:lnRef idx="2">
+        <a:scrgbClr r="0" g="0" b="0"/>
+      </a:lnRef>
+      <a:fillRef idx="1">
+        <a:scrgbClr r="0" g="0" b="0"/>
+      </a:fillRef>
+      <a:effectRef idx="0">
+        <a:scrgbClr r="0" g="0" b="0"/>
+      </a:effectRef>
+      <a:fontRef idx="minor"/>
+    </dgm:style>
+  </dgm:styleLbl>
+  <dgm:styleLbl name="alignImgPlace1">
+    <dgm:scene3d>
+      <a:camera prst="orthographicFront"/>
+      <a:lightRig rig="threePt" dir="t"/>
+    </dgm:scene3d>
+    <dgm:sp3d/>
+    <dgm:txPr/>
+    <dgm:style>
+      <a:lnRef idx="2">
+        <a:scrgbClr r="0" g="0" b="0"/>
+      </a:lnRef>
+      <a:fillRef idx="1">
+        <a:scrgbClr r="0" g="0" b="0"/>
+      </a:fillRef>
+      <a:effectRef idx="0">
+        <a:scrgbClr r="0" g="0" b="0"/>
+      </a:effectRef>
+      <a:fontRef idx="minor"/>
+    </dgm:style>
+  </dgm:styleLbl>
+  <dgm:styleLbl name="bgImgPlace1">
+    <dgm:scene3d>
+      <a:camera prst="orthographicFront"/>
+      <a:lightRig rig="threePt" dir="t"/>
+    </dgm:scene3d>
+    <dgm:sp3d/>
+    <dgm:txPr/>
+    <dgm:style>
+      <a:lnRef idx="2">
+        <a:scrgbClr r="0" g="0" b="0"/>
+      </a:lnRef>
+      <a:fillRef idx="1">
+        <a:scrgbClr r="0" g="0" b="0"/>
+      </a:fillRef>
+      <a:effectRef idx="0">
+        <a:scrgbClr r="0" g="0" b="0"/>
+      </a:effectRef>
+      <a:fontRef idx="minor"/>
+    </dgm:style>
+  </dgm:styleLbl>
+  <dgm:styleLbl name="sibTrans2D1">
+    <dgm:scene3d>
+      <a:camera prst="orthographicFront"/>
+      <a:lightRig rig="threePt" dir="t"/>
+    </dgm:scene3d>
+    <dgm:sp3d/>
+    <dgm:txPr/>
+    <dgm:style>
+      <a:lnRef idx="0">
+        <a:scrgbClr r="0" g="0" b="0"/>
+      </a:lnRef>
+      <a:fillRef idx="1">
+        <a:scrgbClr r="0" g="0" b="0"/>
+      </a:fillRef>
+      <a:effectRef idx="0">
+        <a:scrgbClr r="0" g="0" b="0"/>
+      </a:effectRef>
+      <a:fontRef idx="minor">
+        <a:schemeClr val="lt1"/>
+      </a:fontRef>
+    </dgm:style>
+  </dgm:styleLbl>
+  <dgm:styleLbl name="fgSibTrans2D1">
+    <dgm:scene3d>
+      <a:camera prst="orthographicFront"/>
+      <a:lightRig rig="threePt" dir="t"/>
+    </dgm:scene3d>
+    <dgm:sp3d/>
+    <dgm:txPr/>
+    <dgm:style>
+      <a:lnRef idx="0">
+        <a:scrgbClr r="0" g="0" b="0"/>
+      </a:lnRef>
+      <a:fillRef idx="1">
+        <a:scrgbClr r="0" g="0" b="0"/>
+      </a:fillRef>
+      <a:effectRef idx="0">
+        <a:scrgbClr r="0" g="0" b="0"/>
+      </a:effectRef>
+      <a:fontRef idx="minor">
+        <a:schemeClr val="lt1"/>
+      </a:fontRef>
+    </dgm:style>
+  </dgm:styleLbl>
+  <dgm:styleLbl name="bgSibTrans2D1">
+    <dgm:scene3d>
+      <a:camera prst="orthographicFront"/>
+      <a:lightRig rig="threePt" dir="t"/>
+    </dgm:scene3d>
+    <dgm:sp3d/>
+    <dgm:txPr/>
+    <dgm:style>
+      <a:lnRef idx="0">
+        <a:scrgbClr r="0" g="0" b="0"/>
+      </a:lnRef>
+      <a:fillRef idx="1">
+        <a:scrgbClr r="0" g="0" b="0"/>
+      </a:fillRef>
+      <a:effectRef idx="0">
+        <a:scrgbClr r="0" g="0" b="0"/>
+      </a:effectRef>
+      <a:fontRef idx="minor">
+        <a:schemeClr val="lt1"/>
+      </a:fontRef>
+    </dgm:style>
+  </dgm:styleLbl>
+  <dgm:styleLbl name="sibTrans1D1">
+    <dgm:scene3d>
+      <a:camera prst="orthographicFront"/>
+      <a:lightRig rig="threePt" dir="t"/>
+    </dgm:scene3d>
+    <dgm:sp3d/>
+    <dgm:txPr/>
+    <dgm:style>
+      <a:lnRef idx="1">
+        <a:scrgbClr r="0" g="0" b="0"/>
+      </a:lnRef>
+      <a:fillRef idx="0">
+        <a:scrgbClr r="0" g="0" b="0"/>
+      </a:fillRef>
+      <a:effectRef idx="0">
+        <a:scrgbClr r="0" g="0" b="0"/>
+      </a:effectRef>
+      <a:fontRef idx="minor"/>
+    </dgm:style>
+  </dgm:styleLbl>
+  <dgm:styleLbl name="callout">
+    <dgm:scene3d>
+      <a:camera prst="orthographicFront"/>
+      <a:lightRig rig="threePt" dir="t"/>
+    </dgm:scene3d>
+    <dgm:sp3d/>
+    <dgm:txPr/>
+    <dgm:style>
+      <a:lnRef idx="2">
+        <a:scrgbClr r="0" g="0" b="0"/>
+      </a:lnRef>
+      <a:fillRef idx="1">
+        <a:scrgbClr r="0" g="0" b="0"/>
+      </a:fillRef>
+      <a:effectRef idx="0">
+        <a:scrgbClr r="0" g="0" b="0"/>
+      </a:effectRef>
+      <a:fontRef idx="minor"/>
+    </dgm:style>
+  </dgm:styleLbl>
+  <dgm:styleLbl name="asst0">
+    <dgm:scene3d>
+      <a:camera prst="orthographicFront"/>
+      <a:lightRig rig="threePt" dir="t"/>
+    </dgm:scene3d>
+    <dgm:sp3d/>
+    <dgm:txPr/>
+    <dgm:style>
+      <a:lnRef idx="2">
+        <a:scrgbClr r="0" g="0" b="0"/>
+      </a:lnRef>
+      <a:fillRef idx="1">
+        <a:scrgbClr r="0" g="0" b="0"/>
+      </a:fillRef>
+      <a:effectRef idx="0">
+        <a:scrgbClr r="0" g="0" b="0"/>
+      </a:effectRef>
+      <a:fontRef idx="minor">
+        <a:schemeClr val="lt1"/>
+      </a:fontRef>
+    </dgm:style>
+  </dgm:styleLbl>
+  <dgm:styleLbl name="asst1">
+    <dgm:scene3d>
+      <a:camera prst="orthographicFront"/>
+      <a:lightRig rig="threePt" dir="t"/>
+    </dgm:scene3d>
+    <dgm:sp3d/>
+    <dgm:txPr/>
+    <dgm:style>
+      <a:lnRef idx="2">
+        <a:scrgbClr r="0" g="0" b="0"/>
+      </a:lnRef>
+      <a:fillRef idx="1">
+        <a:scrgbClr r="0" g="0" b="0"/>
+      </a:fillRef>
+      <a:effectRef idx="0">
+        <a:scrgbClr r="0" g="0" b="0"/>
+      </a:effectRef>
+      <a:fontRef idx="minor">
+        <a:schemeClr val="lt1"/>
+      </a:fontRef>
+    </dgm:style>
+  </dgm:styleLbl>
+  <dgm:styleLbl name="asst2">
+    <dgm:scene3d>
+      <a:camera prst="orthographicFront"/>
+      <a:lightRig rig="threePt" dir="t"/>
+    </dgm:scene3d>
+    <dgm:sp3d/>
+    <dgm:txPr/>
+    <dgm:style>
+      <a:lnRef idx="2">
+        <a:scrgbClr r="0" g="0" b="0"/>
+      </a:lnRef>
+      <a:fillRef idx="1">
+        <a:scrgbClr r="0" g="0" b="0"/>
+      </a:fillRef>
+      <a:effectRef idx="0">
+        <a:scrgbClr r="0" g="0" b="0"/>
+      </a:effectRef>
+      <a:fontRef idx="minor">
+        <a:schemeClr val="lt1"/>
+      </a:fontRef>
+    </dgm:style>
+  </dgm:styleLbl>
+  <dgm:styleLbl name="asst3">
+    <dgm:scene3d>
+      <a:camera prst="orthographicFront"/>
+      <a:lightRig rig="threePt" dir="t"/>
+    </dgm:scene3d>
+    <dgm:sp3d/>
+    <dgm:txPr/>
+    <dgm:style>
+      <a:lnRef idx="2">
+        <a:scrgbClr r="0" g="0" b="0"/>
+      </a:lnRef>
+      <a:fillRef idx="1">
+        <a:scrgbClr r="0" g="0" b="0"/>
+      </a:fillRef>
+      <a:effectRef idx="0">
+        <a:scrgbClr r="0" g="0" b="0"/>
+      </a:effectRef>
+      <a:fontRef idx="minor">
+        <a:schemeClr val="lt1"/>
+      </a:fontRef>
+    </dgm:style>
+  </dgm:styleLbl>
+  <dgm:styleLbl name="asst4">
+    <dgm:scene3d>
+      <a:camera prst="orthographicFront"/>
+      <a:lightRig rig="threePt" dir="t"/>
+    </dgm:scene3d>
+    <dgm:sp3d/>
+    <dgm:txPr/>
+    <dgm:style>
+      <a:lnRef idx="2">
+        <a:scrgbClr r="0" g="0" b="0"/>
+      </a:lnRef>
+      <a:fillRef idx="1">
+        <a:scrgbClr r="0" g="0" b="0"/>
+      </a:fillRef>
+      <a:effectRef idx="0">
+        <a:scrgbClr r="0" g="0" b="0"/>
+      </a:effectRef>
+      <a:fontRef idx="minor">
+        <a:schemeClr val="lt1"/>
+      </a:fontRef>
+    </dgm:style>
+  </dgm:styleLbl>
+  <dgm:styleLbl name="parChTrans2D1">
+    <dgm:scene3d>
+      <a:camera prst="orthographicFront"/>
+      <a:lightRig rig="threePt" dir="t"/>
+    </dgm:scene3d>
+    <dgm:sp3d/>
+    <dgm:txPr/>
+    <dgm:style>
+      <a:lnRef idx="2">
+        <a:scrgbClr r="0" g="0" b="0"/>
+      </a:lnRef>
+      <a:fillRef idx="1">
+        <a:scrgbClr r="0" g="0" b="0"/>
+      </a:fillRef>
+      <a:effectRef idx="0">
+        <a:scrgbClr r="0" g="0" b="0"/>
+      </a:effectRef>
+      <a:fontRef idx="minor">
+        <a:schemeClr val="lt1"/>
+      </a:fontRef>
+    </dgm:style>
+  </dgm:styleLbl>
+  <dgm:styleLbl name="parChTrans2D2">
+    <dgm:scene3d>
+      <a:camera prst="orthographicFront"/>
+      <a:lightRig rig="threePt" dir="t"/>
+    </dgm:scene3d>
+    <dgm:sp3d/>
+    <dgm:txPr/>
+    <dgm:style>
+      <a:lnRef idx="2">
+        <a:scrgbClr r="0" g="0" b="0"/>
+      </a:lnRef>
+      <a:fillRef idx="1">
+        <a:scrgbClr r="0" g="0" b="0"/>
+      </a:fillRef>
+      <a:effectRef idx="0">
+        <a:scrgbClr r="0" g="0" b="0"/>
+      </a:effectRef>
+      <a:fontRef idx="minor">
+        <a:schemeClr val="lt1"/>
+      </a:fontRef>
+    </dgm:style>
+  </dgm:styleLbl>
+  <dgm:styleLbl name="parChTrans2D3">
+    <dgm:scene3d>
+      <a:camera prst="orthographicFront"/>
+      <a:lightRig rig="threePt" dir="t"/>
+    </dgm:scene3d>
+    <dgm:sp3d/>
+    <dgm:txPr/>
+    <dgm:style>
+      <a:lnRef idx="2">
+        <a:scrgbClr r="0" g="0" b="0"/>
+      </a:lnRef>
+      <a:fillRef idx="1">
+        <a:scrgbClr r="0" g="0" b="0"/>
+      </a:fillRef>
+      <a:effectRef idx="0">
+        <a:scrgbClr r="0" g="0" b="0"/>
+      </a:effectRef>
+      <a:fontRef idx="minor">
+        <a:schemeClr val="lt1"/>
+      </a:fontRef>
+    </dgm:style>
+  </dgm:styleLbl>
+  <dgm:styleLbl name="parChTrans2D4">
+    <dgm:scene3d>
+      <a:camera prst="orthographicFront"/>
+      <a:lightRig rig="threePt" dir="t"/>
+    </dgm:scene3d>
+    <dgm:sp3d/>
+    <dgm:txPr/>
+    <dgm:style>
+      <a:lnRef idx="2">
+        <a:scrgbClr r="0" g="0" b="0"/>
+      </a:lnRef>
+      <a:fillRef idx="1">
+        <a:scrgbClr r="0" g="0" b="0"/>
+      </a:fillRef>
+      <a:effectRef idx="0">
+        <a:scrgbClr r="0" g="0" b="0"/>
+      </a:effectRef>
+      <a:fontRef idx="minor">
+        <a:schemeClr val="lt1"/>
+      </a:fontRef>
+    </dgm:style>
+  </dgm:styleLbl>
+  <dgm:styleLbl name="parChTrans1D1">
+    <dgm:scene3d>
+      <a:camera prst="orthographicFront"/>
+      <a:lightRig rig="threePt" dir="t"/>
+    </dgm:scene3d>
+    <dgm:sp3d/>
+    <dgm:txPr/>
+    <dgm:style>
+      <a:lnRef idx="2">
+        <a:scrgbClr r="0" g="0" b="0"/>
+      </a:lnRef>
+      <a:fillRef idx="0">
+        <a:scrgbClr r="0" g="0" b="0"/>
+      </a:fillRef>
+      <a:effectRef idx="0">
+        <a:scrgbClr r="0" g="0" b="0"/>
+      </a:effectRef>
+      <a:fontRef idx="minor"/>
+    </dgm:style>
+  </dgm:styleLbl>
+  <dgm:styleLbl name="parChTrans1D2">
+    <dgm:scene3d>
+      <a:camera prst="orthographicFront"/>
+      <a:lightRig rig="threePt" dir="t"/>
+    </dgm:scene3d>
+    <dgm:sp3d/>
+    <dgm:txPr/>
+    <dgm:style>
+      <a:lnRef idx="2">
+        <a:scrgbClr r="0" g="0" b="0"/>
+      </a:lnRef>
+      <a:fillRef idx="0">
+        <a:scrgbClr r="0" g="0" b="0"/>
+      </a:fillRef>
+      <a:effectRef idx="0">
+        <a:scrgbClr r="0" g="0" b="0"/>
+      </a:effectRef>
+      <a:fontRef idx="minor"/>
+    </dgm:style>
+  </dgm:styleLbl>
+  <dgm:styleLbl name="parChTrans1D3">
+    <dgm:scene3d>
+      <a:camera prst="orthographicFront"/>
+      <a:lightRig rig="threePt" dir="t"/>
+    </dgm:scene3d>
+    <dgm:sp3d/>
+    <dgm:txPr/>
+    <dgm:style>
+      <a:lnRef idx="2">
+        <a:scrgbClr r="0" g="0" b="0"/>
+      </a:lnRef>
+      <a:fillRef idx="0">
+        <a:scrgbClr r="0" g="0" b="0"/>
+      </a:fillRef>
+      <a:effectRef idx="0">
+        <a:scrgbClr r="0" g="0" b="0"/>
+      </a:effectRef>
+      <a:fontRef idx="minor"/>
+    </dgm:style>
+  </dgm:styleLbl>
+  <dgm:styleLbl name="parChTrans1D4">
+    <dgm:scene3d>
+      <a:camera prst="orthographicFront"/>
+      <a:lightRig rig="threePt" dir="t"/>
+    </dgm:scene3d>
+    <dgm:sp3d/>
+    <dgm:txPr/>
+    <dgm:style>
+      <a:lnRef idx="2">
+        <a:scrgbClr r="0" g="0" b="0"/>
+      </a:lnRef>
+      <a:fillRef idx="0">
+        <a:scrgbClr r="0" g="0" b="0"/>
+      </a:fillRef>
+      <a:effectRef idx="0">
+        <a:scrgbClr r="0" g="0" b="0"/>
+      </a:effectRef>
+      <a:fontRef idx="minor"/>
+    </dgm:style>
+  </dgm:styleLbl>
+  <dgm:styleLbl name="fgAcc1">
+    <dgm:scene3d>
+      <a:camera prst="orthographicFront"/>
+      <a:lightRig rig="threePt" dir="t"/>
+    </dgm:scene3d>
+    <dgm:sp3d/>
+    <dgm:txPr/>
+    <dgm:style>
+      <a:lnRef idx="2">
+        <a:scrgbClr r="0" g="0" b="0"/>
+      </a:lnRef>
+      <a:fillRef idx="1">
+        <a:scrgbClr r="0" g="0" b="0"/>
+      </a:fillRef>
+      <a:effectRef idx="0">
+        <a:scrgbClr r="0" g="0" b="0"/>
+      </a:effectRef>
+      <a:fontRef idx="minor"/>
+    </dgm:style>
+  </dgm:styleLbl>
+  <dgm:styleLbl name="conFgAcc1">
+    <dgm:scene3d>
+      <a:camera prst="orthographicFront"/>
+      <a:lightRig rig="threePt" dir="t"/>
+    </dgm:scene3d>
+    <dgm:sp3d/>
+    <dgm:txPr/>
+    <dgm:style>
+      <a:lnRef idx="2">
+        <a:scrgbClr r="0" g="0" b="0"/>
+      </a:lnRef>
+      <a:fillRef idx="1">
+        <a:scrgbClr r="0" g="0" b="0"/>
+      </a:fillRef>
+      <a:effectRef idx="0">
+        <a:scrgbClr r="0" g="0" b="0"/>
+      </a:effectRef>
+      <a:fontRef idx="minor"/>
+    </dgm:style>
+  </dgm:styleLbl>
+  <dgm:styleLbl name="alignAcc1">
+    <dgm:scene3d>
+      <a:camera prst="orthographicFront"/>
+      <a:lightRig rig="threePt" dir="t"/>
+    </dgm:scene3d>
+    <dgm:sp3d/>
+    <dgm:txPr/>
+    <dgm:style>
+      <a:lnRef idx="2">
+        <a:scrgbClr r="0" g="0" b="0"/>
+      </a:lnRef>
+      <a:fillRef idx="1">
+        <a:scrgbClr r="0" g="0" b="0"/>
+      </a:fillRef>
+      <a:effectRef idx="0">
+        <a:scrgbClr r="0" g="0" b="0"/>
+      </a:effectRef>
+      <a:fontRef idx="minor"/>
+    </dgm:style>
+  </dgm:styleLbl>
+  <dgm:styleLbl name="trAlignAcc1">
+    <dgm:scene3d>
+      <a:camera prst="orthographicFront"/>
+      <a:lightRig rig="threePt" dir="t"/>
+    </dgm:scene3d>
+    <dgm:sp3d/>
+    <dgm:txPr/>
+    <dgm:style>
+      <a:lnRef idx="1">
+        <a:scrgbClr r="0" g="0" b="0"/>
+      </a:lnRef>
+      <a:fillRef idx="1">
+        <a:scrgbClr r="0" g="0" b="0"/>
+      </a:fillRef>
+      <a:effectRef idx="0">
+        <a:scrgbClr r="0" g="0" b="0"/>
+      </a:effectRef>
+      <a:fontRef idx="minor"/>
+    </dgm:style>
+  </dgm:styleLbl>
+  <dgm:styleLbl name="bgAcc1">
+    <dgm:scene3d>
+      <a:camera prst="orthographicFront"/>
+      <a:lightRig rig="threePt" dir="t"/>
+    </dgm:scene3d>
+    <dgm:sp3d/>
+    <dgm:txPr/>
+    <dgm:style>
+      <a:lnRef idx="2">
+        <a:scrgbClr r="0" g="0" b="0"/>
+      </a:lnRef>
+      <a:fillRef idx="1">
+        <a:scrgbClr r="0" g="0" b="0"/>
+      </a:fillRef>
+      <a:effectRef idx="0">
+        <a:scrgbClr r="0" g="0" b="0"/>
+      </a:effectRef>
+      <a:fontRef idx="minor"/>
+    </dgm:style>
+  </dgm:styleLbl>
+  <dgm:styleLbl name="solidFgAcc1">
+    <dgm:scene3d>
+      <a:camera prst="orthographicFront"/>
+      <a:lightRig rig="threePt" dir="t"/>
+    </dgm:scene3d>
+    <dgm:sp3d/>
+    <dgm:txPr/>
+    <dgm:style>
+      <a:lnRef idx="2">
+        <a:scrgbClr r="0" g="0" b="0"/>
+      </a:lnRef>
+      <a:fillRef idx="1">
+        <a:scrgbClr r="0" g="0" b="0"/>
+      </a:fillRef>
+      <a:effectRef idx="0">
+        <a:scrgbClr r="0" g="0" b="0"/>
+      </a:effectRef>
+      <a:fontRef idx="minor"/>
+    </dgm:style>
+  </dgm:styleLbl>
+  <dgm:styleLbl name="solidAlignAcc1">
+    <dgm:scene3d>
+      <a:camera prst="orthographicFront"/>
+      <a:lightRig rig="threePt" dir="t"/>
+    </dgm:scene3d>
+    <dgm:sp3d/>
+    <dgm:txPr/>
+    <dgm:style>
+      <a:lnRef idx="2">
+        <a:scrgbClr r="0" g="0" b="0"/>
+      </a:lnRef>
+      <a:fillRef idx="1">
+        <a:scrgbClr r="0" g="0" b="0"/>
+      </a:fillRef>
+      <a:effectRef idx="0">
+        <a:scrgbClr r="0" g="0" b="0"/>
+      </a:effectRef>
+      <a:fontRef idx="minor"/>
+    </dgm:style>
+  </dgm:styleLbl>
+  <dgm:styleLbl name="solidBgAcc1">
+    <dgm:scene3d>
+      <a:camera prst="orthographicFront"/>
+      <a:lightRig rig="threePt" dir="t"/>
+    </dgm:scene3d>
+    <dgm:sp3d/>
+    <dgm:txPr/>
+    <dgm:style>
+      <a:lnRef idx="2">
+        <a:scrgbClr r="0" g="0" b="0"/>
+      </a:lnRef>
+      <a:fillRef idx="1">
+        <a:scrgbClr r="0" g="0" b="0"/>
+      </a:fillRef>
+      <a:effectRef idx="0">
+        <a:scrgbClr r="0" g="0" b="0"/>
+      </a:effectRef>
+      <a:fontRef idx="minor"/>
+    </dgm:style>
+  </dgm:styleLbl>
+  <dgm:styleLbl name="fgAccFollowNode1">
+    <dgm:scene3d>
+      <a:camera prst="orthographicFront"/>
+      <a:lightRig rig="threePt" dir="t"/>
+    </dgm:scene3d>
+    <dgm:sp3d/>
+    <dgm:txPr/>
+    <dgm:style>
+      <a:lnRef idx="2">
+        <a:scrgbClr r="0" g="0" b="0"/>
+      </a:lnRef>
+      <a:fillRef idx="1">
+        <a:scrgbClr r="0" g="0" b="0"/>
+      </a:fillRef>
+      <a:effectRef idx="0">
+        <a:scrgbClr r="0" g="0" b="0"/>
+      </a:effectRef>
+      <a:fontRef idx="minor"/>
+    </dgm:style>
+  </dgm:styleLbl>
+  <dgm:styleLbl name="alignAccFollowNode1">
+    <dgm:scene3d>
+      <a:camera prst="orthographicFront"/>
+      <a:lightRig rig="threePt" dir="t"/>
+    </dgm:scene3d>
+    <dgm:sp3d/>
+    <dgm:txPr/>
+    <dgm:style>
+      <a:lnRef idx="2">
+        <a:scrgbClr r="0" g="0" b="0"/>
+      </a:lnRef>
+      <a:fillRef idx="1">
+        <a:scrgbClr r="0" g="0" b="0"/>
+      </a:fillRef>
+      <a:effectRef idx="0">
+        <a:scrgbClr r="0" g="0" b="0"/>
+      </a:effectRef>
+      <a:fontRef idx="minor"/>
+    </dgm:style>
+  </dgm:styleLbl>
+  <dgm:styleLbl name="bgAccFollowNode1">
+    <dgm:scene3d>
+      <a:camera prst="orthographicFront"/>
+      <a:lightRig rig="threePt" dir="t"/>
+    </dgm:scene3d>
+    <dgm:sp3d/>
+    <dgm:txPr/>
+    <dgm:style>
+      <a:lnRef idx="2">
+        <a:scrgbClr r="0" g="0" b="0"/>
+      </a:lnRef>
+      <a:fillRef idx="1">
+        <a:scrgbClr r="0" g="0" b="0"/>
+      </a:fillRef>
+      <a:effectRef idx="0">
+        <a:scrgbClr r="0" g="0" b="0"/>
+      </a:effectRef>
+      <a:fontRef idx="minor"/>
+    </dgm:style>
+  </dgm:styleLbl>
+  <dgm:styleLbl name="fgAcc0">
+    <dgm:scene3d>
+      <a:camera prst="orthographicFront"/>
+      <a:lightRig rig="threePt" dir="t"/>
+    </dgm:scene3d>
+    <dgm:sp3d/>
+    <dgm:txPr/>
+    <dgm:style>
+      <a:lnRef idx="2">
+        <a:scrgbClr r="0" g="0" b="0"/>
+      </a:lnRef>
+      <a:fillRef idx="1">
+        <a:scrgbClr r="0" g="0" b="0"/>
+      </a:fillRef>
+      <a:effectRef idx="0">
+        <a:scrgbClr r="0" g="0" b="0"/>
+      </a:effectRef>
+      <a:fontRef idx="minor"/>
+    </dgm:style>
+  </dgm:styleLbl>
+  <dgm:styleLbl name="fgAcc2">
+    <dgm:scene3d>
+      <a:camera prst="orthographicFront"/>
+      <a:lightRig rig="threePt" dir="t"/>
+    </dgm:scene3d>
+    <dgm:sp3d/>
+    <dgm:txPr/>
+    <dgm:style>
+      <a:lnRef idx="2">
+        <a:scrgbClr r="0" g="0" b="0"/>
+      </a:lnRef>
+      <a:fillRef idx="1">
+        <a:scrgbClr r="0" g="0" b="0"/>
+      </a:fillRef>
+      <a:effectRef idx="0">
+        <a:scrgbClr r="0" g="0" b="0"/>
+      </a:effectRef>
+      <a:fontRef idx="minor"/>
+    </dgm:style>
+  </dgm:styleLbl>
+  <dgm:styleLbl name="fgAcc3">
+    <dgm:scene3d>
+      <a:camera prst="orthographicFront"/>
+      <a:lightRig rig="threePt" dir="t"/>
+    </dgm:scene3d>
+    <dgm:sp3d/>
+    <dgm:txPr/>
+    <dgm:style>
+      <a:lnRef idx="2">
+        <a:scrgbClr r="0" g="0" b="0"/>
+      </a:lnRef>
+      <a:fillRef idx="1">
+        <a:scrgbClr r="0" g="0" b="0"/>
+      </a:fillRef>
+      <a:effectRef idx="0">
+        <a:scrgbClr r="0" g="0" b="0"/>
+      </a:effectRef>
+      <a:fontRef idx="minor"/>
+    </dgm:style>
+  </dgm:styleLbl>
+  <dgm:styleLbl name="fgAcc4">
+    <dgm:scene3d>
+      <a:camera prst="orthographicFront"/>
+      <a:lightRig rig="threePt" dir="t"/>
+    </dgm:scene3d>
+    <dgm:sp3d/>
+    <dgm:txPr/>
+    <dgm:style>
+      <a:lnRef idx="2">
+        <a:scrgbClr r="0" g="0" b="0"/>
+      </a:lnRef>
+      <a:fillRef idx="1">
+        <a:scrgbClr r="0" g="0" b="0"/>
+      </a:fillRef>
+      <a:effectRef idx="0">
+        <a:scrgbClr r="0" g="0" b="0"/>
+      </a:effectRef>
+      <a:fontRef idx="minor"/>
+    </dgm:style>
+  </dgm:styleLbl>
+  <dgm:styleLbl name="bgShp">
+    <dgm:scene3d>
+      <a:camera prst="orthographicFront"/>
+      <a:lightRig rig="threePt" dir="t"/>
+    </dgm:scene3d>
+    <dgm:sp3d/>
+    <dgm:txPr/>
+    <dgm:style>
+      <a:lnRef idx="0">
+        <a:scrgbClr r="0" g="0" b="0"/>
+      </a:lnRef>
+      <a:fillRef idx="1">
+        <a:scrgbClr r="0" g="0" b="0"/>
+      </a:fillRef>
+      <a:effectRef idx="0">
+        <a:scrgbClr r="0" g="0" b="0"/>
+      </a:effectRef>
+      <a:fontRef idx="minor"/>
+    </dgm:style>
+  </dgm:styleLbl>
+  <dgm:styleLbl name="dkBgShp">
+    <dgm:scene3d>
+      <a:camera prst="orthographicFront"/>
+      <a:lightRig rig="threePt" dir="t"/>
+    </dgm:scene3d>
+    <dgm:sp3d/>
+    <dgm:txPr/>
+    <dgm:style>
+      <a:lnRef idx="0">
+        <a:scrgbClr r="0" g="0" b="0"/>
+      </a:lnRef>
+      <a:fillRef idx="1">
+        <a:scrgbClr r="0" g="0" b="0"/>
+      </a:fillRef>
+      <a:effectRef idx="0">
+        <a:scrgbClr r="0" g="0" b="0"/>
+      </a:effectRef>
+      <a:fontRef idx="minor"/>
+    </dgm:style>
+  </dgm:styleLbl>
+  <dgm:styleLbl name="trBgShp">
+    <dgm:scene3d>
+      <a:camera prst="orthographicFront"/>
+      <a:lightRig rig="threePt" dir="t"/>
+    </dgm:scene3d>
+    <dgm:sp3d/>
+    <dgm:txPr/>
+    <dgm:style>
+      <a:lnRef idx="0">
+        <a:scrgbClr r="0" g="0" b="0"/>
+      </a:lnRef>
+      <a:fillRef idx="1">
+        <a:scrgbClr r="0" g="0" b="0"/>
+      </a:fillRef>
+      <a:effectRef idx="0">
+        <a:scrgbClr r="0" g="0" b="0"/>
+      </a:effectRef>
+      <a:fontRef idx="minor"/>
+    </dgm:style>
+  </dgm:styleLbl>
+  <dgm:styleLbl name="fgShp">
+    <dgm:scene3d>
+      <a:camera prst="orthographicFront"/>
+      <a:lightRig rig="threePt" dir="t"/>
+    </dgm:scene3d>
+    <dgm:sp3d/>
+    <dgm:txPr/>
+    <dgm:style>
+      <a:lnRef idx="2">
+        <a:scrgbClr r="0" g="0" b="0"/>
+      </a:lnRef>
+      <a:fillRef idx="1">
+        <a:scrgbClr r="0" g="0" b="0"/>
+      </a:fillRef>
+      <a:effectRef idx="0">
+        <a:scrgbClr r="0" g="0" b="0"/>
+      </a:effectRef>
+      <a:fontRef idx="minor"/>
+    </dgm:style>
+  </dgm:styleLbl>
+  <dgm:styleLbl name="revTx">
+    <dgm:scene3d>
+      <a:camera prst="orthographicFront"/>
+      <a:lightRig rig="threePt" dir="t"/>
+    </dgm:scene3d>
+    <dgm:sp3d/>
+    <dgm:txPr/>
+    <dgm:style>
+      <a:lnRef idx="0">
+        <a:scrgbClr r="0" g="0" b="0"/>
+      </a:lnRef>
+      <a:fillRef idx="0">
+        <a:scrgbClr r="0" g="0" b="0"/>
+      </a:fillRef>
+      <a:effectRef idx="0">
+        <a:scrgbClr r="0" g="0" b="0"/>
+      </a:effectRef>
+      <a:fontRef idx="minor"/>
+    </dgm:style>
+  </dgm:styleLbl>
+</dgm:styleDef>
 </file>
 
 <file path=ppt/notesMasters/notesMaster1.xml><?xml version="1.0" encoding="utf-8"?>
@@ -6718,7 +11182,7 @@
             </a:pPr>
             <a:r>
               <a:rPr lang="sr-Latn-RS" dirty="0" smtClean="0"/>
-              <a:t>Jankovć Aleksandra SV12/2024</a:t>
+              <a:t>Janković Aleksandra SV12/2024</a:t>
             </a:r>
             <a:endParaRPr dirty="0"/>
           </a:p>
@@ -6857,42 +11321,88 @@
             <p:ph type="title"/>
           </p:nvPr>
         </p:nvSpPr>
-        <p:spPr/>
+        <p:spPr>
+          <a:xfrm>
+            <a:off x="720000" y="149689"/>
+            <a:ext cx="7704000" cy="572700"/>
+          </a:xfrm>
+        </p:spPr>
         <p:txBody>
           <a:bodyPr/>
           <a:lstStyle/>
           <a:p>
             <a:r>
-              <a:rPr lang="sr-Latn-RS" dirty="0" smtClean="0"/>
-              <a:t>SHAP analiza</a:t>
+              <a:rPr lang="sr-Latn-RS" dirty="0"/>
+              <a:t>Rezultati – poređenje modela</a:t>
             </a:r>
             <a:endParaRPr lang="en-GB" dirty="0"/>
           </a:p>
         </p:txBody>
       </p:sp>
-      <p:sp>
-        <p:nvSpPr>
-          <p:cNvPr id="3" name="Subtitle 2"/>
-          <p:cNvSpPr>
-            <a:spLocks noGrp="1"/>
-          </p:cNvSpPr>
-          <p:nvPr>
-            <p:ph type="subTitle" idx="1"/>
-          </p:nvPr>
-        </p:nvSpPr>
-        <p:spPr/>
-        <p:txBody>
-          <a:bodyPr/>
-          <a:lstStyle/>
-          <a:p>
-            <a:endParaRPr lang="en-GB"/>
-          </a:p>
-        </p:txBody>
-      </p:sp>
+      <p:pic>
+        <p:nvPicPr>
+          <p:cNvPr id="4" name="Picture 3"/>
+          <p:cNvPicPr>
+            <a:picLocks noChangeAspect="1"/>
+          </p:cNvPicPr>
+          <p:nvPr/>
+        </p:nvPicPr>
+        <p:blipFill>
+          <a:blip r:embed="rId2">
+            <a:extLst>
+              <a:ext uri="{28A0092B-C50C-407E-A947-70E740481C1C}">
+                <a14:useLocalDpi xmlns:a14="http://schemas.microsoft.com/office/drawing/2010/main" val="0"/>
+              </a:ext>
+            </a:extLst>
+          </a:blip>
+          <a:stretch>
+            <a:fillRect/>
+          </a:stretch>
+        </p:blipFill>
+        <p:spPr>
+          <a:xfrm>
+            <a:off x="2079236" y="772013"/>
+            <a:ext cx="5012227" cy="2120928"/>
+          </a:xfrm>
+          <a:prstGeom prst="rect">
+            <a:avLst/>
+          </a:prstGeom>
+        </p:spPr>
+      </p:pic>
+      <p:pic>
+        <p:nvPicPr>
+          <p:cNvPr id="5" name="Picture 4"/>
+          <p:cNvPicPr>
+            <a:picLocks noChangeAspect="1"/>
+          </p:cNvPicPr>
+          <p:nvPr/>
+        </p:nvPicPr>
+        <p:blipFill>
+          <a:blip r:embed="rId3">
+            <a:extLst>
+              <a:ext uri="{28A0092B-C50C-407E-A947-70E740481C1C}">
+                <a14:useLocalDpi xmlns:a14="http://schemas.microsoft.com/office/drawing/2010/main" val="0"/>
+              </a:ext>
+            </a:extLst>
+          </a:blip>
+          <a:stretch>
+            <a:fillRect/>
+          </a:stretch>
+        </p:blipFill>
+        <p:spPr>
+          <a:xfrm>
+            <a:off x="2079236" y="2892941"/>
+            <a:ext cx="5012228" cy="2120420"/>
+          </a:xfrm>
+          <a:prstGeom prst="rect">
+            <a:avLst/>
+          </a:prstGeom>
+        </p:spPr>
+      </p:pic>
     </p:spTree>
     <p:extLst>
       <p:ext uri="{BB962C8B-B14F-4D97-AF65-F5344CB8AC3E}">
-        <p14:creationId xmlns:p14="http://schemas.microsoft.com/office/powerpoint/2010/main" val="1688779211"/>
+        <p14:creationId xmlns:p14="http://schemas.microsoft.com/office/powerpoint/2010/main" val="3722031951"/>
       </p:ext>
     </p:extLst>
   </p:cSld>
@@ -6943,7 +11453,7 @@
           <a:p>
             <a:r>
               <a:rPr lang="sr-Latn-RS" dirty="0" smtClean="0"/>
-              <a:t>Model vs molekulski doking</a:t>
+              <a:t>Rezultati – transfer efikasnost</a:t>
             </a:r>
             <a:endParaRPr lang="en-GB" dirty="0"/>
           </a:p>
@@ -6959,19 +11469,75 @@
             <p:ph type="subTitle" idx="1"/>
           </p:nvPr>
         </p:nvSpPr>
-        <p:spPr/>
+        <p:spPr>
+          <a:xfrm>
+            <a:off x="360419" y="1201402"/>
+            <a:ext cx="8063581" cy="3690974"/>
+          </a:xfrm>
+        </p:spPr>
         <p:txBody>
           <a:bodyPr/>
           <a:lstStyle/>
           <a:p>
-            <a:endParaRPr lang="en-GB"/>
+            <a:r>
+              <a:rPr lang="sr-Latn-RS" dirty="0" smtClean="0"/>
+              <a:t>Transfer efikasnost=RMSE(scenario 2)/RMSE(scenario 1)</a:t>
+            </a:r>
+          </a:p>
+          <a:p>
+            <a:r>
+              <a:rPr lang="sr-Latn-RS" dirty="0" smtClean="0"/>
+              <a:t>Vrednost &lt;1 bi značila da je transfer learning poboljšao model</a:t>
+            </a:r>
+          </a:p>
+          <a:p>
+            <a:r>
+              <a:rPr lang="sr-Latn-RS" dirty="0" smtClean="0"/>
+              <a:t>Sve vrednosti su ~1, za neke &gt;1</a:t>
+            </a:r>
+          </a:p>
+          <a:p>
+            <a:r>
+              <a:rPr lang="sr-Latn-RS" dirty="0" smtClean="0"/>
+              <a:t>Zaključak: Transfer learning nije doneo očekivana poboljšanja (razlozi mogu biti dovoljno velik uzorak humanih podataka ili sličnost, ali ne i identičnost kravljih podataka, mogućnost pojave šuma) </a:t>
+            </a:r>
           </a:p>
         </p:txBody>
       </p:sp>
+      <p:pic>
+        <p:nvPicPr>
+          <p:cNvPr id="4" name="Picture 3"/>
+          <p:cNvPicPr>
+            <a:picLocks noChangeAspect="1"/>
+          </p:cNvPicPr>
+          <p:nvPr/>
+        </p:nvPicPr>
+        <p:blipFill>
+          <a:blip r:embed="rId2">
+            <a:extLst>
+              <a:ext uri="{28A0092B-C50C-407E-A947-70E740481C1C}">
+                <a14:useLocalDpi xmlns:a14="http://schemas.microsoft.com/office/drawing/2010/main" val="0"/>
+              </a:ext>
+            </a:extLst>
+          </a:blip>
+          <a:stretch>
+            <a:fillRect/>
+          </a:stretch>
+        </p:blipFill>
+        <p:spPr>
+          <a:xfrm>
+            <a:off x="2422826" y="2616894"/>
+            <a:ext cx="4632063" cy="2275482"/>
+          </a:xfrm>
+          <a:prstGeom prst="rect">
+            <a:avLst/>
+          </a:prstGeom>
+        </p:spPr>
+      </p:pic>
     </p:spTree>
     <p:extLst>
       <p:ext uri="{BB962C8B-B14F-4D97-AF65-F5344CB8AC3E}">
-        <p14:creationId xmlns:p14="http://schemas.microsoft.com/office/powerpoint/2010/main" val="3340797598"/>
+        <p14:creationId xmlns:p14="http://schemas.microsoft.com/office/powerpoint/2010/main" val="1444401571"/>
       </p:ext>
     </p:extLst>
   </p:cSld>
@@ -7022,7 +11588,7 @@
           <a:p>
             <a:r>
               <a:rPr lang="sr-Latn-RS" dirty="0" smtClean="0"/>
-              <a:t>Derivati cimetne kiseline</a:t>
+              <a:t>SHAP analiza</a:t>
             </a:r>
             <a:endParaRPr lang="en-GB" dirty="0"/>
           </a:p>
@@ -7038,19 +11604,113 @@
             <p:ph type="subTitle" idx="1"/>
           </p:nvPr>
         </p:nvSpPr>
-        <p:spPr/>
+        <p:spPr>
+          <a:xfrm>
+            <a:off x="666604" y="1112200"/>
+            <a:ext cx="8137000" cy="3604203"/>
+          </a:xfrm>
+        </p:spPr>
         <p:txBody>
           <a:bodyPr/>
           <a:lstStyle/>
           <a:p>
-            <a:endParaRPr lang="en-GB"/>
+            <a:r>
+              <a:rPr lang="sr-Latn-RS" sz="1600" dirty="0" smtClean="0"/>
+              <a:t>SHAP je tehnika koja objašnjava pojedinačne predikcije</a:t>
+            </a:r>
+          </a:p>
+          <a:p>
+            <a:r>
+              <a:rPr lang="sr-Latn-RS" sz="1600" dirty="0" smtClean="0"/>
+              <a:t>SHAP analiza Random Forest modela identifikovala je strukturne fingerprintove kao najuticajnije prediktore vezivanja</a:t>
+            </a:r>
+          </a:p>
+          <a:p>
+            <a:r>
+              <a:rPr lang="sr-Latn-RS" sz="1600" dirty="0" smtClean="0"/>
+              <a:t>MFP_736 najuticajniji</a:t>
+            </a:r>
+          </a:p>
+          <a:p>
+            <a:r>
+              <a:rPr lang="sr-Latn-RS" sz="1600" dirty="0" smtClean="0"/>
+              <a:t>Ukazuje</a:t>
+            </a:r>
+            <a:r>
+              <a:rPr lang="en-GB" sz="1600" dirty="0" smtClean="0"/>
+              <a:t> </a:t>
+            </a:r>
+            <a:r>
+              <a:rPr lang="en-GB" sz="1600" dirty="0"/>
+              <a:t>da prisustvo/odsustvo određenih 2D/3D strukturnih motiva dominantno određuje afinitet vezivanja za </a:t>
+            </a:r>
+            <a:r>
+              <a:rPr lang="en-GB" sz="1600" dirty="0" smtClean="0"/>
+              <a:t>tripsin</a:t>
+            </a:r>
+            <a:endParaRPr lang="sr-Latn-RS" sz="1600" dirty="0" smtClean="0"/>
+          </a:p>
+          <a:p>
+            <a:r>
+              <a:rPr lang="sr-Latn-RS" sz="1600" dirty="0"/>
+              <a:t>Elektrotopološki deskriptori (EState_VSA2, VSA5) </a:t>
+            </a:r>
+            <a:r>
+              <a:rPr lang="sr-Latn-RS" sz="1600" dirty="0" smtClean="0"/>
+              <a:t>govore </a:t>
+            </a:r>
+            <a:r>
+              <a:rPr lang="sr-Latn-RS" sz="1600" dirty="0"/>
+              <a:t>da površinska elektronska distribucija igra </a:t>
+            </a:r>
+            <a:r>
+              <a:rPr lang="sr-Latn-RS" sz="1600" dirty="0" smtClean="0"/>
+              <a:t>važnu </a:t>
+            </a:r>
+            <a:r>
+              <a:rPr lang="sr-Latn-RS" sz="1600" dirty="0"/>
+              <a:t>ulogu u prepoznavanju aktivnog mesta </a:t>
+            </a:r>
+            <a:r>
+              <a:rPr lang="sr-Latn-RS" sz="1600" dirty="0" smtClean="0"/>
+              <a:t>enzima</a:t>
+            </a:r>
+          </a:p>
+          <a:p>
+            <a:r>
+              <a:rPr lang="sr-Latn-RS" sz="1600" dirty="0" smtClean="0"/>
+              <a:t>Funkcionalne grupe imaju </a:t>
+            </a:r>
+            <a:r>
+              <a:rPr lang="sr-Latn-RS" sz="1600" dirty="0"/>
+              <a:t>nešto manji, ali i dalje značajan </a:t>
+            </a:r>
+            <a:r>
+              <a:rPr lang="sr-Latn-RS" sz="1600" dirty="0" smtClean="0"/>
+              <a:t>doprinos</a:t>
+            </a:r>
+          </a:p>
+          <a:p>
+            <a:r>
+              <a:rPr lang="sr-Latn-RS" sz="1600" dirty="0" smtClean="0"/>
+              <a:t>Analiza je potvrdila da predikcija afiniteta vezivanja zahteva integraciju višedimenzionalnih molekulskih karakteristika, tj da nije dovoljno prisustvo funkcionalne grupe, već je ključna njen položaj u strukturi unutar molekula</a:t>
+            </a:r>
+          </a:p>
+          <a:p>
+            <a:endParaRPr lang="sr-Latn-RS" dirty="0" smtClean="0"/>
+          </a:p>
+          <a:p>
+            <a:endParaRPr lang="sr-Latn-RS" dirty="0" smtClean="0"/>
+          </a:p>
+          <a:p>
+            <a:endParaRPr lang="en-GB" dirty="0"/>
           </a:p>
         </p:txBody>
       </p:sp>
     </p:spTree>
     <p:extLst>
       <p:ext uri="{BB962C8B-B14F-4D97-AF65-F5344CB8AC3E}">
-        <p14:creationId xmlns:p14="http://schemas.microsoft.com/office/powerpoint/2010/main" val="288018717"/>
+        <p14:creationId xmlns:p14="http://schemas.microsoft.com/office/powerpoint/2010/main" val="1688779211"/>
       </p:ext>
     </p:extLst>
   </p:cSld>
@@ -7101,35 +11761,46 @@
           <a:p>
             <a:r>
               <a:rPr lang="sr-Latn-RS" dirty="0" smtClean="0"/>
-              <a:t>GUI</a:t>
+              <a:t>SHAP analiza</a:t>
             </a:r>
             <a:endParaRPr lang="en-GB" dirty="0"/>
           </a:p>
         </p:txBody>
       </p:sp>
-      <p:sp>
-        <p:nvSpPr>
-          <p:cNvPr id="3" name="Subtitle 2"/>
-          <p:cNvSpPr>
-            <a:spLocks noGrp="1"/>
-          </p:cNvSpPr>
-          <p:nvPr>
-            <p:ph type="subTitle" idx="1"/>
-          </p:nvPr>
-        </p:nvSpPr>
-        <p:spPr/>
-        <p:txBody>
-          <a:bodyPr/>
-          <a:lstStyle/>
-          <a:p>
-            <a:endParaRPr lang="en-GB"/>
-          </a:p>
-        </p:txBody>
-      </p:sp>
+      <p:pic>
+        <p:nvPicPr>
+          <p:cNvPr id="4" name="Picture 3"/>
+          <p:cNvPicPr>
+            <a:picLocks noChangeAspect="1"/>
+          </p:cNvPicPr>
+          <p:nvPr/>
+        </p:nvPicPr>
+        <p:blipFill>
+          <a:blip r:embed="rId2">
+            <a:extLst>
+              <a:ext uri="{28A0092B-C50C-407E-A947-70E740481C1C}">
+                <a14:useLocalDpi xmlns:a14="http://schemas.microsoft.com/office/drawing/2010/main" val="0"/>
+              </a:ext>
+            </a:extLst>
+          </a:blip>
+          <a:stretch>
+            <a:fillRect/>
+          </a:stretch>
+        </p:blipFill>
+        <p:spPr>
+          <a:xfrm>
+            <a:off x="2115801" y="1194438"/>
+            <a:ext cx="4485147" cy="3724633"/>
+          </a:xfrm>
+          <a:prstGeom prst="rect">
+            <a:avLst/>
+          </a:prstGeom>
+        </p:spPr>
+      </p:pic>
     </p:spTree>
     <p:extLst>
       <p:ext uri="{BB962C8B-B14F-4D97-AF65-F5344CB8AC3E}">
-        <p14:creationId xmlns:p14="http://schemas.microsoft.com/office/powerpoint/2010/main" val="2352356894"/>
+        <p14:creationId xmlns:p14="http://schemas.microsoft.com/office/powerpoint/2010/main" val="2575331102"/>
       </p:ext>
     </p:extLst>
   </p:cSld>
@@ -7173,14 +11844,19 @@
             <p:ph type="title"/>
           </p:nvPr>
         </p:nvSpPr>
-        <p:spPr/>
+        <p:spPr>
+          <a:xfrm>
+            <a:off x="653255" y="319243"/>
+            <a:ext cx="7704000" cy="572700"/>
+          </a:xfrm>
+        </p:spPr>
         <p:txBody>
           <a:bodyPr/>
           <a:lstStyle/>
           <a:p>
             <a:r>
               <a:rPr lang="sr-Latn-RS" dirty="0" smtClean="0"/>
-              <a:t>GUI – Procena kompatibilnosti</a:t>
+              <a:t>SHAP analiza</a:t>
             </a:r>
             <a:endParaRPr lang="en-GB" dirty="0"/>
           </a:p>
@@ -7196,19 +11872,58 @@
             <p:ph type="subTitle" idx="1"/>
           </p:nvPr>
         </p:nvSpPr>
-        <p:spPr/>
+        <p:spPr>
+          <a:xfrm>
+            <a:off x="112676" y="1379577"/>
+            <a:ext cx="2790712" cy="3058585"/>
+          </a:xfrm>
+        </p:spPr>
         <p:txBody>
           <a:bodyPr/>
           <a:lstStyle/>
           <a:p>
-            <a:endParaRPr lang="en-GB"/>
+            <a:r>
+              <a:rPr lang="sr-Latn-RS" dirty="0" smtClean="0"/>
+              <a:t>Utvrđeno je postojanje pretežno nelinearnih odnosa između deskriptora i SHAP vrednosti, što objašnjava zašto je Random Forest bolji model za ovaj skup podataka u odnosu na linearne modele</a:t>
+            </a:r>
+            <a:endParaRPr lang="en-GB" dirty="0"/>
           </a:p>
         </p:txBody>
       </p:sp>
+      <p:pic>
+        <p:nvPicPr>
+          <p:cNvPr id="4" name="Picture 3"/>
+          <p:cNvPicPr>
+            <a:picLocks noChangeAspect="1"/>
+          </p:cNvPicPr>
+          <p:nvPr/>
+        </p:nvPicPr>
+        <p:blipFill>
+          <a:blip r:embed="rId2">
+            <a:extLst>
+              <a:ext uri="{28A0092B-C50C-407E-A947-70E740481C1C}">
+                <a14:useLocalDpi xmlns:a14="http://schemas.microsoft.com/office/drawing/2010/main" val="0"/>
+              </a:ext>
+            </a:extLst>
+          </a:blip>
+          <a:stretch>
+            <a:fillRect/>
+          </a:stretch>
+        </p:blipFill>
+        <p:spPr>
+          <a:xfrm>
+            <a:off x="2844597" y="891943"/>
+            <a:ext cx="5724987" cy="4097607"/>
+          </a:xfrm>
+          <a:prstGeom prst="rect">
+            <a:avLst/>
+          </a:prstGeom>
+        </p:spPr>
+      </p:pic>
     </p:spTree>
     <p:extLst>
       <p:ext uri="{BB962C8B-B14F-4D97-AF65-F5344CB8AC3E}">
-        <p14:creationId xmlns:p14="http://schemas.microsoft.com/office/powerpoint/2010/main" val="1561326929"/>
+        <p14:creationId xmlns:p14="http://schemas.microsoft.com/office/powerpoint/2010/main" val="394192399"/>
       </p:ext>
     </p:extLst>
   </p:cSld>
@@ -7252,6 +11967,449 @@
             <p:ph type="title"/>
           </p:nvPr>
         </p:nvSpPr>
+        <p:spPr>
+          <a:xfrm>
+            <a:off x="719999" y="406011"/>
+            <a:ext cx="7704000" cy="572700"/>
+          </a:xfrm>
+        </p:spPr>
+        <p:txBody>
+          <a:bodyPr/>
+          <a:lstStyle/>
+          <a:p>
+            <a:r>
+              <a:rPr lang="sr-Latn-RS" dirty="0" smtClean="0"/>
+              <a:t>Model vs molekulski doking</a:t>
+            </a:r>
+            <a:endParaRPr lang="en-GB" dirty="0"/>
+          </a:p>
+        </p:txBody>
+      </p:sp>
+      <p:sp>
+        <p:nvSpPr>
+          <p:cNvPr id="3" name="Subtitle 2"/>
+          <p:cNvSpPr>
+            <a:spLocks noGrp="1"/>
+          </p:cNvSpPr>
+          <p:nvPr>
+            <p:ph type="subTitle" idx="1"/>
+          </p:nvPr>
+        </p:nvSpPr>
+        <p:spPr>
+          <a:xfrm>
+            <a:off x="627398" y="978711"/>
+            <a:ext cx="7796601" cy="3653358"/>
+          </a:xfrm>
+        </p:spPr>
+        <p:txBody>
+          <a:bodyPr/>
+          <a:lstStyle/>
+          <a:p>
+            <a:r>
+              <a:rPr lang="sr-Latn-RS" dirty="0" smtClean="0"/>
+              <a:t>Za 70 molekula iz test skupa, urađen je doking programom AutoDock Vina</a:t>
+            </a:r>
+          </a:p>
+          <a:p>
+            <a:r>
+              <a:rPr lang="sr-Latn-RS" dirty="0" smtClean="0"/>
+              <a:t>Uspešnost dokinga iznosila je 85.0% (51/60 molekula)</a:t>
+            </a:r>
+          </a:p>
+          <a:p>
+            <a:endParaRPr lang="sr-Latn-RS" dirty="0" smtClean="0"/>
+          </a:p>
+          <a:p>
+            <a:endParaRPr lang="sr-Latn-RS" dirty="0"/>
+          </a:p>
+          <a:p>
+            <a:endParaRPr lang="sr-Latn-RS" dirty="0" smtClean="0"/>
+          </a:p>
+          <a:p>
+            <a:endParaRPr lang="sr-Latn-RS" dirty="0"/>
+          </a:p>
+          <a:p>
+            <a:endParaRPr lang="sr-Latn-RS" dirty="0" smtClean="0"/>
+          </a:p>
+          <a:p>
+            <a:endParaRPr lang="sr-Latn-RS" dirty="0"/>
+          </a:p>
+          <a:p>
+            <a:endParaRPr lang="sr-Latn-RS" dirty="0" smtClean="0"/>
+          </a:p>
+          <a:p>
+            <a:pPr marL="139700" indent="0">
+              <a:buNone/>
+            </a:pPr>
+            <a:endParaRPr lang="sr-Latn-RS" sz="1600" dirty="0" smtClean="0"/>
+          </a:p>
+          <a:p>
+            <a:r>
+              <a:rPr lang="sr-Latn-RS" dirty="0" smtClean="0"/>
+              <a:t>Zaključak: Random Forest značajno nadmašuje AutoDock Vina u predikciji afiniteta vezivanja, kao i u preciznosti i samoj konzistenciji predviđanja rezultata</a:t>
+            </a:r>
+          </a:p>
+          <a:p>
+            <a:r>
+              <a:rPr lang="sr-Latn-RS" dirty="0" smtClean="0"/>
+              <a:t>Potvrda da mašinsko učenje može biti bolje od klasičnih fizičkih simulacija u nekim slučajevima</a:t>
+            </a:r>
+          </a:p>
+          <a:p>
+            <a:r>
+              <a:rPr lang="sr-Latn-RS" dirty="0" smtClean="0"/>
+              <a:t>Pearsonov koeficijent korelacije meri linearnu korelaciju dva skupa podataka (model i doking u odnosu na eksperimentalne vrednosti)</a:t>
+            </a:r>
+          </a:p>
+        </p:txBody>
+      </p:sp>
+      <p:graphicFrame>
+        <p:nvGraphicFramePr>
+          <p:cNvPr id="5" name="Table 4"/>
+          <p:cNvGraphicFramePr>
+            <a:graphicFrameLocks noGrp="1"/>
+          </p:cNvGraphicFramePr>
+          <p:nvPr>
+            <p:extLst>
+              <p:ext uri="{D42A27DB-BD31-4B8C-83A1-F6EECF244321}">
+                <p14:modId xmlns:p14="http://schemas.microsoft.com/office/powerpoint/2010/main" val="3623768282"/>
+              </p:ext>
+            </p:extLst>
+          </p:nvPr>
+        </p:nvGraphicFramePr>
+        <p:xfrm>
+          <a:off x="1323767" y="1601868"/>
+          <a:ext cx="6096000" cy="1845855"/>
+        </p:xfrm>
+        <a:graphic>
+          <a:graphicData uri="http://schemas.openxmlformats.org/drawingml/2006/table">
+            <a:tbl>
+              <a:tblPr firstRow="1" bandRow="1">
+                <a:tableStyleId>{8799B23B-EC83-4686-B30A-512413B5E67A}</a:tableStyleId>
+              </a:tblPr>
+              <a:tblGrid>
+                <a:gridCol w="2032000">
+                  <a:extLst>
+                    <a:ext uri="{9D8B030D-6E8A-4147-A177-3AD203B41FA5}">
+                      <a16:colId xmlns:a16="http://schemas.microsoft.com/office/drawing/2014/main" val="2067663366"/>
+                    </a:ext>
+                  </a:extLst>
+                </a:gridCol>
+                <a:gridCol w="2032000">
+                  <a:extLst>
+                    <a:ext uri="{9D8B030D-6E8A-4147-A177-3AD203B41FA5}">
+                      <a16:colId xmlns:a16="http://schemas.microsoft.com/office/drawing/2014/main" val="1697059242"/>
+                    </a:ext>
+                  </a:extLst>
+                </a:gridCol>
+                <a:gridCol w="2032000">
+                  <a:extLst>
+                    <a:ext uri="{9D8B030D-6E8A-4147-A177-3AD203B41FA5}">
+                      <a16:colId xmlns:a16="http://schemas.microsoft.com/office/drawing/2014/main" val="2887268110"/>
+                    </a:ext>
+                  </a:extLst>
+                </a:gridCol>
+              </a:tblGrid>
+              <a:tr h="362495">
+                <a:tc>
+                  <a:txBody>
+                    <a:bodyPr/>
+                    <a:lstStyle/>
+                    <a:p>
+                      <a:r>
+                        <a:rPr lang="sr-Latn-RS" dirty="0" smtClean="0"/>
+                        <a:t>Metrika</a:t>
+                      </a:r>
+                      <a:endParaRPr lang="en-GB" dirty="0"/>
+                    </a:p>
+                  </a:txBody>
+                  <a:tcPr/>
+                </a:tc>
+                <a:tc>
+                  <a:txBody>
+                    <a:bodyPr/>
+                    <a:lstStyle/>
+                    <a:p>
+                      <a:r>
+                        <a:rPr lang="sr-Latn-RS" dirty="0" smtClean="0"/>
+                        <a:t>Model</a:t>
+                      </a:r>
+                      <a:endParaRPr lang="en-GB" dirty="0"/>
+                    </a:p>
+                  </a:txBody>
+                  <a:tcPr/>
+                </a:tc>
+                <a:tc>
+                  <a:txBody>
+                    <a:bodyPr/>
+                    <a:lstStyle/>
+                    <a:p>
+                      <a:r>
+                        <a:rPr lang="sr-Latn-RS" dirty="0" smtClean="0"/>
+                        <a:t>AutoDock Vina</a:t>
+                      </a:r>
+                      <a:endParaRPr lang="en-GB" dirty="0"/>
+                    </a:p>
+                  </a:txBody>
+                  <a:tcPr/>
+                </a:tc>
+                <a:extLst>
+                  <a:ext uri="{0D108BD9-81ED-4DB2-BD59-A6C34878D82A}">
+                    <a16:rowId xmlns:a16="http://schemas.microsoft.com/office/drawing/2014/main" val="3483960545"/>
+                  </a:ext>
+                </a:extLst>
+              </a:tr>
+              <a:tr h="370840">
+                <a:tc>
+                  <a:txBody>
+                    <a:bodyPr/>
+                    <a:lstStyle/>
+                    <a:p>
+                      <a:r>
+                        <a:rPr lang="sr-Latn-RS" dirty="0" smtClean="0"/>
+                        <a:t>Broj uzoraka</a:t>
+                      </a:r>
+                      <a:endParaRPr lang="en-GB" dirty="0"/>
+                    </a:p>
+                  </a:txBody>
+                  <a:tcPr/>
+                </a:tc>
+                <a:tc>
+                  <a:txBody>
+                    <a:bodyPr/>
+                    <a:lstStyle/>
+                    <a:p>
+                      <a:r>
+                        <a:rPr lang="sr-Latn-RS" dirty="0" smtClean="0"/>
+                        <a:t>51</a:t>
+                      </a:r>
+                      <a:endParaRPr lang="en-GB" dirty="0"/>
+                    </a:p>
+                  </a:txBody>
+                  <a:tcPr/>
+                </a:tc>
+                <a:tc>
+                  <a:txBody>
+                    <a:bodyPr/>
+                    <a:lstStyle/>
+                    <a:p>
+                      <a:r>
+                        <a:rPr lang="sr-Latn-RS" dirty="0" smtClean="0"/>
+                        <a:t>51</a:t>
+                      </a:r>
+                      <a:endParaRPr lang="en-GB" dirty="0"/>
+                    </a:p>
+                  </a:txBody>
+                  <a:tcPr/>
+                </a:tc>
+                <a:extLst>
+                  <a:ext uri="{0D108BD9-81ED-4DB2-BD59-A6C34878D82A}">
+                    <a16:rowId xmlns:a16="http://schemas.microsoft.com/office/drawing/2014/main" val="4034647986"/>
+                  </a:ext>
+                </a:extLst>
+              </a:tr>
+              <a:tr h="370840">
+                <a:tc>
+                  <a:txBody>
+                    <a:bodyPr/>
+                    <a:lstStyle/>
+                    <a:p>
+                      <a:r>
+                        <a:rPr lang="sr-Latn-RS" dirty="0" smtClean="0"/>
+                        <a:t>RMSE</a:t>
+                      </a:r>
+                      <a:endParaRPr lang="en-GB" dirty="0"/>
+                    </a:p>
+                  </a:txBody>
+                  <a:tcPr/>
+                </a:tc>
+                <a:tc>
+                  <a:txBody>
+                    <a:bodyPr/>
+                    <a:lstStyle/>
+                    <a:p>
+                      <a:r>
+                        <a:rPr lang="sr-Latn-RS" dirty="0" smtClean="0"/>
+                        <a:t>0.691</a:t>
+                      </a:r>
+                      <a:endParaRPr lang="en-GB" dirty="0"/>
+                    </a:p>
+                  </a:txBody>
+                  <a:tcPr/>
+                </a:tc>
+                <a:tc>
+                  <a:txBody>
+                    <a:bodyPr/>
+                    <a:lstStyle/>
+                    <a:p>
+                      <a:r>
+                        <a:rPr lang="sr-Latn-RS" dirty="0" smtClean="0"/>
+                        <a:t>1.738</a:t>
+                      </a:r>
+                      <a:endParaRPr lang="en-GB" dirty="0"/>
+                    </a:p>
+                  </a:txBody>
+                  <a:tcPr/>
+                </a:tc>
+                <a:extLst>
+                  <a:ext uri="{0D108BD9-81ED-4DB2-BD59-A6C34878D82A}">
+                    <a16:rowId xmlns:a16="http://schemas.microsoft.com/office/drawing/2014/main" val="2748186730"/>
+                  </a:ext>
+                </a:extLst>
+              </a:tr>
+              <a:tr h="370840">
+                <a:tc>
+                  <a:txBody>
+                    <a:bodyPr/>
+                    <a:lstStyle/>
+                    <a:p>
+                      <a:r>
+                        <a:rPr lang="sr-Latn-RS" dirty="0" smtClean="0"/>
+                        <a:t>MAE</a:t>
+                      </a:r>
+                      <a:endParaRPr lang="en-GB" dirty="0"/>
+                    </a:p>
+                  </a:txBody>
+                  <a:tcPr/>
+                </a:tc>
+                <a:tc>
+                  <a:txBody>
+                    <a:bodyPr/>
+                    <a:lstStyle/>
+                    <a:p>
+                      <a:r>
+                        <a:rPr lang="sr-Latn-RS" dirty="0" smtClean="0"/>
+                        <a:t>0.502</a:t>
+                      </a:r>
+                      <a:endParaRPr lang="en-GB" dirty="0"/>
+                    </a:p>
+                  </a:txBody>
+                  <a:tcPr/>
+                </a:tc>
+                <a:tc>
+                  <a:txBody>
+                    <a:bodyPr/>
+                    <a:lstStyle/>
+                    <a:p>
+                      <a:r>
+                        <a:rPr lang="sr-Latn-RS" dirty="0" smtClean="0"/>
+                        <a:t>1.321</a:t>
+                      </a:r>
+                      <a:endParaRPr lang="en-GB" dirty="0"/>
+                    </a:p>
+                  </a:txBody>
+                  <a:tcPr/>
+                </a:tc>
+                <a:extLst>
+                  <a:ext uri="{0D108BD9-81ED-4DB2-BD59-A6C34878D82A}">
+                    <a16:rowId xmlns:a16="http://schemas.microsoft.com/office/drawing/2014/main" val="2807806410"/>
+                  </a:ext>
+                </a:extLst>
+              </a:tr>
+              <a:tr h="370840">
+                <a:tc>
+                  <a:txBody>
+                    <a:bodyPr/>
+                    <a:lstStyle/>
+                    <a:p>
+                      <a:r>
+                        <a:rPr lang="sr-Latn-RS" dirty="0" smtClean="0"/>
+                        <a:t>Pearson</a:t>
+                      </a:r>
+                      <a:r>
+                        <a:rPr lang="sr-Latn-RS" baseline="0" dirty="0" smtClean="0"/>
+                        <a:t> R</a:t>
+                      </a:r>
+                      <a:endParaRPr lang="en-GB" dirty="0"/>
+                    </a:p>
+                  </a:txBody>
+                  <a:tcPr/>
+                </a:tc>
+                <a:tc>
+                  <a:txBody>
+                    <a:bodyPr/>
+                    <a:lstStyle/>
+                    <a:p>
+                      <a:r>
+                        <a:rPr lang="sr-Latn-RS" dirty="0" smtClean="0"/>
+                        <a:t>0.927</a:t>
+                      </a:r>
+                      <a:endParaRPr lang="en-GB" dirty="0"/>
+                    </a:p>
+                  </a:txBody>
+                  <a:tcPr/>
+                </a:tc>
+                <a:tc>
+                  <a:txBody>
+                    <a:bodyPr/>
+                    <a:lstStyle/>
+                    <a:p>
+                      <a:r>
+                        <a:rPr lang="sr-Latn-RS" dirty="0" smtClean="0"/>
+                        <a:t>0.322</a:t>
+                      </a:r>
+                      <a:endParaRPr lang="en-GB" dirty="0"/>
+                    </a:p>
+                  </a:txBody>
+                  <a:tcPr/>
+                </a:tc>
+                <a:extLst>
+                  <a:ext uri="{0D108BD9-81ED-4DB2-BD59-A6C34878D82A}">
+                    <a16:rowId xmlns:a16="http://schemas.microsoft.com/office/drawing/2014/main" val="485928551"/>
+                  </a:ext>
+                </a:extLst>
+              </a:tr>
+            </a:tbl>
+          </a:graphicData>
+        </a:graphic>
+      </p:graphicFrame>
+    </p:spTree>
+    <p:extLst>
+      <p:ext uri="{BB962C8B-B14F-4D97-AF65-F5344CB8AC3E}">
+        <p14:creationId xmlns:p14="http://schemas.microsoft.com/office/powerpoint/2010/main" val="3340797598"/>
+      </p:ext>
+    </p:extLst>
+  </p:cSld>
+  <p:clrMapOvr>
+    <a:masterClrMapping/>
+  </p:clrMapOvr>
+  <p:timing>
+    <p:tnLst>
+      <p:par>
+        <p:cTn id="1" dur="indefinite" restart="never" nodeType="tmRoot"/>
+      </p:par>
+    </p:tnLst>
+  </p:timing>
+</p:sld>
+</file>
+
+<file path=ppt/slides/slide16.xml><?xml version="1.0" encoding="utf-8"?>
+<p:sld xmlns:a="http://schemas.openxmlformats.org/drawingml/2006/main" xmlns:r="http://schemas.openxmlformats.org/officeDocument/2006/relationships" xmlns:p="http://schemas.openxmlformats.org/presentationml/2006/main">
+  <p:cSld>
+    <p:spTree>
+      <p:nvGrpSpPr>
+        <p:cNvPr id="1" name=""/>
+        <p:cNvGrpSpPr/>
+        <p:nvPr/>
+      </p:nvGrpSpPr>
+      <p:grpSpPr>
+        <a:xfrm>
+          <a:off x="0" y="0"/>
+          <a:ext cx="0" cy="0"/>
+          <a:chOff x="0" y="0"/>
+          <a:chExt cx="0" cy="0"/>
+        </a:xfrm>
+      </p:grpSpPr>
+      <p:sp>
+        <p:nvSpPr>
+          <p:cNvPr id="2" name="Title 1"/>
+          <p:cNvSpPr>
+            <a:spLocks noGrp="1"/>
+          </p:cNvSpPr>
+          <p:nvPr>
+            <p:ph type="title"/>
+          </p:nvPr>
+        </p:nvSpPr>
         <p:spPr/>
         <p:txBody>
           <a:bodyPr/>
@@ -7259,7 +12417,458 @@
           <a:p>
             <a:r>
               <a:rPr lang="sr-Latn-RS" dirty="0" smtClean="0"/>
-              <a:t>Zaključak</a:t>
+              <a:t>Derivati cimetne kiseline</a:t>
+            </a:r>
+            <a:endParaRPr lang="en-GB" dirty="0"/>
+          </a:p>
+        </p:txBody>
+      </p:sp>
+      <p:sp>
+        <p:nvSpPr>
+          <p:cNvPr id="3" name="Subtitle 2"/>
+          <p:cNvSpPr>
+            <a:spLocks noGrp="1"/>
+          </p:cNvSpPr>
+          <p:nvPr>
+            <p:ph type="subTitle" idx="1"/>
+          </p:nvPr>
+        </p:nvSpPr>
+        <p:spPr>
+          <a:xfrm>
+            <a:off x="720000" y="1426647"/>
+            <a:ext cx="4294800" cy="2298300"/>
+          </a:xfrm>
+        </p:spPr>
+        <p:txBody>
+          <a:bodyPr/>
+          <a:lstStyle/>
+          <a:p>
+            <a:r>
+              <a:rPr lang="sr-Latn-RS" dirty="0" smtClean="0"/>
+              <a:t>Derivat 1 </a:t>
+            </a:r>
+          </a:p>
+          <a:p>
+            <a:pPr lvl="1" algn="l"/>
+            <a:r>
+              <a:rPr lang="sr-Latn-RS" dirty="0"/>
+              <a:t>AutoDock Vina </a:t>
+            </a:r>
+            <a:r>
+              <a:rPr lang="sr-Latn-RS" dirty="0" smtClean="0"/>
+              <a:t>pKi=4.73</a:t>
+            </a:r>
+          </a:p>
+          <a:p>
+            <a:pPr lvl="1" algn="l"/>
+            <a:r>
+              <a:rPr lang="sr-Latn-RS" dirty="0" smtClean="0"/>
+              <a:t>Model pKi=5.02</a:t>
+            </a:r>
+          </a:p>
+          <a:p>
+            <a:pPr marL="139700" indent="0">
+              <a:buNone/>
+            </a:pPr>
+            <a:endParaRPr lang="sr-Latn-RS" dirty="0" smtClean="0"/>
+          </a:p>
+          <a:p>
+            <a:r>
+              <a:rPr lang="sr-Latn-RS" dirty="0" smtClean="0"/>
+              <a:t>Derivat 2</a:t>
+            </a:r>
+          </a:p>
+          <a:p>
+            <a:pPr lvl="1" algn="l"/>
+            <a:r>
+              <a:rPr lang="sr-Latn-RS" dirty="0"/>
+              <a:t>AutoDock Vina pKi=5.68</a:t>
+            </a:r>
+          </a:p>
+          <a:p>
+            <a:pPr lvl="1" algn="l"/>
+            <a:r>
+              <a:rPr lang="sr-Latn-RS" dirty="0"/>
+              <a:t>Model </a:t>
+            </a:r>
+            <a:r>
+              <a:rPr lang="sr-Latn-RS" dirty="0" smtClean="0"/>
+              <a:t>pKi=5.33</a:t>
+            </a:r>
+          </a:p>
+          <a:p>
+            <a:pPr lvl="1" algn="l"/>
+            <a:endParaRPr lang="sr-Latn-RS" dirty="0" smtClean="0"/>
+          </a:p>
+          <a:p>
+            <a:r>
+              <a:rPr lang="sr-Latn-RS" dirty="0" smtClean="0"/>
+              <a:t>Eksperimentalne vrednosti:</a:t>
+            </a:r>
+          </a:p>
+          <a:p>
+            <a:pPr lvl="1" algn="l"/>
+            <a:r>
+              <a:rPr lang="sr-Latn-RS" dirty="0" smtClean="0"/>
+              <a:t>Derivat 1 pKi=~</a:t>
+            </a:r>
+            <a:r>
+              <a:rPr lang="en-GB" dirty="0" smtClean="0"/>
+              <a:t>4</a:t>
+            </a:r>
+            <a:r>
+              <a:rPr lang="sr-Latn-RS" dirty="0" smtClean="0"/>
+              <a:t>.</a:t>
+            </a:r>
+            <a:r>
+              <a:rPr lang="en-GB" dirty="0" smtClean="0"/>
+              <a:t>9</a:t>
+            </a:r>
+            <a:r>
+              <a:rPr lang="sr-Latn-RS" dirty="0" smtClean="0"/>
+              <a:t>0</a:t>
+            </a:r>
+          </a:p>
+          <a:p>
+            <a:pPr lvl="1" algn="l"/>
+            <a:r>
+              <a:rPr lang="sr-Latn-RS" dirty="0" smtClean="0"/>
+              <a:t>Derivat 2 pKi=~</a:t>
+            </a:r>
+            <a:r>
+              <a:rPr lang="en-GB" dirty="0" smtClean="0"/>
+              <a:t>5</a:t>
+            </a:r>
+            <a:r>
+              <a:rPr lang="sr-Latn-RS" dirty="0" smtClean="0"/>
+              <a:t>.</a:t>
+            </a:r>
+            <a:r>
+              <a:rPr lang="en-GB" dirty="0" smtClean="0"/>
+              <a:t>4</a:t>
+            </a:r>
+            <a:r>
+              <a:rPr lang="sr-Latn-RS" dirty="0" smtClean="0"/>
+              <a:t>0</a:t>
+            </a:r>
+          </a:p>
+        </p:txBody>
+      </p:sp>
+      <p:pic>
+        <p:nvPicPr>
+          <p:cNvPr id="4" name="Picture 3"/>
+          <p:cNvPicPr>
+            <a:picLocks noChangeAspect="1"/>
+          </p:cNvPicPr>
+          <p:nvPr/>
+        </p:nvPicPr>
+        <p:blipFill>
+          <a:blip r:embed="rId2">
+            <a:extLst>
+              <a:ext uri="{28A0092B-C50C-407E-A947-70E740481C1C}">
+                <a14:useLocalDpi xmlns:a14="http://schemas.microsoft.com/office/drawing/2010/main" val="0"/>
+              </a:ext>
+            </a:extLst>
+          </a:blip>
+          <a:stretch>
+            <a:fillRect/>
+          </a:stretch>
+        </p:blipFill>
+        <p:spPr>
+          <a:xfrm>
+            <a:off x="4852204" y="1328119"/>
+            <a:ext cx="3310649" cy="1028107"/>
+          </a:xfrm>
+          <a:prstGeom prst="rect">
+            <a:avLst/>
+          </a:prstGeom>
+        </p:spPr>
+      </p:pic>
+      <p:pic>
+        <p:nvPicPr>
+          <p:cNvPr id="5" name="Picture 4"/>
+          <p:cNvPicPr>
+            <a:picLocks noChangeAspect="1"/>
+          </p:cNvPicPr>
+          <p:nvPr/>
+        </p:nvPicPr>
+        <p:blipFill>
+          <a:blip r:embed="rId3">
+            <a:extLst>
+              <a:ext uri="{28A0092B-C50C-407E-A947-70E740481C1C}">
+                <a14:useLocalDpi xmlns:a14="http://schemas.microsoft.com/office/drawing/2010/main" val="0"/>
+              </a:ext>
+            </a:extLst>
+          </a:blip>
+          <a:stretch>
+            <a:fillRect/>
+          </a:stretch>
+        </p:blipFill>
+        <p:spPr>
+          <a:xfrm>
+            <a:off x="4852204" y="2572145"/>
+            <a:ext cx="3310649" cy="1008402"/>
+          </a:xfrm>
+          <a:prstGeom prst="rect">
+            <a:avLst/>
+          </a:prstGeom>
+        </p:spPr>
+      </p:pic>
+    </p:spTree>
+    <p:extLst>
+      <p:ext uri="{BB962C8B-B14F-4D97-AF65-F5344CB8AC3E}">
+        <p14:creationId xmlns:p14="http://schemas.microsoft.com/office/powerpoint/2010/main" val="288018717"/>
+      </p:ext>
+    </p:extLst>
+  </p:cSld>
+  <p:clrMapOvr>
+    <a:masterClrMapping/>
+  </p:clrMapOvr>
+  <p:timing>
+    <p:tnLst>
+      <p:par>
+        <p:cTn id="1" dur="indefinite" restart="never" nodeType="tmRoot"/>
+      </p:par>
+    </p:tnLst>
+  </p:timing>
+</p:sld>
+</file>
+
+<file path=ppt/slides/slide17.xml><?xml version="1.0" encoding="utf-8"?>
+<p:sld xmlns:a="http://schemas.openxmlformats.org/drawingml/2006/main" xmlns:r="http://schemas.openxmlformats.org/officeDocument/2006/relationships" xmlns:p="http://schemas.openxmlformats.org/presentationml/2006/main">
+  <p:cSld>
+    <p:spTree>
+      <p:nvGrpSpPr>
+        <p:cNvPr id="1" name=""/>
+        <p:cNvGrpSpPr/>
+        <p:nvPr/>
+      </p:nvGrpSpPr>
+      <p:grpSpPr>
+        <a:xfrm>
+          <a:off x="0" y="0"/>
+          <a:ext cx="0" cy="0"/>
+          <a:chOff x="0" y="0"/>
+          <a:chExt cx="0" cy="0"/>
+        </a:xfrm>
+      </p:grpSpPr>
+      <p:sp>
+        <p:nvSpPr>
+          <p:cNvPr id="2" name="Title 1"/>
+          <p:cNvSpPr>
+            <a:spLocks noGrp="1"/>
+          </p:cNvSpPr>
+          <p:nvPr>
+            <p:ph type="title"/>
+          </p:nvPr>
+        </p:nvSpPr>
+        <p:spPr>
+          <a:xfrm>
+            <a:off x="720000" y="360944"/>
+            <a:ext cx="7704000" cy="572700"/>
+          </a:xfrm>
+        </p:spPr>
+        <p:txBody>
+          <a:bodyPr/>
+          <a:lstStyle/>
+          <a:p>
+            <a:r>
+              <a:rPr lang="sr-Latn-RS" dirty="0" smtClean="0"/>
+              <a:t>GUI</a:t>
+            </a:r>
+            <a:endParaRPr lang="en-GB" dirty="0"/>
+          </a:p>
+        </p:txBody>
+      </p:sp>
+      <p:sp>
+        <p:nvSpPr>
+          <p:cNvPr id="3" name="Subtitle 2"/>
+          <p:cNvSpPr>
+            <a:spLocks noGrp="1"/>
+          </p:cNvSpPr>
+          <p:nvPr>
+            <p:ph type="subTitle" idx="1"/>
+          </p:nvPr>
+        </p:nvSpPr>
+        <p:spPr/>
+        <p:txBody>
+          <a:bodyPr/>
+          <a:lstStyle/>
+          <a:p>
+            <a:endParaRPr lang="en-GB"/>
+          </a:p>
+        </p:txBody>
+      </p:sp>
+      <p:pic>
+        <p:nvPicPr>
+          <p:cNvPr id="4" name="Picture 3"/>
+          <p:cNvPicPr>
+            <a:picLocks noChangeAspect="1"/>
+          </p:cNvPicPr>
+          <p:nvPr/>
+        </p:nvPicPr>
+        <p:blipFill rotWithShape="1">
+          <a:blip r:embed="rId2"/>
+          <a:srcRect r="3472"/>
+          <a:stretch/>
+        </p:blipFill>
+        <p:spPr>
+          <a:xfrm>
+            <a:off x="720000" y="1295454"/>
+            <a:ext cx="7054896" cy="3469802"/>
+          </a:xfrm>
+          <a:prstGeom prst="rect">
+            <a:avLst/>
+          </a:prstGeom>
+        </p:spPr>
+      </p:pic>
+    </p:spTree>
+    <p:extLst>
+      <p:ext uri="{BB962C8B-B14F-4D97-AF65-F5344CB8AC3E}">
+        <p14:creationId xmlns:p14="http://schemas.microsoft.com/office/powerpoint/2010/main" val="2352356894"/>
+      </p:ext>
+    </p:extLst>
+  </p:cSld>
+  <p:clrMapOvr>
+    <a:masterClrMapping/>
+  </p:clrMapOvr>
+  <p:timing>
+    <p:tnLst>
+      <p:par>
+        <p:cTn id="1" dur="indefinite" restart="never" nodeType="tmRoot"/>
+      </p:par>
+    </p:tnLst>
+  </p:timing>
+</p:sld>
+</file>
+
+<file path=ppt/slides/slide18.xml><?xml version="1.0" encoding="utf-8"?>
+<p:sld xmlns:a="http://schemas.openxmlformats.org/drawingml/2006/main" xmlns:r="http://schemas.openxmlformats.org/officeDocument/2006/relationships" xmlns:p="http://schemas.openxmlformats.org/presentationml/2006/main">
+  <p:cSld>
+    <p:spTree>
+      <p:nvGrpSpPr>
+        <p:cNvPr id="1" name=""/>
+        <p:cNvGrpSpPr/>
+        <p:nvPr/>
+      </p:nvGrpSpPr>
+      <p:grpSpPr>
+        <a:xfrm>
+          <a:off x="0" y="0"/>
+          <a:ext cx="0" cy="0"/>
+          <a:chOff x="0" y="0"/>
+          <a:chExt cx="0" cy="0"/>
+        </a:xfrm>
+      </p:grpSpPr>
+      <p:sp>
+        <p:nvSpPr>
+          <p:cNvPr id="2" name="Title 1"/>
+          <p:cNvSpPr>
+            <a:spLocks noGrp="1"/>
+          </p:cNvSpPr>
+          <p:nvPr>
+            <p:ph type="title"/>
+          </p:nvPr>
+        </p:nvSpPr>
+        <p:spPr>
+          <a:xfrm>
+            <a:off x="608819" y="392662"/>
+            <a:ext cx="7704000" cy="572700"/>
+          </a:xfrm>
+        </p:spPr>
+        <p:txBody>
+          <a:bodyPr/>
+          <a:lstStyle/>
+          <a:p>
+            <a:r>
+              <a:rPr lang="sr-Latn-RS" dirty="0" smtClean="0"/>
+              <a:t>GUI</a:t>
+            </a:r>
+            <a:endParaRPr lang="en-GB" dirty="0"/>
+          </a:p>
+        </p:txBody>
+      </p:sp>
+      <p:pic>
+        <p:nvPicPr>
+          <p:cNvPr id="4" name="Picture 3"/>
+          <p:cNvPicPr>
+            <a:picLocks noChangeAspect="1"/>
+          </p:cNvPicPr>
+          <p:nvPr/>
+        </p:nvPicPr>
+        <p:blipFill rotWithShape="1">
+          <a:blip r:embed="rId2"/>
+          <a:srcRect r="6230"/>
+          <a:stretch/>
+        </p:blipFill>
+        <p:spPr>
+          <a:xfrm>
+            <a:off x="608819" y="1159573"/>
+            <a:ext cx="7347129" cy="3723257"/>
+          </a:xfrm>
+          <a:prstGeom prst="rect">
+            <a:avLst/>
+          </a:prstGeom>
+        </p:spPr>
+      </p:pic>
+    </p:spTree>
+    <p:extLst>
+      <p:ext uri="{BB962C8B-B14F-4D97-AF65-F5344CB8AC3E}">
+        <p14:creationId xmlns:p14="http://schemas.microsoft.com/office/powerpoint/2010/main" val="4253337364"/>
+      </p:ext>
+    </p:extLst>
+  </p:cSld>
+  <p:clrMapOvr>
+    <a:masterClrMapping/>
+  </p:clrMapOvr>
+  <p:timing>
+    <p:tnLst>
+      <p:par>
+        <p:cTn id="1" dur="indefinite" restart="never" nodeType="tmRoot"/>
+      </p:par>
+    </p:tnLst>
+  </p:timing>
+</p:sld>
+</file>
+
+<file path=ppt/slides/slide19.xml><?xml version="1.0" encoding="utf-8"?>
+<p:sld xmlns:a="http://schemas.openxmlformats.org/drawingml/2006/main" xmlns:r="http://schemas.openxmlformats.org/officeDocument/2006/relationships" xmlns:p="http://schemas.openxmlformats.org/presentationml/2006/main">
+  <p:cSld>
+    <p:spTree>
+      <p:nvGrpSpPr>
+        <p:cNvPr id="1" name=""/>
+        <p:cNvGrpSpPr/>
+        <p:nvPr/>
+      </p:nvGrpSpPr>
+      <p:grpSpPr>
+        <a:xfrm>
+          <a:off x="0" y="0"/>
+          <a:ext cx="0" cy="0"/>
+          <a:chOff x="0" y="0"/>
+          <a:chExt cx="0" cy="0"/>
+        </a:xfrm>
+      </p:grpSpPr>
+      <p:sp>
+        <p:nvSpPr>
+          <p:cNvPr id="2" name="Title 1"/>
+          <p:cNvSpPr>
+            <a:spLocks noGrp="1"/>
+          </p:cNvSpPr>
+          <p:nvPr>
+            <p:ph type="title"/>
+          </p:nvPr>
+        </p:nvSpPr>
+        <p:spPr>
+          <a:xfrm>
+            <a:off x="720000" y="372639"/>
+            <a:ext cx="7704000" cy="572700"/>
+          </a:xfrm>
+        </p:spPr>
+        <p:txBody>
+          <a:bodyPr/>
+          <a:lstStyle/>
+          <a:p>
+            <a:r>
+              <a:rPr lang="sr-Latn-RS" dirty="0" smtClean="0"/>
+              <a:t>GUI – Procena kompatibilnosti</a:t>
             </a:r>
             <a:endParaRPr lang="en-GB" dirty="0"/>
           </a:p>
@@ -7284,10 +12893,34 @@
           </a:p>
         </p:txBody>
       </p:sp>
+      <p:pic>
+        <p:nvPicPr>
+          <p:cNvPr id="4" name="Picture 3"/>
+          <p:cNvPicPr>
+            <a:picLocks noChangeAspect="1"/>
+          </p:cNvPicPr>
+          <p:nvPr/>
+        </p:nvPicPr>
+        <p:blipFill>
+          <a:blip r:embed="rId2"/>
+          <a:stretch>
+            <a:fillRect/>
+          </a:stretch>
+        </p:blipFill>
+        <p:spPr>
+          <a:xfrm>
+            <a:off x="600701" y="1065479"/>
+            <a:ext cx="7574253" cy="3770424"/>
+          </a:xfrm>
+          <a:prstGeom prst="rect">
+            <a:avLst/>
+          </a:prstGeom>
+        </p:spPr>
+      </p:pic>
     </p:spTree>
     <p:extLst>
       <p:ext uri="{BB962C8B-B14F-4D97-AF65-F5344CB8AC3E}">
-        <p14:creationId xmlns:p14="http://schemas.microsoft.com/office/powerpoint/2010/main" val="1335356609"/>
+        <p14:creationId xmlns:p14="http://schemas.microsoft.com/office/powerpoint/2010/main" val="1561326929"/>
       </p:ext>
     </p:extLst>
   </p:cSld>
@@ -7304,7 +12937,391 @@
 </p:sld>
 </file>
 
-<file path=ppt/slides/slide16.xml><?xml version="1.0" encoding="utf-8"?>
+<file path=ppt/slides/slide2.xml><?xml version="1.0" encoding="utf-8"?>
+<p:sld xmlns:a="http://schemas.openxmlformats.org/drawingml/2006/main" xmlns:r="http://schemas.openxmlformats.org/officeDocument/2006/relationships" xmlns:p="http://schemas.openxmlformats.org/presentationml/2006/main">
+  <p:cSld>
+    <p:spTree>
+      <p:nvGrpSpPr>
+        <p:cNvPr id="1" name=""/>
+        <p:cNvGrpSpPr/>
+        <p:nvPr/>
+      </p:nvGrpSpPr>
+      <p:grpSpPr>
+        <a:xfrm>
+          <a:off x="0" y="0"/>
+          <a:ext cx="0" cy="0"/>
+          <a:chOff x="0" y="0"/>
+          <a:chExt cx="0" cy="0"/>
+        </a:xfrm>
+      </p:grpSpPr>
+      <p:sp>
+        <p:nvSpPr>
+          <p:cNvPr id="2" name="Title 1"/>
+          <p:cNvSpPr>
+            <a:spLocks noGrp="1"/>
+          </p:cNvSpPr>
+          <p:nvPr>
+            <p:ph type="title"/>
+          </p:nvPr>
+        </p:nvSpPr>
+        <p:spPr/>
+        <p:txBody>
+          <a:bodyPr/>
+          <a:lstStyle/>
+          <a:p>
+            <a:pPr algn="l"/>
+            <a:r>
+              <a:rPr lang="sr-Latn-RS" sz="3600" dirty="0" smtClean="0"/>
+              <a:t>Opis problema</a:t>
+            </a:r>
+            <a:endParaRPr lang="en-GB" sz="3600" dirty="0"/>
+          </a:p>
+        </p:txBody>
+      </p:sp>
+      <p:sp>
+        <p:nvSpPr>
+          <p:cNvPr id="3" name="Google Shape;96;p7"/>
+          <p:cNvSpPr txBox="1">
+            <a:spLocks noGrp="1"/>
+          </p:cNvSpPr>
+          <p:nvPr>
+            <p:ph type="subTitle" idx="1"/>
+          </p:nvPr>
+        </p:nvSpPr>
+        <p:spPr>
+          <a:xfrm>
+            <a:off x="666603" y="1708661"/>
+            <a:ext cx="4332561" cy="2669780"/>
+          </a:xfrm>
+          <a:prstGeom prst="rect">
+            <a:avLst/>
+          </a:prstGeom>
+        </p:spPr>
+        <p:txBody>
+          <a:bodyPr spcFirstLastPara="1" wrap="square" lIns="91425" tIns="91425" rIns="91425" bIns="91425" anchor="t" anchorCtr="0">
+            <a:noAutofit/>
+          </a:bodyPr>
+          <a:lstStyle>
+            <a:lvl1pPr lvl="0" rtl="0">
+              <a:spcBef>
+                <a:spcPts val="0"/>
+              </a:spcBef>
+              <a:spcAft>
+                <a:spcPts val="0"/>
+              </a:spcAft>
+              <a:buClr>
+                <a:schemeClr val="accent2"/>
+              </a:buClr>
+              <a:buSzPts val="1600"/>
+              <a:buFont typeface="Albert Sans Light"/>
+              <a:buChar char="●"/>
+              <a:defRPr/>
+            </a:lvl1pPr>
+            <a:lvl2pPr lvl="1" algn="ctr" rtl="0">
+              <a:lnSpc>
+                <a:spcPct val="100000"/>
+              </a:lnSpc>
+              <a:spcBef>
+                <a:spcPts val="0"/>
+              </a:spcBef>
+              <a:spcAft>
+                <a:spcPts val="0"/>
+              </a:spcAft>
+              <a:buClr>
+                <a:srgbClr val="E76A28"/>
+              </a:buClr>
+              <a:buSzPts val="1600"/>
+              <a:buFont typeface="Nunito Light"/>
+              <a:buChar char="○"/>
+              <a:defRPr/>
+            </a:lvl2pPr>
+            <a:lvl3pPr lvl="2" algn="ctr" rtl="0">
+              <a:lnSpc>
+                <a:spcPct val="100000"/>
+              </a:lnSpc>
+              <a:spcBef>
+                <a:spcPts val="0"/>
+              </a:spcBef>
+              <a:spcAft>
+                <a:spcPts val="0"/>
+              </a:spcAft>
+              <a:buClr>
+                <a:srgbClr val="E76A28"/>
+              </a:buClr>
+              <a:buSzPts val="1500"/>
+              <a:buFont typeface="Nunito Light"/>
+              <a:buChar char="■"/>
+              <a:defRPr/>
+            </a:lvl3pPr>
+            <a:lvl4pPr lvl="3" algn="ctr" rtl="0">
+              <a:lnSpc>
+                <a:spcPct val="100000"/>
+              </a:lnSpc>
+              <a:spcBef>
+                <a:spcPts val="0"/>
+              </a:spcBef>
+              <a:spcAft>
+                <a:spcPts val="0"/>
+              </a:spcAft>
+              <a:buClr>
+                <a:srgbClr val="E76A28"/>
+              </a:buClr>
+              <a:buSzPts val="1500"/>
+              <a:buFont typeface="Nunito Light"/>
+              <a:buChar char="●"/>
+              <a:defRPr/>
+            </a:lvl4pPr>
+            <a:lvl5pPr lvl="4" algn="ctr" rtl="0">
+              <a:lnSpc>
+                <a:spcPct val="100000"/>
+              </a:lnSpc>
+              <a:spcBef>
+                <a:spcPts val="0"/>
+              </a:spcBef>
+              <a:spcAft>
+                <a:spcPts val="0"/>
+              </a:spcAft>
+              <a:buClr>
+                <a:srgbClr val="E76A28"/>
+              </a:buClr>
+              <a:buSzPts val="1400"/>
+              <a:buFont typeface="Nunito Light"/>
+              <a:buChar char="○"/>
+              <a:defRPr/>
+            </a:lvl5pPr>
+            <a:lvl6pPr lvl="5" algn="ctr" rtl="0">
+              <a:lnSpc>
+                <a:spcPct val="100000"/>
+              </a:lnSpc>
+              <a:spcBef>
+                <a:spcPts val="0"/>
+              </a:spcBef>
+              <a:spcAft>
+                <a:spcPts val="0"/>
+              </a:spcAft>
+              <a:buClr>
+                <a:srgbClr val="999999"/>
+              </a:buClr>
+              <a:buSzPts val="1400"/>
+              <a:buFont typeface="Nunito Light"/>
+              <a:buChar char="■"/>
+              <a:defRPr/>
+            </a:lvl6pPr>
+            <a:lvl7pPr lvl="6" algn="ctr" rtl="0">
+              <a:lnSpc>
+                <a:spcPct val="100000"/>
+              </a:lnSpc>
+              <a:spcBef>
+                <a:spcPts val="0"/>
+              </a:spcBef>
+              <a:spcAft>
+                <a:spcPts val="0"/>
+              </a:spcAft>
+              <a:buClr>
+                <a:srgbClr val="999999"/>
+              </a:buClr>
+              <a:buSzPts val="1300"/>
+              <a:buFont typeface="Nunito Light"/>
+              <a:buChar char="●"/>
+              <a:defRPr/>
+            </a:lvl7pPr>
+            <a:lvl8pPr lvl="7" algn="ctr" rtl="0">
+              <a:lnSpc>
+                <a:spcPct val="100000"/>
+              </a:lnSpc>
+              <a:spcBef>
+                <a:spcPts val="0"/>
+              </a:spcBef>
+              <a:spcAft>
+                <a:spcPts val="0"/>
+              </a:spcAft>
+              <a:buClr>
+                <a:srgbClr val="999999"/>
+              </a:buClr>
+              <a:buSzPts val="1300"/>
+              <a:buFont typeface="Nunito Light"/>
+              <a:buChar char="○"/>
+              <a:defRPr/>
+            </a:lvl8pPr>
+            <a:lvl9pPr lvl="8" algn="ctr" rtl="0">
+              <a:lnSpc>
+                <a:spcPct val="100000"/>
+              </a:lnSpc>
+              <a:spcBef>
+                <a:spcPts val="0"/>
+              </a:spcBef>
+              <a:spcAft>
+                <a:spcPts val="0"/>
+              </a:spcAft>
+              <a:buClr>
+                <a:srgbClr val="999999"/>
+              </a:buClr>
+              <a:buSzPts val="1400"/>
+              <a:buFont typeface="Nunito Light"/>
+              <a:buChar char="■"/>
+              <a:defRPr/>
+            </a:lvl9pPr>
+          </a:lstStyle>
+          <a:p>
+            <a:r>
+              <a:rPr lang="sr-Latn-RS" sz="1600" dirty="0" smtClean="0"/>
+              <a:t>Humani tripsin ima ključnu ulogu u varenju proteina</a:t>
+            </a:r>
+          </a:p>
+          <a:p>
+            <a:r>
+              <a:rPr lang="sr-Latn-RS" sz="1600" dirty="0" smtClean="0"/>
+              <a:t>Inhibitori tripsina</a:t>
+            </a:r>
+            <a:r>
+              <a:rPr lang="en-GB" sz="1600" dirty="0" smtClean="0"/>
+              <a:t> </a:t>
+            </a:r>
+            <a:r>
+              <a:rPr lang="en-GB" sz="1600" dirty="0" err="1" smtClean="0"/>
+              <a:t>imaju</a:t>
+            </a:r>
+            <a:r>
+              <a:rPr lang="en-GB" sz="1600" dirty="0" smtClean="0"/>
+              <a:t> </a:t>
+            </a:r>
+            <a:r>
+              <a:rPr lang="en-GB" sz="1600" dirty="0" err="1" smtClean="0"/>
+              <a:t>veliku</a:t>
+            </a:r>
+            <a:r>
+              <a:rPr lang="en-GB" sz="1600" dirty="0" smtClean="0"/>
+              <a:t> </a:t>
+            </a:r>
+            <a:r>
+              <a:rPr lang="en-GB" sz="1600" dirty="0" err="1" smtClean="0"/>
+              <a:t>primenu</a:t>
+            </a:r>
+            <a:r>
+              <a:rPr lang="en-GB" sz="1600" dirty="0" smtClean="0"/>
+              <a:t> u </a:t>
+            </a:r>
+            <a:r>
+              <a:rPr lang="en-GB" sz="1600" dirty="0" err="1" smtClean="0"/>
+              <a:t>lečenju</a:t>
+            </a:r>
+            <a:r>
+              <a:rPr lang="en-GB" sz="1600" dirty="0" smtClean="0"/>
+              <a:t> </a:t>
+            </a:r>
+            <a:r>
+              <a:rPr lang="en-GB" sz="1600" dirty="0" err="1" smtClean="0"/>
+              <a:t>oboljenja</a:t>
+            </a:r>
+            <a:r>
+              <a:rPr lang="en-GB" sz="1600" dirty="0" smtClean="0"/>
+              <a:t> </a:t>
+            </a:r>
+            <a:r>
+              <a:rPr lang="en-GB" sz="1600" dirty="0" err="1" smtClean="0"/>
+              <a:t>povezanih</a:t>
+            </a:r>
+            <a:r>
+              <a:rPr lang="en-GB" sz="1600" dirty="0" smtClean="0"/>
+              <a:t> </a:t>
+            </a:r>
+            <a:r>
+              <a:rPr lang="en-GB" sz="1600" dirty="0" err="1" smtClean="0"/>
+              <a:t>sa</a:t>
+            </a:r>
+            <a:r>
+              <a:rPr lang="en-GB" sz="1600" dirty="0" smtClean="0"/>
+              <a:t> </a:t>
+            </a:r>
+            <a:r>
+              <a:rPr lang="en-GB" sz="1600" dirty="0" err="1" smtClean="0"/>
+              <a:t>pankreasom</a:t>
+            </a:r>
+            <a:endParaRPr lang="sr-Latn-RS" sz="1600" dirty="0" smtClean="0"/>
+          </a:p>
+          <a:p>
+            <a:r>
+              <a:rPr lang="sr-Latn-RS" sz="1600" dirty="0" smtClean="0"/>
+              <a:t>Eksperimentalno merenje afiniteta vezivanja je skupo i sporo</a:t>
+            </a:r>
+          </a:p>
+          <a:p>
+            <a:r>
+              <a:rPr lang="sr-Latn-RS" sz="1600" b="1" dirty="0" smtClean="0"/>
+              <a:t>Cilj</a:t>
+            </a:r>
+            <a:r>
+              <a:rPr lang="sr-Latn-RS" sz="1600" dirty="0" smtClean="0"/>
+              <a:t>: Razviti računarski model koji brzo i pouzdano predviđa koliko dobro se molekul vezuje za tripsin</a:t>
+            </a:r>
+          </a:p>
+          <a:p>
+            <a:endParaRPr dirty="0"/>
+          </a:p>
+        </p:txBody>
+      </p:sp>
+      <p:pic>
+        <p:nvPicPr>
+          <p:cNvPr id="1026" name="Picture 2" descr="Basic Structure of Enzymes by X-ray Crystallography - Biology Notes"/>
+          <p:cNvPicPr>
+            <a:picLocks noChangeAspect="1" noChangeArrowheads="1"/>
+          </p:cNvPicPr>
+          <p:nvPr/>
+        </p:nvPicPr>
+        <p:blipFill>
+          <a:blip r:embed="rId2">
+            <a:extLst>
+              <a:ext uri="{28A0092B-C50C-407E-A947-70E740481C1C}">
+                <a14:useLocalDpi xmlns:a14="http://schemas.microsoft.com/office/drawing/2010/main" val="0"/>
+              </a:ext>
+            </a:extLst>
+          </a:blip>
+          <a:srcRect/>
+          <a:stretch>
+            <a:fillRect/>
+          </a:stretch>
+        </p:blipFill>
+        <p:spPr bwMode="auto">
+          <a:xfrm>
+            <a:off x="5262542" y="1811191"/>
+            <a:ext cx="3294947" cy="1969727"/>
+          </a:xfrm>
+          <a:prstGeom prst="rect">
+            <a:avLst/>
+          </a:prstGeom>
+          <a:noFill/>
+          <a:extLst>
+            <a:ext uri="{909E8E84-426E-40DD-AFC4-6F175D3DCCD1}">
+              <a14:hiddenFill xmlns:a14="http://schemas.microsoft.com/office/drawing/2010/main">
+                <a:solidFill>
+                  <a:srgbClr val="FFFFFF"/>
+                </a:solidFill>
+              </a14:hiddenFill>
+            </a:ext>
+          </a:extLst>
+        </p:spPr>
+      </p:pic>
+    </p:spTree>
+    <p:extLst>
+      <p:ext uri="{BB962C8B-B14F-4D97-AF65-F5344CB8AC3E}">
+        <p14:creationId xmlns:p14="http://schemas.microsoft.com/office/powerpoint/2010/main" val="2399148882"/>
+      </p:ext>
+    </p:extLst>
+  </p:cSld>
+  <p:clrMapOvr>
+    <a:masterClrMapping/>
+  </p:clrMapOvr>
+  <p:timing>
+    <p:tnLst>
+      <p:par>
+        <p:cTn id="1" dur="indefinite" restart="never" nodeType="tmRoot"/>
+      </p:par>
+    </p:tnLst>
+  </p:timing>
+</p:sld>
+</file>
+
+<file path=ppt/slides/slide20.xml><?xml version="1.0" encoding="utf-8"?>
 <p:sld xmlns:a="http://schemas.openxmlformats.org/drawingml/2006/main" xmlns:r="http://schemas.openxmlformats.org/officeDocument/2006/relationships" xmlns:p="http://schemas.openxmlformats.org/presentationml/2006/main">
   <p:cSld>
     <p:spTree>
@@ -7804,325 +13821,6 @@
 </p:sld>
 </file>
 
-<file path=ppt/slides/slide2.xml><?xml version="1.0" encoding="utf-8"?>
-<p:sld xmlns:a="http://schemas.openxmlformats.org/drawingml/2006/main" xmlns:r="http://schemas.openxmlformats.org/officeDocument/2006/relationships" xmlns:p="http://schemas.openxmlformats.org/presentationml/2006/main">
-  <p:cSld>
-    <p:spTree>
-      <p:nvGrpSpPr>
-        <p:cNvPr id="1" name=""/>
-        <p:cNvGrpSpPr/>
-        <p:nvPr/>
-      </p:nvGrpSpPr>
-      <p:grpSpPr>
-        <a:xfrm>
-          <a:off x="0" y="0"/>
-          <a:ext cx="0" cy="0"/>
-          <a:chOff x="0" y="0"/>
-          <a:chExt cx="0" cy="0"/>
-        </a:xfrm>
-      </p:grpSpPr>
-      <p:sp>
-        <p:nvSpPr>
-          <p:cNvPr id="2" name="Title 1"/>
-          <p:cNvSpPr>
-            <a:spLocks noGrp="1"/>
-          </p:cNvSpPr>
-          <p:nvPr>
-            <p:ph type="title"/>
-          </p:nvPr>
-        </p:nvSpPr>
-        <p:spPr/>
-        <p:txBody>
-          <a:bodyPr/>
-          <a:lstStyle/>
-          <a:p>
-            <a:pPr algn="l"/>
-            <a:r>
-              <a:rPr lang="sr-Latn-RS" sz="3600" dirty="0" smtClean="0"/>
-              <a:t>Opis problema</a:t>
-            </a:r>
-            <a:endParaRPr lang="en-GB" sz="3600" dirty="0"/>
-          </a:p>
-        </p:txBody>
-      </p:sp>
-      <p:sp>
-        <p:nvSpPr>
-          <p:cNvPr id="3" name="Google Shape;96;p7"/>
-          <p:cNvSpPr txBox="1">
-            <a:spLocks noGrp="1"/>
-          </p:cNvSpPr>
-          <p:nvPr>
-            <p:ph type="subTitle" idx="1"/>
-          </p:nvPr>
-        </p:nvSpPr>
-        <p:spPr>
-          <a:xfrm>
-            <a:off x="666603" y="1708661"/>
-            <a:ext cx="4332561" cy="2669780"/>
-          </a:xfrm>
-          <a:prstGeom prst="rect">
-            <a:avLst/>
-          </a:prstGeom>
-        </p:spPr>
-        <p:txBody>
-          <a:bodyPr spcFirstLastPara="1" wrap="square" lIns="91425" tIns="91425" rIns="91425" bIns="91425" anchor="t" anchorCtr="0">
-            <a:noAutofit/>
-          </a:bodyPr>
-          <a:lstStyle>
-            <a:lvl1pPr lvl="0" rtl="0">
-              <a:spcBef>
-                <a:spcPts val="0"/>
-              </a:spcBef>
-              <a:spcAft>
-                <a:spcPts val="0"/>
-              </a:spcAft>
-              <a:buClr>
-                <a:schemeClr val="accent2"/>
-              </a:buClr>
-              <a:buSzPts val="1600"/>
-              <a:buFont typeface="Albert Sans Light"/>
-              <a:buChar char="●"/>
-              <a:defRPr/>
-            </a:lvl1pPr>
-            <a:lvl2pPr lvl="1" algn="ctr" rtl="0">
-              <a:lnSpc>
-                <a:spcPct val="100000"/>
-              </a:lnSpc>
-              <a:spcBef>
-                <a:spcPts val="0"/>
-              </a:spcBef>
-              <a:spcAft>
-                <a:spcPts val="0"/>
-              </a:spcAft>
-              <a:buClr>
-                <a:srgbClr val="E76A28"/>
-              </a:buClr>
-              <a:buSzPts val="1600"/>
-              <a:buFont typeface="Nunito Light"/>
-              <a:buChar char="○"/>
-              <a:defRPr/>
-            </a:lvl2pPr>
-            <a:lvl3pPr lvl="2" algn="ctr" rtl="0">
-              <a:lnSpc>
-                <a:spcPct val="100000"/>
-              </a:lnSpc>
-              <a:spcBef>
-                <a:spcPts val="0"/>
-              </a:spcBef>
-              <a:spcAft>
-                <a:spcPts val="0"/>
-              </a:spcAft>
-              <a:buClr>
-                <a:srgbClr val="E76A28"/>
-              </a:buClr>
-              <a:buSzPts val="1500"/>
-              <a:buFont typeface="Nunito Light"/>
-              <a:buChar char="■"/>
-              <a:defRPr/>
-            </a:lvl3pPr>
-            <a:lvl4pPr lvl="3" algn="ctr" rtl="0">
-              <a:lnSpc>
-                <a:spcPct val="100000"/>
-              </a:lnSpc>
-              <a:spcBef>
-                <a:spcPts val="0"/>
-              </a:spcBef>
-              <a:spcAft>
-                <a:spcPts val="0"/>
-              </a:spcAft>
-              <a:buClr>
-                <a:srgbClr val="E76A28"/>
-              </a:buClr>
-              <a:buSzPts val="1500"/>
-              <a:buFont typeface="Nunito Light"/>
-              <a:buChar char="●"/>
-              <a:defRPr/>
-            </a:lvl4pPr>
-            <a:lvl5pPr lvl="4" algn="ctr" rtl="0">
-              <a:lnSpc>
-                <a:spcPct val="100000"/>
-              </a:lnSpc>
-              <a:spcBef>
-                <a:spcPts val="0"/>
-              </a:spcBef>
-              <a:spcAft>
-                <a:spcPts val="0"/>
-              </a:spcAft>
-              <a:buClr>
-                <a:srgbClr val="E76A28"/>
-              </a:buClr>
-              <a:buSzPts val="1400"/>
-              <a:buFont typeface="Nunito Light"/>
-              <a:buChar char="○"/>
-              <a:defRPr/>
-            </a:lvl5pPr>
-            <a:lvl6pPr lvl="5" algn="ctr" rtl="0">
-              <a:lnSpc>
-                <a:spcPct val="100000"/>
-              </a:lnSpc>
-              <a:spcBef>
-                <a:spcPts val="0"/>
-              </a:spcBef>
-              <a:spcAft>
-                <a:spcPts val="0"/>
-              </a:spcAft>
-              <a:buClr>
-                <a:srgbClr val="999999"/>
-              </a:buClr>
-              <a:buSzPts val="1400"/>
-              <a:buFont typeface="Nunito Light"/>
-              <a:buChar char="■"/>
-              <a:defRPr/>
-            </a:lvl6pPr>
-            <a:lvl7pPr lvl="6" algn="ctr" rtl="0">
-              <a:lnSpc>
-                <a:spcPct val="100000"/>
-              </a:lnSpc>
-              <a:spcBef>
-                <a:spcPts val="0"/>
-              </a:spcBef>
-              <a:spcAft>
-                <a:spcPts val="0"/>
-              </a:spcAft>
-              <a:buClr>
-                <a:srgbClr val="999999"/>
-              </a:buClr>
-              <a:buSzPts val="1300"/>
-              <a:buFont typeface="Nunito Light"/>
-              <a:buChar char="●"/>
-              <a:defRPr/>
-            </a:lvl7pPr>
-            <a:lvl8pPr lvl="7" algn="ctr" rtl="0">
-              <a:lnSpc>
-                <a:spcPct val="100000"/>
-              </a:lnSpc>
-              <a:spcBef>
-                <a:spcPts val="0"/>
-              </a:spcBef>
-              <a:spcAft>
-                <a:spcPts val="0"/>
-              </a:spcAft>
-              <a:buClr>
-                <a:srgbClr val="999999"/>
-              </a:buClr>
-              <a:buSzPts val="1300"/>
-              <a:buFont typeface="Nunito Light"/>
-              <a:buChar char="○"/>
-              <a:defRPr/>
-            </a:lvl8pPr>
-            <a:lvl9pPr lvl="8" algn="ctr" rtl="0">
-              <a:lnSpc>
-                <a:spcPct val="100000"/>
-              </a:lnSpc>
-              <a:spcBef>
-                <a:spcPts val="0"/>
-              </a:spcBef>
-              <a:spcAft>
-                <a:spcPts val="0"/>
-              </a:spcAft>
-              <a:buClr>
-                <a:srgbClr val="999999"/>
-              </a:buClr>
-              <a:buSzPts val="1400"/>
-              <a:buFont typeface="Nunito Light"/>
-              <a:buChar char="■"/>
-              <a:defRPr/>
-            </a:lvl9pPr>
-          </a:lstStyle>
-          <a:p>
-            <a:r>
-              <a:rPr lang="sr-Latn-RS" sz="1600" dirty="0" smtClean="0"/>
-              <a:t>Humani tripsin ima ključnu ulogu u varenju proteina</a:t>
-            </a:r>
-          </a:p>
-          <a:p>
-            <a:r>
-              <a:rPr lang="sr-Latn-RS" sz="1600" dirty="0" smtClean="0"/>
-              <a:t>Inhibitori tripsina</a:t>
-            </a:r>
-          </a:p>
-          <a:p>
-            <a:r>
-              <a:rPr lang="sr-Latn-RS" sz="1600" dirty="0" smtClean="0"/>
-              <a:t>Eksperimentalno merenje afiniteta vezivanja je skupo i sporo</a:t>
-            </a:r>
-          </a:p>
-          <a:p>
-            <a:r>
-              <a:rPr lang="sr-Latn-RS" sz="1600" b="1" dirty="0" smtClean="0"/>
-              <a:t>Cilj</a:t>
-            </a:r>
-            <a:r>
-              <a:rPr lang="sr-Latn-RS" sz="1600" dirty="0" smtClean="0"/>
-              <a:t>: Razviti računarski model koji brzo i pouzdano predviđa koliko dobro se molekul vezuje za tripsin</a:t>
-            </a:r>
-          </a:p>
-          <a:p>
-            <a:endParaRPr dirty="0"/>
-          </a:p>
-        </p:txBody>
-      </p:sp>
-      <p:pic>
-        <p:nvPicPr>
-          <p:cNvPr id="1026" name="Picture 2" descr="Basic Structure of Enzymes by X-ray Crystallography - Biology Notes"/>
-          <p:cNvPicPr>
-            <a:picLocks noChangeAspect="1" noChangeArrowheads="1"/>
-          </p:cNvPicPr>
-          <p:nvPr/>
-        </p:nvPicPr>
-        <p:blipFill>
-          <a:blip r:embed="rId2">
-            <a:extLst>
-              <a:ext uri="{28A0092B-C50C-407E-A947-70E740481C1C}">
-                <a14:useLocalDpi xmlns:a14="http://schemas.microsoft.com/office/drawing/2010/main" val="0"/>
-              </a:ext>
-            </a:extLst>
-          </a:blip>
-          <a:srcRect/>
-          <a:stretch>
-            <a:fillRect/>
-          </a:stretch>
-        </p:blipFill>
-        <p:spPr bwMode="auto">
-          <a:xfrm>
-            <a:off x="5262542" y="1811191"/>
-            <a:ext cx="3294947" cy="1969727"/>
-          </a:xfrm>
-          <a:prstGeom prst="rect">
-            <a:avLst/>
-          </a:prstGeom>
-          <a:noFill/>
-          <a:extLst>
-            <a:ext uri="{909E8E84-426E-40DD-AFC4-6F175D3DCCD1}">
-              <a14:hiddenFill xmlns:a14="http://schemas.microsoft.com/office/drawing/2010/main">
-                <a:solidFill>
-                  <a:srgbClr val="FFFFFF"/>
-                </a:solidFill>
-              </a14:hiddenFill>
-            </a:ext>
-          </a:extLst>
-        </p:spPr>
-      </p:pic>
-    </p:spTree>
-    <p:extLst>
-      <p:ext uri="{BB962C8B-B14F-4D97-AF65-F5344CB8AC3E}">
-        <p14:creationId xmlns:p14="http://schemas.microsoft.com/office/powerpoint/2010/main" val="2399148882"/>
-      </p:ext>
-    </p:extLst>
-  </p:cSld>
-  <p:clrMapOvr>
-    <a:masterClrMapping/>
-  </p:clrMapOvr>
-  <p:timing>
-    <p:tnLst>
-      <p:par>
-        <p:cTn id="1" dur="indefinite" restart="never" nodeType="tmRoot"/>
-      </p:par>
-    </p:tnLst>
-  </p:timing>
-</p:sld>
-</file>
-
 <file path=ppt/slides/slide3.xml><?xml version="1.0" encoding="utf-8"?>
 <p:sld xmlns:a="http://schemas.openxmlformats.org/drawingml/2006/main" xmlns:r="http://schemas.openxmlformats.org/officeDocument/2006/relationships" xmlns:p="http://schemas.openxmlformats.org/presentationml/2006/main">
   <p:cSld>
@@ -8186,19 +13884,46 @@
           <a:p>
             <a:r>
               <a:rPr lang="sr-Latn-RS" sz="1600" dirty="0" smtClean="0"/>
-              <a:t>Humani tripsin: ~1500 dostupnih eksperimentalnih merenja</a:t>
+              <a:t>Humani </a:t>
             </a:r>
+            <a:r>
+              <a:rPr lang="sr-Latn-RS" sz="1600" dirty="0" smtClean="0"/>
+              <a:t>tripsin</a:t>
+            </a:r>
+            <a:r>
+              <a:rPr lang="en-GB" sz="1600" dirty="0" smtClean="0"/>
+              <a:t> </a:t>
+            </a:r>
+            <a:r>
+              <a:rPr lang="en-GB" sz="1600" dirty="0" err="1" smtClean="0"/>
+              <a:t>i</a:t>
+            </a:r>
+            <a:r>
+              <a:rPr lang="en-GB" sz="1600" dirty="0" smtClean="0"/>
+              <a:t> </a:t>
+            </a:r>
+            <a:r>
+              <a:rPr lang="en-GB" sz="1600" dirty="0" err="1" smtClean="0"/>
+              <a:t>kravlji</a:t>
+            </a:r>
+            <a:r>
+              <a:rPr lang="en-GB" sz="1600" dirty="0" smtClean="0"/>
+              <a:t> </a:t>
+            </a:r>
+            <a:r>
+              <a:rPr lang="en-GB" sz="1600" dirty="0" err="1" smtClean="0"/>
+              <a:t>tripsin</a:t>
+            </a:r>
+            <a:endParaRPr lang="en-GB" sz="1600" dirty="0" smtClean="0"/>
           </a:p>
           <a:p>
             <a:r>
               <a:rPr lang="sr-Latn-RS" sz="1600" dirty="0" smtClean="0"/>
-              <a:t>Kravlji tripsin: ~1000 merenja</a:t>
+              <a:t>Njihova </a:t>
             </a:r>
-          </a:p>
-          <a:p>
             <a:r>
               <a:rPr lang="sr-Latn-RS" sz="1600" dirty="0" smtClean="0"/>
-              <a:t>Njihova međusobna sličnost: ~80%</a:t>
+              <a:t>međusobna sličnost: ~80%</a:t>
             </a:r>
           </a:p>
           <a:p>
@@ -8214,12 +13939,10 @@
             </a:r>
           </a:p>
           <a:p>
-            <a:pPr marL="139700" indent="0">
-              <a:buNone/>
-            </a:pPr>
+            <a:pPr lvl="1" algn="l"/>
             <a:r>
               <a:rPr lang="sr-Latn-RS" sz="1600" dirty="0" smtClean="0"/>
-              <a:t>            - Da li transfer learning poboljšava predikcije?</a:t>
+              <a:t>Da li transfer learning poboljšava predikcije?</a:t>
             </a:r>
           </a:p>
           <a:p>
@@ -8234,7 +13957,6 @@
               <a:rPr lang="sr-Latn-RS" dirty="0" smtClean="0"/>
               <a:t>  </a:t>
             </a:r>
-            <a:endParaRPr lang="sr-Latn-RS" dirty="0" smtClean="0"/>
           </a:p>
         </p:txBody>
       </p:sp>
@@ -8399,7 +14121,7 @@
           <p:nvPr>
             <p:extLst>
               <p:ext uri="{D42A27DB-BD31-4B8C-83A1-F6EECF244321}">
-                <p14:modId xmlns:p14="http://schemas.microsoft.com/office/powerpoint/2010/main" val="3562857902"/>
+                <p14:modId xmlns:p14="http://schemas.microsoft.com/office/powerpoint/2010/main" val="2757339066"/>
               </p:ext>
             </p:extLst>
           </p:nvPr>
@@ -8560,8 +14282,12 @@
                     <a:lstStyle/>
                     <a:p>
                       <a:r>
+                        <a:rPr lang="en-GB" dirty="0" err="1" smtClean="0"/>
+                        <a:t>Kravlji</a:t>
+                      </a:r>
+                      <a:r>
                         <a:rPr lang="sr-Latn-RS" dirty="0" smtClean="0"/>
-                        <a:t>Goveđi tripsin</a:t>
+                        <a:t> tripsin</a:t>
                       </a:r>
                       <a:endParaRPr lang="en-GB" dirty="0"/>
                     </a:p>
@@ -8806,31 +14532,39 @@
             <a:endParaRPr lang="sr-Latn-RS" sz="1600" dirty="0"/>
           </a:p>
           <a:p>
-            <a:pPr marL="139700" indent="0">
-              <a:buNone/>
-            </a:pPr>
+            <a:pPr lvl="1" algn="l"/>
             <a:r>
               <a:rPr lang="sr-Latn-RS" sz="1600" dirty="0" smtClean="0"/>
-              <a:t> 	1. 2D deskriptori (208), predstavljaju fizičko-hemijska svojstva</a:t>
+              <a:t>2D deskriptori (217), predstavljaju fizičko-hemijska svojstva</a:t>
             </a:r>
           </a:p>
           <a:p>
-            <a:pPr marL="139700" indent="0">
-              <a:buNone/>
-            </a:pPr>
+            <a:pPr lvl="1" algn="l"/>
             <a:r>
-              <a:rPr lang="sr-Latn-RS" sz="1600" dirty="0"/>
-              <a:t>	</a:t>
+              <a:rPr lang="sr-Latn-RS" sz="1600" dirty="0" smtClean="0"/>
+              <a:t>Morganovi fingerprintovi (2048) bita, </a:t>
             </a:r>
             <a:r>
               <a:rPr lang="sr-Latn-RS" sz="1600" dirty="0" smtClean="0"/>
-              <a:t>2. Morganovi fingerprintovi (2048) bita, predstvalja binarni vektor koji kodira prisustvo specifičnih podstruktura</a:t>
+              <a:t>predst</a:t>
+            </a:r>
+            <a:r>
+              <a:rPr lang="en-GB" sz="1600" dirty="0" err="1" smtClean="0"/>
+              <a:t>av</a:t>
+            </a:r>
+            <a:r>
+              <a:rPr lang="sr-Latn-RS" sz="1600" dirty="0" smtClean="0"/>
+              <a:t>lja </a:t>
+            </a:r>
+            <a:r>
+              <a:rPr lang="sr-Latn-RS" sz="1600" dirty="0" smtClean="0"/>
+              <a:t>binarni vektor koji kodira prisustvo specifičnih podstruktura</a:t>
             </a:r>
           </a:p>
           <a:p>
             <a:r>
               <a:rPr lang="sr-Latn-RS" sz="1600" dirty="0" smtClean="0"/>
-              <a:t>Ukupno 2256 numeričkih vrednosti po molekulu</a:t>
+              <a:t>Ukupno 2265 numeričkih vrednosti po molekulu</a:t>
             </a:r>
           </a:p>
         </p:txBody>
@@ -8910,6 +14644,13 @@
   <p:clrMapOvr>
     <a:masterClrMapping/>
   </p:clrMapOvr>
+  <p:timing>
+    <p:tnLst>
+      <p:par>
+        <p:cTn id="1" dur="indefinite" restart="never" nodeType="tmRoot"/>
+      </p:par>
+    </p:tnLst>
+  </p:timing>
 </p:sld>
 </file>
 
@@ -8963,15 +14704,65 @@
             <p:ph type="subTitle" idx="1"/>
           </p:nvPr>
         </p:nvSpPr>
-        <p:spPr/>
+        <p:spPr>
+          <a:xfrm>
+            <a:off x="487235" y="1112200"/>
+            <a:ext cx="7936765" cy="2298300"/>
+          </a:xfrm>
+        </p:spPr>
         <p:txBody>
           <a:bodyPr/>
           <a:lstStyle/>
           <a:p>
-            <a:endParaRPr lang="en-GB"/>
+            <a:r>
+              <a:rPr lang="sr-Latn-RS" smtClean="0"/>
+              <a:t>2265 </a:t>
+            </a:r>
+            <a:r>
+              <a:rPr lang="sr-Latn-RS" dirty="0" smtClean="0">
+                <a:latin typeface="Albert Sans" panose="020B0604020202020204" charset="0"/>
+              </a:rPr>
+              <a:t>karakteristika</a:t>
+            </a:r>
+            <a:r>
+              <a:rPr lang="sr-Latn-RS" dirty="0" smtClean="0"/>
+              <a:t> donosi rizik od preprilagođavanja modela i predstavlja situaciju gde je multikolinearnost zagarantovana</a:t>
+            </a:r>
+          </a:p>
+          <a:p>
+            <a:pPr marL="139700" indent="0">
+              <a:buNone/>
+            </a:pPr>
+            <a:r>
+              <a:rPr lang="sr-Latn-RS" dirty="0" smtClean="0"/>
+              <a:t> </a:t>
+            </a:r>
+            <a:endParaRPr lang="en-GB" dirty="0"/>
           </a:p>
         </p:txBody>
       </p:sp>
+      <p:graphicFrame>
+        <p:nvGraphicFramePr>
+          <p:cNvPr id="5" name="Diagram 4"/>
+          <p:cNvGraphicFramePr/>
+          <p:nvPr>
+            <p:extLst>
+              <p:ext uri="{D42A27DB-BD31-4B8C-83A1-F6EECF244321}">
+                <p14:modId xmlns:p14="http://schemas.microsoft.com/office/powerpoint/2010/main" val="3440098915"/>
+              </p:ext>
+            </p:extLst>
+          </p:nvPr>
+        </p:nvGraphicFramePr>
+        <p:xfrm>
+          <a:off x="553980" y="1742029"/>
+          <a:ext cx="8222925" cy="3230438"/>
+        </p:xfrm>
+        <a:graphic>
+          <a:graphicData uri="http://schemas.openxmlformats.org/drawingml/2006/diagram">
+            <dgm:relIds xmlns:dgm="http://schemas.openxmlformats.org/drawingml/2006/diagram" xmlns:r="http://schemas.openxmlformats.org/officeDocument/2006/relationships" r:dm="rId2" r:lo="rId3" r:qs="rId4" r:cs="rId5"/>
+          </a:graphicData>
+        </a:graphic>
+      </p:graphicFrame>
     </p:spTree>
     <p:extLst>
       <p:ext uri="{BB962C8B-B14F-4D97-AF65-F5344CB8AC3E}">
@@ -9026,7 +14817,7 @@
           <a:p>
             <a:r>
               <a:rPr lang="sr-Latn-RS" dirty="0" smtClean="0"/>
-              <a:t>Modeli i scenariji</a:t>
+              <a:t>Rezultati analize dimenzionalnosti</a:t>
             </a:r>
             <a:endParaRPr lang="en-GB" dirty="0"/>
           </a:p>
@@ -9047,14 +14838,72 @@
           <a:bodyPr/>
           <a:lstStyle/>
           <a:p>
-            <a:endParaRPr lang="en-GB"/>
+            <a:endParaRPr lang="en-GB" dirty="0"/>
           </a:p>
         </p:txBody>
       </p:sp>
+      <p:pic>
+        <p:nvPicPr>
+          <p:cNvPr id="7" name="Picture 6"/>
+          <p:cNvPicPr>
+            <a:picLocks noChangeAspect="1"/>
+          </p:cNvPicPr>
+          <p:nvPr/>
+        </p:nvPicPr>
+        <p:blipFill rotWithShape="1">
+          <a:blip r:embed="rId2">
+            <a:extLst>
+              <a:ext uri="{28A0092B-C50C-407E-A947-70E740481C1C}">
+                <a14:useLocalDpi xmlns:a14="http://schemas.microsoft.com/office/drawing/2010/main" val="0"/>
+              </a:ext>
+            </a:extLst>
+          </a:blip>
+          <a:srcRect l="12549" r="51205" b="49521"/>
+          <a:stretch/>
+        </p:blipFill>
+        <p:spPr>
+          <a:xfrm>
+            <a:off x="639049" y="1312159"/>
+            <a:ext cx="3597530" cy="3324083"/>
+          </a:xfrm>
+          <a:prstGeom prst="rect">
+            <a:avLst/>
+          </a:prstGeom>
+        </p:spPr>
+      </p:pic>
+      <p:pic>
+        <p:nvPicPr>
+          <p:cNvPr id="8" name="Picture 7"/>
+          <p:cNvPicPr>
+            <a:picLocks noChangeAspect="1"/>
+          </p:cNvPicPr>
+          <p:nvPr/>
+        </p:nvPicPr>
+        <p:blipFill rotWithShape="1">
+          <a:blip r:embed="rId3">
+            <a:extLst>
+              <a:ext uri="{28A0092B-C50C-407E-A947-70E740481C1C}">
+                <a14:useLocalDpi xmlns:a14="http://schemas.microsoft.com/office/drawing/2010/main" val="0"/>
+              </a:ext>
+            </a:extLst>
+          </a:blip>
+          <a:srcRect r="48861" b="49911"/>
+          <a:stretch/>
+        </p:blipFill>
+        <p:spPr>
+          <a:xfrm>
+            <a:off x="4236579" y="1312159"/>
+            <a:ext cx="4254299" cy="3324083"/>
+          </a:xfrm>
+          <a:prstGeom prst="rect">
+            <a:avLst/>
+          </a:prstGeom>
+        </p:spPr>
+      </p:pic>
     </p:spTree>
     <p:extLst>
       <p:ext uri="{BB962C8B-B14F-4D97-AF65-F5344CB8AC3E}">
-        <p14:creationId xmlns:p14="http://schemas.microsoft.com/office/powerpoint/2010/main" val="1423895676"/>
+        <p14:creationId xmlns:p14="http://schemas.microsoft.com/office/powerpoint/2010/main" val="2516271404"/>
       </p:ext>
     </p:extLst>
   </p:cSld>
@@ -9105,7 +14954,7 @@
           <a:p>
             <a:r>
               <a:rPr lang="sr-Latn-RS" dirty="0" smtClean="0"/>
-              <a:t>Rezultati – poređenje modela</a:t>
+              <a:t>Modeli i scenariji</a:t>
             </a:r>
             <a:endParaRPr lang="en-GB" dirty="0"/>
           </a:p>
@@ -9121,19 +14970,200 @@
             <p:ph type="subTitle" idx="1"/>
           </p:nvPr>
         </p:nvSpPr>
-        <p:spPr/>
+        <p:spPr>
+          <a:xfrm>
+            <a:off x="553980" y="1321543"/>
+            <a:ext cx="4460820" cy="3237108"/>
+          </a:xfrm>
+        </p:spPr>
         <p:txBody>
           <a:bodyPr/>
           <a:lstStyle/>
           <a:p>
-            <a:endParaRPr lang="en-GB"/>
+            <a:r>
+              <a:rPr lang="sr-Latn-RS" sz="1600" dirty="0" smtClean="0"/>
+              <a:t>Modeli:</a:t>
+            </a:r>
+          </a:p>
+          <a:p>
+            <a:pPr lvl="1" algn="l"/>
+            <a:r>
+              <a:rPr lang="sr-Latn-RS" sz="1600" dirty="0"/>
+              <a:t>Višestruka linearna regresija</a:t>
+            </a:r>
+          </a:p>
+          <a:p>
+            <a:pPr lvl="1" algn="l"/>
+            <a:r>
+              <a:rPr lang="sr-Latn-RS" sz="1600" dirty="0"/>
+              <a:t>Ridge regresija</a:t>
+            </a:r>
+          </a:p>
+          <a:p>
+            <a:pPr lvl="1" algn="l"/>
+            <a:r>
+              <a:rPr lang="sr-Latn-RS" sz="1600" dirty="0"/>
+              <a:t>Lasso regresija</a:t>
+            </a:r>
+          </a:p>
+          <a:p>
+            <a:pPr lvl="1" algn="l"/>
+            <a:r>
+              <a:rPr lang="sr-Latn-RS" sz="1600" dirty="0"/>
+              <a:t>Elastic net regresija</a:t>
+            </a:r>
+          </a:p>
+          <a:p>
+            <a:pPr lvl="1" algn="l"/>
+            <a:r>
+              <a:rPr lang="sr-Latn-RS" sz="1600" dirty="0"/>
+              <a:t>Random Forest</a:t>
+            </a:r>
+          </a:p>
+          <a:p>
+            <a:pPr lvl="1" algn="l"/>
+            <a:r>
+              <a:rPr lang="sr-Latn-RS" sz="1600" dirty="0"/>
+              <a:t>Gradient </a:t>
+            </a:r>
+            <a:r>
+              <a:rPr lang="sr-Latn-RS" sz="1600" dirty="0" smtClean="0"/>
+              <a:t>Boosting</a:t>
+            </a:r>
+            <a:endParaRPr lang="sr-Latn-RS" sz="1600" dirty="0"/>
+          </a:p>
+          <a:p>
+            <a:r>
+              <a:rPr lang="sr-Latn-RS" sz="1600" dirty="0" smtClean="0"/>
+              <a:t>Scenariji:</a:t>
+            </a:r>
+          </a:p>
+          <a:p>
+            <a:pPr lvl="1" algn="l"/>
+            <a:r>
+              <a:rPr lang="sr-Latn-RS" sz="1600" dirty="0"/>
+              <a:t>Samo podaci za humani tripsin</a:t>
+            </a:r>
+          </a:p>
+          <a:p>
+            <a:pPr lvl="1" algn="l"/>
+            <a:r>
+              <a:rPr lang="sr-Latn-RS" sz="1600" dirty="0"/>
+              <a:t>Transfer learning </a:t>
+            </a:r>
+          </a:p>
+          <a:p>
+            <a:pPr lvl="1" algn="l"/>
+            <a:r>
+              <a:rPr lang="sr-Latn-RS" sz="1600" dirty="0"/>
+              <a:t>Kombinovani </a:t>
+            </a:r>
+            <a:r>
+              <a:rPr lang="sr-Latn-RS" sz="1600" dirty="0" smtClean="0"/>
+              <a:t>dataset</a:t>
+            </a:r>
+          </a:p>
+          <a:p>
+            <a:r>
+              <a:rPr lang="sr-Latn-RS" sz="1600" dirty="0" smtClean="0"/>
+              <a:t>Strukutra podataka: 70/15/15</a:t>
+            </a:r>
+            <a:endParaRPr lang="sr-Latn-RS" dirty="0" smtClean="0"/>
+          </a:p>
+          <a:p>
+            <a:pPr marL="596900" lvl="1" indent="0" algn="l">
+              <a:buNone/>
+            </a:pPr>
+            <a:endParaRPr lang="sr-Latn-RS" dirty="0"/>
           </a:p>
         </p:txBody>
       </p:sp>
+      <p:pic>
+        <p:nvPicPr>
+          <p:cNvPr id="1026" name="Picture 2" descr="What is Random Forest? | dida ML Basics"/>
+          <p:cNvPicPr>
+            <a:picLocks noChangeAspect="1" noChangeArrowheads="1"/>
+          </p:cNvPicPr>
+          <p:nvPr/>
+        </p:nvPicPr>
+        <p:blipFill>
+          <a:blip r:embed="rId2">
+            <a:extLst>
+              <a:ext uri="{28A0092B-C50C-407E-A947-70E740481C1C}">
+                <a14:useLocalDpi xmlns:a14="http://schemas.microsoft.com/office/drawing/2010/main" val="0"/>
+              </a:ext>
+            </a:extLst>
+          </a:blip>
+          <a:srcRect/>
+          <a:stretch>
+            <a:fillRect/>
+          </a:stretch>
+        </p:blipFill>
+        <p:spPr bwMode="auto">
+          <a:xfrm>
+            <a:off x="4925744" y="539500"/>
+            <a:ext cx="3023799" cy="2015297"/>
+          </a:xfrm>
+          <a:prstGeom prst="rect">
+            <a:avLst/>
+          </a:prstGeom>
+          <a:noFill/>
+          <a:extLst>
+            <a:ext uri="{909E8E84-426E-40DD-AFC4-6F175D3DCCD1}">
+              <a14:hiddenFill xmlns:a14="http://schemas.microsoft.com/office/drawing/2010/main">
+                <a:solidFill>
+                  <a:srgbClr val="FFFFFF"/>
+                </a:solidFill>
+              </a14:hiddenFill>
+            </a:ext>
+          </a:extLst>
+        </p:spPr>
+      </p:pic>
+      <p:pic>
+        <p:nvPicPr>
+          <p:cNvPr id="1032" name="Picture 8" descr="What is Gradient Boosting? | IBM"/>
+          <p:cNvPicPr>
+            <a:picLocks noChangeAspect="1" noChangeArrowheads="1"/>
+          </p:cNvPicPr>
+          <p:nvPr/>
+        </p:nvPicPr>
+        <p:blipFill>
+          <a:blip r:embed="rId3">
+            <a:extLst>
+              <a:ext uri="{28A0092B-C50C-407E-A947-70E740481C1C}">
+                <a14:useLocalDpi xmlns:a14="http://schemas.microsoft.com/office/drawing/2010/main" val="0"/>
+              </a:ext>
+            </a:extLst>
+          </a:blip>
+          <a:srcRect/>
+          <a:stretch>
+            <a:fillRect/>
+          </a:stretch>
+        </p:blipFill>
+        <p:spPr bwMode="auto">
+          <a:xfrm>
+            <a:off x="4636014" y="2692005"/>
+            <a:ext cx="3603258" cy="2026833"/>
+          </a:xfrm>
+          <a:prstGeom prst="rect">
+            <a:avLst/>
+          </a:prstGeom>
+          <a:noFill/>
+          <a:extLst>
+            <a:ext uri="{909E8E84-426E-40DD-AFC4-6F175D3DCCD1}">
+              <a14:hiddenFill xmlns:a14="http://schemas.microsoft.com/office/drawing/2010/main">
+                <a:solidFill>
+                  <a:srgbClr val="FFFFFF"/>
+                </a:solidFill>
+              </a14:hiddenFill>
+            </a:ext>
+          </a:extLst>
+        </p:spPr>
+      </p:pic>
     </p:spTree>
     <p:extLst>
       <p:ext uri="{BB962C8B-B14F-4D97-AF65-F5344CB8AC3E}">
-        <p14:creationId xmlns:p14="http://schemas.microsoft.com/office/powerpoint/2010/main" val="647977260"/>
+        <p14:creationId xmlns:p14="http://schemas.microsoft.com/office/powerpoint/2010/main" val="1423895676"/>
       </p:ext>
     </p:extLst>
   </p:cSld>
@@ -9183,16 +15213,1315 @@
           <a:lstStyle/>
           <a:p>
             <a:r>
-              <a:rPr lang="sr-Latn-RS" dirty="0" smtClean="0"/>
-              <a:t>Rezultati – transfer efikasnost</a:t>
+              <a:rPr lang="sr-Latn-RS" dirty="0"/>
+              <a:t>Rezultati – poređenje modela</a:t>
             </a:r>
             <a:endParaRPr lang="en-GB" dirty="0"/>
           </a:p>
         </p:txBody>
       </p:sp>
+      <p:graphicFrame>
+        <p:nvGraphicFramePr>
+          <p:cNvPr id="4" name="Table 3"/>
+          <p:cNvGraphicFramePr>
+            <a:graphicFrameLocks noGrp="1"/>
+          </p:cNvGraphicFramePr>
+          <p:nvPr>
+            <p:extLst>
+              <p:ext uri="{D42A27DB-BD31-4B8C-83A1-F6EECF244321}">
+                <p14:modId xmlns:p14="http://schemas.microsoft.com/office/powerpoint/2010/main" val="1928626057"/>
+              </p:ext>
+            </p:extLst>
+          </p:nvPr>
+        </p:nvGraphicFramePr>
+        <p:xfrm>
+          <a:off x="587352" y="1440801"/>
+          <a:ext cx="7942597" cy="2804160"/>
+        </p:xfrm>
+        <a:graphic>
+          <a:graphicData uri="http://schemas.openxmlformats.org/drawingml/2006/table">
+            <a:tbl>
+              <a:tblPr firstRow="1" bandRow="1">
+                <a:tableStyleId>{8799B23B-EC83-4686-B30A-512413B5E67A}</a:tableStyleId>
+              </a:tblPr>
+              <a:tblGrid>
+                <a:gridCol w="1876148">
+                  <a:extLst>
+                    <a:ext uri="{9D8B030D-6E8A-4147-A177-3AD203B41FA5}">
+                      <a16:colId xmlns:a16="http://schemas.microsoft.com/office/drawing/2014/main" val="2315449795"/>
+                    </a:ext>
+                  </a:extLst>
+                </a:gridCol>
+                <a:gridCol w="713539">
+                  <a:extLst>
+                    <a:ext uri="{9D8B030D-6E8A-4147-A177-3AD203B41FA5}">
+                      <a16:colId xmlns:a16="http://schemas.microsoft.com/office/drawing/2014/main" val="1006014728"/>
+                    </a:ext>
+                  </a:extLst>
+                </a:gridCol>
+                <a:gridCol w="719729">
+                  <a:extLst>
+                    <a:ext uri="{9D8B030D-6E8A-4147-A177-3AD203B41FA5}">
+                      <a16:colId xmlns:a16="http://schemas.microsoft.com/office/drawing/2014/main" val="1197445393"/>
+                    </a:ext>
+                  </a:extLst>
+                </a:gridCol>
+                <a:gridCol w="661883">
+                  <a:extLst>
+                    <a:ext uri="{9D8B030D-6E8A-4147-A177-3AD203B41FA5}">
+                      <a16:colId xmlns:a16="http://schemas.microsoft.com/office/drawing/2014/main" val="1813568136"/>
+                    </a:ext>
+                  </a:extLst>
+                </a:gridCol>
+                <a:gridCol w="661883">
+                  <a:extLst>
+                    <a:ext uri="{9D8B030D-6E8A-4147-A177-3AD203B41FA5}">
+                      <a16:colId xmlns:a16="http://schemas.microsoft.com/office/drawing/2014/main" val="2600874272"/>
+                    </a:ext>
+                  </a:extLst>
+                </a:gridCol>
+                <a:gridCol w="661883">
+                  <a:extLst>
+                    <a:ext uri="{9D8B030D-6E8A-4147-A177-3AD203B41FA5}">
+                      <a16:colId xmlns:a16="http://schemas.microsoft.com/office/drawing/2014/main" val="2943003279"/>
+                    </a:ext>
+                  </a:extLst>
+                </a:gridCol>
+                <a:gridCol w="661883">
+                  <a:extLst>
+                    <a:ext uri="{9D8B030D-6E8A-4147-A177-3AD203B41FA5}">
+                      <a16:colId xmlns:a16="http://schemas.microsoft.com/office/drawing/2014/main" val="508918920"/>
+                    </a:ext>
+                  </a:extLst>
+                </a:gridCol>
+                <a:gridCol w="661883">
+                  <a:extLst>
+                    <a:ext uri="{9D8B030D-6E8A-4147-A177-3AD203B41FA5}">
+                      <a16:colId xmlns:a16="http://schemas.microsoft.com/office/drawing/2014/main" val="1753187792"/>
+                    </a:ext>
+                  </a:extLst>
+                </a:gridCol>
+                <a:gridCol w="661883">
+                  <a:extLst>
+                    <a:ext uri="{9D8B030D-6E8A-4147-A177-3AD203B41FA5}">
+                      <a16:colId xmlns:a16="http://schemas.microsoft.com/office/drawing/2014/main" val="2653152652"/>
+                    </a:ext>
+                  </a:extLst>
+                </a:gridCol>
+                <a:gridCol w="661883">
+                  <a:extLst>
+                    <a:ext uri="{9D8B030D-6E8A-4147-A177-3AD203B41FA5}">
+                      <a16:colId xmlns:a16="http://schemas.microsoft.com/office/drawing/2014/main" val="944512078"/>
+                    </a:ext>
+                  </a:extLst>
+                </a:gridCol>
+              </a:tblGrid>
+              <a:tr h="185420">
+                <a:tc rowSpan="2">
+                  <a:txBody>
+                    <a:bodyPr/>
+                    <a:lstStyle/>
+                    <a:p>
+                      <a:pPr algn="ctr"/>
+                      <a:r>
+                        <a:rPr lang="sr-Latn-RS" sz="1600" dirty="0" smtClean="0"/>
+                        <a:t>Model</a:t>
+                      </a:r>
+                      <a:endParaRPr lang="en-GB" sz="1600" dirty="0"/>
+                    </a:p>
+                  </a:txBody>
+                  <a:tcPr anchor="ctr"/>
+                </a:tc>
+                <a:tc gridSpan="3">
+                  <a:txBody>
+                    <a:bodyPr/>
+                    <a:lstStyle/>
+                    <a:p>
+                      <a:pPr algn="ctr"/>
+                      <a:r>
+                        <a:rPr lang="sr-Latn-RS" dirty="0" smtClean="0"/>
+                        <a:t>Scenario</a:t>
+                      </a:r>
+                      <a:r>
+                        <a:rPr lang="sr-Latn-RS" baseline="0" dirty="0" smtClean="0"/>
+                        <a:t> 1</a:t>
+                      </a:r>
+                      <a:endParaRPr lang="en-GB" dirty="0"/>
+                    </a:p>
+                  </a:txBody>
+                  <a:tcPr/>
+                </a:tc>
+                <a:tc hMerge="1">
+                  <a:txBody>
+                    <a:bodyPr/>
+                    <a:lstStyle/>
+                    <a:p>
+                      <a:endParaRPr lang="en-GB"/>
+                    </a:p>
+                  </a:txBody>
+                  <a:tcPr/>
+                </a:tc>
+                <a:tc hMerge="1">
+                  <a:txBody>
+                    <a:bodyPr/>
+                    <a:lstStyle/>
+                    <a:p>
+                      <a:endParaRPr lang="en-GB"/>
+                    </a:p>
+                  </a:txBody>
+                  <a:tcPr/>
+                </a:tc>
+                <a:tc gridSpan="3">
+                  <a:txBody>
+                    <a:bodyPr/>
+                    <a:lstStyle/>
+                    <a:p>
+                      <a:pPr algn="ctr"/>
+                      <a:r>
+                        <a:rPr lang="sr-Latn-RS" dirty="0" smtClean="0"/>
+                        <a:t>Scenario 2</a:t>
+                      </a:r>
+                      <a:endParaRPr lang="en-GB" dirty="0"/>
+                    </a:p>
+                  </a:txBody>
+                  <a:tcPr/>
+                </a:tc>
+                <a:tc hMerge="1">
+                  <a:txBody>
+                    <a:bodyPr/>
+                    <a:lstStyle/>
+                    <a:p>
+                      <a:endParaRPr lang="en-GB"/>
+                    </a:p>
+                  </a:txBody>
+                  <a:tcPr/>
+                </a:tc>
+                <a:tc hMerge="1">
+                  <a:txBody>
+                    <a:bodyPr/>
+                    <a:lstStyle/>
+                    <a:p>
+                      <a:endParaRPr lang="en-GB"/>
+                    </a:p>
+                  </a:txBody>
+                  <a:tcPr/>
+                </a:tc>
+                <a:tc gridSpan="3">
+                  <a:txBody>
+                    <a:bodyPr/>
+                    <a:lstStyle/>
+                    <a:p>
+                      <a:pPr algn="ctr"/>
+                      <a:r>
+                        <a:rPr lang="sr-Latn-RS" dirty="0" smtClean="0"/>
+                        <a:t>Scenario 3</a:t>
+                      </a:r>
+                      <a:endParaRPr lang="en-GB" dirty="0"/>
+                    </a:p>
+                  </a:txBody>
+                  <a:tcPr/>
+                </a:tc>
+                <a:tc hMerge="1">
+                  <a:txBody>
+                    <a:bodyPr/>
+                    <a:lstStyle/>
+                    <a:p>
+                      <a:endParaRPr lang="en-GB"/>
+                    </a:p>
+                  </a:txBody>
+                  <a:tcPr/>
+                </a:tc>
+                <a:tc hMerge="1">
+                  <a:txBody>
+                    <a:bodyPr/>
+                    <a:lstStyle/>
+                    <a:p>
+                      <a:endParaRPr lang="en-GB"/>
+                    </a:p>
+                  </a:txBody>
+                  <a:tcPr/>
+                </a:tc>
+                <a:extLst>
+                  <a:ext uri="{0D108BD9-81ED-4DB2-BD59-A6C34878D82A}">
+                    <a16:rowId xmlns:a16="http://schemas.microsoft.com/office/drawing/2014/main" val="1545192021"/>
+                  </a:ext>
+                </a:extLst>
+              </a:tr>
+              <a:tr h="185420">
+                <a:tc vMerge="1">
+                  <a:txBody>
+                    <a:bodyPr/>
+                    <a:lstStyle/>
+                    <a:p>
+                      <a:endParaRPr lang="en-GB"/>
+                    </a:p>
+                  </a:txBody>
+                  <a:tcPr/>
+                </a:tc>
+                <a:tc>
+                  <a:txBody>
+                    <a:bodyPr/>
+                    <a:lstStyle/>
+                    <a:p>
+                      <a:pPr algn="ctr"/>
+                      <a:r>
+                        <a:rPr lang="sr-Latn-RS" sz="1200" b="1" dirty="0" smtClean="0"/>
+                        <a:t>RMSE</a:t>
+                      </a:r>
+                      <a:endParaRPr lang="en-GB" sz="1200" b="1" dirty="0"/>
+                    </a:p>
+                  </a:txBody>
+                  <a:tcPr/>
+                </a:tc>
+                <a:tc>
+                  <a:txBody>
+                    <a:bodyPr/>
+                    <a:lstStyle/>
+                    <a:p>
+                      <a:pPr algn="ctr"/>
+                      <a:r>
+                        <a:rPr lang="sr-Latn-RS" sz="1200" b="1" dirty="0" smtClean="0"/>
+                        <a:t>R</a:t>
+                      </a:r>
+                      <a:r>
+                        <a:rPr lang="sr-Latn-RS" sz="1200" b="1" baseline="30000" dirty="0" smtClean="0"/>
+                        <a:t>2</a:t>
+                      </a:r>
+                      <a:endParaRPr lang="en-GB" sz="1200" b="1" baseline="30000" dirty="0"/>
+                    </a:p>
+                  </a:txBody>
+                  <a:tcPr/>
+                </a:tc>
+                <a:tc>
+                  <a:txBody>
+                    <a:bodyPr/>
+                    <a:lstStyle/>
+                    <a:p>
+                      <a:pPr algn="ctr"/>
+                      <a:r>
+                        <a:rPr lang="sr-Latn-RS" sz="1200" b="1" dirty="0" smtClean="0"/>
+                        <a:t>R</a:t>
+                      </a:r>
+                      <a:r>
+                        <a:rPr lang="sr-Latn-RS" sz="1200" b="1" baseline="30000" dirty="0" smtClean="0"/>
+                        <a:t>2</a:t>
+                      </a:r>
+                      <a:r>
+                        <a:rPr lang="sr-Latn-RS" sz="1200" b="1" dirty="0" smtClean="0"/>
+                        <a:t> adj</a:t>
+                      </a:r>
+                      <a:endParaRPr lang="en-GB" sz="1200" b="1" dirty="0"/>
+                    </a:p>
+                  </a:txBody>
+                  <a:tcPr/>
+                </a:tc>
+                <a:tc>
+                  <a:txBody>
+                    <a:bodyPr/>
+                    <a:lstStyle/>
+                    <a:p>
+                      <a:pPr algn="ctr"/>
+                      <a:r>
+                        <a:rPr lang="sr-Latn-RS" sz="1200" b="1" dirty="0" smtClean="0"/>
+                        <a:t>RMSE</a:t>
+                      </a:r>
+                      <a:endParaRPr lang="en-GB" sz="1200" b="1" dirty="0"/>
+                    </a:p>
+                  </a:txBody>
+                  <a:tcPr/>
+                </a:tc>
+                <a:tc>
+                  <a:txBody>
+                    <a:bodyPr/>
+                    <a:lstStyle/>
+                    <a:p>
+                      <a:pPr algn="ctr"/>
+                      <a:r>
+                        <a:rPr lang="sr-Latn-RS" sz="1200" b="1" dirty="0" smtClean="0"/>
+                        <a:t>R</a:t>
+                      </a:r>
+                      <a:r>
+                        <a:rPr lang="sr-Latn-RS" sz="1200" b="1" baseline="30000" dirty="0" smtClean="0"/>
+                        <a:t>2</a:t>
+                      </a:r>
+                      <a:endParaRPr lang="en-GB" sz="1200" b="1" baseline="30000" dirty="0"/>
+                    </a:p>
+                  </a:txBody>
+                  <a:tcPr/>
+                </a:tc>
+                <a:tc>
+                  <a:txBody>
+                    <a:bodyPr/>
+                    <a:lstStyle/>
+                    <a:p>
+                      <a:pPr algn="ctr"/>
+                      <a:r>
+                        <a:rPr lang="sr-Latn-RS" sz="1200" b="1" dirty="0" smtClean="0"/>
+                        <a:t>R</a:t>
+                      </a:r>
+                      <a:r>
+                        <a:rPr lang="sr-Latn-RS" sz="1200" b="1" baseline="30000" dirty="0" smtClean="0"/>
+                        <a:t>2</a:t>
+                      </a:r>
+                      <a:r>
+                        <a:rPr lang="sr-Latn-RS" sz="1200" b="1" dirty="0" smtClean="0"/>
+                        <a:t> adj</a:t>
+                      </a:r>
+                      <a:endParaRPr lang="en-GB" sz="1200" b="1" dirty="0"/>
+                    </a:p>
+                  </a:txBody>
+                  <a:tcPr/>
+                </a:tc>
+                <a:tc>
+                  <a:txBody>
+                    <a:bodyPr/>
+                    <a:lstStyle/>
+                    <a:p>
+                      <a:pPr algn="ctr"/>
+                      <a:r>
+                        <a:rPr lang="sr-Latn-RS" sz="1200" b="1" dirty="0" smtClean="0"/>
+                        <a:t>RMSE</a:t>
+                      </a:r>
+                      <a:endParaRPr lang="en-GB" sz="1200" b="1" dirty="0"/>
+                    </a:p>
+                  </a:txBody>
+                  <a:tcPr/>
+                </a:tc>
+                <a:tc>
+                  <a:txBody>
+                    <a:bodyPr/>
+                    <a:lstStyle/>
+                    <a:p>
+                      <a:pPr algn="ctr"/>
+                      <a:r>
+                        <a:rPr lang="sr-Latn-RS" sz="1200" b="1" dirty="0" smtClean="0"/>
+                        <a:t>R</a:t>
+                      </a:r>
+                      <a:r>
+                        <a:rPr lang="sr-Latn-RS" sz="1200" b="1" baseline="30000" dirty="0" smtClean="0"/>
+                        <a:t>2</a:t>
+                      </a:r>
+                      <a:endParaRPr lang="en-GB" sz="1200" b="1" baseline="30000" dirty="0"/>
+                    </a:p>
+                  </a:txBody>
+                  <a:tcPr/>
+                </a:tc>
+                <a:tc>
+                  <a:txBody>
+                    <a:bodyPr/>
+                    <a:lstStyle/>
+                    <a:p>
+                      <a:pPr algn="ctr"/>
+                      <a:r>
+                        <a:rPr lang="sr-Latn-RS" sz="1200" b="1" dirty="0" smtClean="0"/>
+                        <a:t>R</a:t>
+                      </a:r>
+                      <a:r>
+                        <a:rPr lang="sr-Latn-RS" sz="1200" b="1" baseline="30000" dirty="0" smtClean="0"/>
+                        <a:t>2</a:t>
+                      </a:r>
+                      <a:r>
+                        <a:rPr lang="sr-Latn-RS" sz="1200" b="1" dirty="0" smtClean="0"/>
+                        <a:t> adj</a:t>
+                      </a:r>
+                      <a:endParaRPr lang="en-GB" sz="1200" b="1" dirty="0"/>
+                    </a:p>
+                  </a:txBody>
+                  <a:tcPr/>
+                </a:tc>
+                <a:extLst>
+                  <a:ext uri="{0D108BD9-81ED-4DB2-BD59-A6C34878D82A}">
+                    <a16:rowId xmlns:a16="http://schemas.microsoft.com/office/drawing/2014/main" val="1919020792"/>
+                  </a:ext>
+                </a:extLst>
+              </a:tr>
+              <a:tr h="370840">
+                <a:tc>
+                  <a:txBody>
+                    <a:bodyPr/>
+                    <a:lstStyle/>
+                    <a:p>
+                      <a:r>
+                        <a:rPr lang="sr-Latn-RS" b="1" dirty="0" smtClean="0"/>
+                        <a:t>Random Forest</a:t>
+                      </a:r>
+                      <a:endParaRPr lang="en-GB" b="1" dirty="0"/>
+                    </a:p>
+                  </a:txBody>
+                  <a:tcPr/>
+                </a:tc>
+                <a:tc>
+                  <a:txBody>
+                    <a:bodyPr/>
+                    <a:lstStyle/>
+                    <a:p>
+                      <a:r>
+                        <a:rPr lang="sr-Latn-RS" b="1" dirty="0" smtClean="0"/>
+                        <a:t>0.579</a:t>
+                      </a:r>
+                      <a:endParaRPr lang="en-GB" b="1" dirty="0"/>
+                    </a:p>
+                  </a:txBody>
+                  <a:tcPr/>
+                </a:tc>
+                <a:tc>
+                  <a:txBody>
+                    <a:bodyPr/>
+                    <a:lstStyle/>
+                    <a:p>
+                      <a:r>
+                        <a:rPr lang="sr-Latn-RS" dirty="0" smtClean="0"/>
+                        <a:t>0.904</a:t>
+                      </a:r>
+                      <a:endParaRPr lang="en-GB" dirty="0"/>
+                    </a:p>
+                  </a:txBody>
+                  <a:tcPr/>
+                </a:tc>
+                <a:tc>
+                  <a:txBody>
+                    <a:bodyPr/>
+                    <a:lstStyle/>
+                    <a:p>
+                      <a:r>
+                        <a:rPr lang="sr-Latn-RS" dirty="0" smtClean="0"/>
+                        <a:t>0.802</a:t>
+                      </a:r>
+                    </a:p>
+                  </a:txBody>
+                  <a:tcPr/>
+                </a:tc>
+                <a:tc>
+                  <a:txBody>
+                    <a:bodyPr/>
+                    <a:lstStyle/>
+                    <a:p>
+                      <a:r>
+                        <a:rPr lang="sr-Latn-RS" b="1" dirty="0" smtClean="0"/>
+                        <a:t>0.624</a:t>
+                      </a:r>
+                      <a:endParaRPr lang="en-GB" b="1" dirty="0"/>
+                    </a:p>
+                  </a:txBody>
+                  <a:tcPr/>
+                </a:tc>
+                <a:tc>
+                  <a:txBody>
+                    <a:bodyPr/>
+                    <a:lstStyle/>
+                    <a:p>
+                      <a:r>
+                        <a:rPr lang="sr-Latn-RS" dirty="0" smtClean="0"/>
+                        <a:t>0.888</a:t>
+                      </a:r>
+                      <a:endParaRPr lang="en-GB" dirty="0"/>
+                    </a:p>
+                  </a:txBody>
+                  <a:tcPr/>
+                </a:tc>
+                <a:tc>
+                  <a:txBody>
+                    <a:bodyPr/>
+                    <a:lstStyle/>
+                    <a:p>
+                      <a:r>
+                        <a:rPr lang="sr-Latn-RS" dirty="0" smtClean="0"/>
+                        <a:t>0.770</a:t>
+                      </a:r>
+                      <a:endParaRPr lang="en-GB" dirty="0"/>
+                    </a:p>
+                  </a:txBody>
+                  <a:tcPr/>
+                </a:tc>
+                <a:tc>
+                  <a:txBody>
+                    <a:bodyPr/>
+                    <a:lstStyle/>
+                    <a:p>
+                      <a:r>
+                        <a:rPr lang="sr-Latn-RS" b="1" dirty="0" smtClean="0"/>
+                        <a:t>0.607</a:t>
+                      </a:r>
+                      <a:endParaRPr lang="en-GB" b="1" dirty="0"/>
+                    </a:p>
+                  </a:txBody>
+                  <a:tcPr/>
+                </a:tc>
+                <a:tc>
+                  <a:txBody>
+                    <a:bodyPr/>
+                    <a:lstStyle/>
+                    <a:p>
+                      <a:r>
+                        <a:rPr lang="sr-Latn-RS" dirty="0" smtClean="0"/>
+                        <a:t>0.887</a:t>
+                      </a:r>
+                      <a:endParaRPr lang="en-GB" dirty="0"/>
+                    </a:p>
+                  </a:txBody>
+                  <a:tcPr/>
+                </a:tc>
+                <a:tc>
+                  <a:txBody>
+                    <a:bodyPr/>
+                    <a:lstStyle/>
+                    <a:p>
+                      <a:r>
+                        <a:rPr lang="sr-Latn-RS" dirty="0" smtClean="0"/>
+                        <a:t>0.769</a:t>
+                      </a:r>
+                      <a:endParaRPr lang="en-GB" dirty="0"/>
+                    </a:p>
+                  </a:txBody>
+                  <a:tcPr/>
+                </a:tc>
+                <a:extLst>
+                  <a:ext uri="{0D108BD9-81ED-4DB2-BD59-A6C34878D82A}">
+                    <a16:rowId xmlns:a16="http://schemas.microsoft.com/office/drawing/2014/main" val="933349131"/>
+                  </a:ext>
+                </a:extLst>
+              </a:tr>
+              <a:tr h="370840">
+                <a:tc>
+                  <a:txBody>
+                    <a:bodyPr/>
+                    <a:lstStyle/>
+                    <a:p>
+                      <a:r>
+                        <a:rPr lang="sr-Latn-RS" b="1" dirty="0" smtClean="0"/>
+                        <a:t>Gradient Boosting</a:t>
+                      </a:r>
+                      <a:endParaRPr lang="en-GB" b="1" dirty="0"/>
+                    </a:p>
+                  </a:txBody>
+                  <a:tcPr/>
+                </a:tc>
+                <a:tc>
+                  <a:txBody>
+                    <a:bodyPr/>
+                    <a:lstStyle/>
+                    <a:p>
+                      <a:r>
+                        <a:rPr lang="sr-Latn-RS" dirty="0" smtClean="0"/>
+                        <a:t>0.607</a:t>
+                      </a:r>
+                      <a:endParaRPr lang="en-GB" dirty="0"/>
+                    </a:p>
+                  </a:txBody>
+                  <a:tcPr/>
+                </a:tc>
+                <a:tc>
+                  <a:txBody>
+                    <a:bodyPr/>
+                    <a:lstStyle/>
+                    <a:p>
+                      <a:r>
+                        <a:rPr lang="sr-Latn-RS" dirty="0" smtClean="0"/>
+                        <a:t>0.894</a:t>
+                      </a:r>
+                      <a:endParaRPr lang="en-GB" dirty="0"/>
+                    </a:p>
+                  </a:txBody>
+                  <a:tcPr/>
+                </a:tc>
+                <a:tc>
+                  <a:txBody>
+                    <a:bodyPr/>
+                    <a:lstStyle/>
+                    <a:p>
+                      <a:r>
+                        <a:rPr lang="sr-Latn-RS" dirty="0" smtClean="0"/>
+                        <a:t>0.783</a:t>
+                      </a:r>
+                      <a:endParaRPr lang="en-GB" dirty="0"/>
+                    </a:p>
+                  </a:txBody>
+                  <a:tcPr/>
+                </a:tc>
+                <a:tc>
+                  <a:txBody>
+                    <a:bodyPr/>
+                    <a:lstStyle/>
+                    <a:p>
+                      <a:r>
+                        <a:rPr lang="sr-Latn-RS" dirty="0" smtClean="0"/>
+                        <a:t>0.705</a:t>
+                      </a:r>
+                      <a:endParaRPr lang="en-GB" dirty="0"/>
+                    </a:p>
+                  </a:txBody>
+                  <a:tcPr/>
+                </a:tc>
+                <a:tc>
+                  <a:txBody>
+                    <a:bodyPr/>
+                    <a:lstStyle/>
+                    <a:p>
+                      <a:r>
+                        <a:rPr lang="sr-Latn-RS" dirty="0" smtClean="0"/>
+                        <a:t>0.857</a:t>
+                      </a:r>
+                      <a:endParaRPr lang="en-GB" dirty="0"/>
+                    </a:p>
+                  </a:txBody>
+                  <a:tcPr/>
+                </a:tc>
+                <a:tc>
+                  <a:txBody>
+                    <a:bodyPr/>
+                    <a:lstStyle/>
+                    <a:p>
+                      <a:r>
+                        <a:rPr lang="sr-Latn-RS" dirty="0" smtClean="0"/>
+                        <a:t>0.706</a:t>
+                      </a:r>
+                      <a:endParaRPr lang="en-GB" dirty="0"/>
+                    </a:p>
+                  </a:txBody>
+                  <a:tcPr/>
+                </a:tc>
+                <a:tc>
+                  <a:txBody>
+                    <a:bodyPr/>
+                    <a:lstStyle/>
+                    <a:p>
+                      <a:r>
+                        <a:rPr lang="sr-Latn-RS" dirty="0" smtClean="0"/>
+                        <a:t>0.663</a:t>
+                      </a:r>
+                      <a:endParaRPr lang="en-GB" dirty="0"/>
+                    </a:p>
+                  </a:txBody>
+                  <a:tcPr/>
+                </a:tc>
+                <a:tc>
+                  <a:txBody>
+                    <a:bodyPr/>
+                    <a:lstStyle/>
+                    <a:p>
+                      <a:r>
+                        <a:rPr lang="sr-Latn-RS" dirty="0" smtClean="0"/>
+                        <a:t>0.873</a:t>
+                      </a:r>
+                      <a:endParaRPr lang="en-GB" dirty="0"/>
+                    </a:p>
+                  </a:txBody>
+                  <a:tcPr/>
+                </a:tc>
+                <a:tc>
+                  <a:txBody>
+                    <a:bodyPr/>
+                    <a:lstStyle/>
+                    <a:p>
+                      <a:r>
+                        <a:rPr lang="sr-Latn-RS" dirty="0" smtClean="0"/>
+                        <a:t>0.740</a:t>
+                      </a:r>
+                      <a:endParaRPr lang="en-GB" dirty="0"/>
+                    </a:p>
+                  </a:txBody>
+                  <a:tcPr/>
+                </a:tc>
+                <a:extLst>
+                  <a:ext uri="{0D108BD9-81ED-4DB2-BD59-A6C34878D82A}">
+                    <a16:rowId xmlns:a16="http://schemas.microsoft.com/office/drawing/2014/main" val="3067810021"/>
+                  </a:ext>
+                </a:extLst>
+              </a:tr>
+              <a:tr h="370840">
+                <a:tc>
+                  <a:txBody>
+                    <a:bodyPr/>
+                    <a:lstStyle/>
+                    <a:p>
+                      <a:r>
+                        <a:rPr lang="sr-Latn-RS" b="1" dirty="0" smtClean="0"/>
+                        <a:t>Lasso</a:t>
+                      </a:r>
+                      <a:endParaRPr lang="en-GB" b="1" dirty="0"/>
+                    </a:p>
+                  </a:txBody>
+                  <a:tcPr/>
+                </a:tc>
+                <a:tc>
+                  <a:txBody>
+                    <a:bodyPr/>
+                    <a:lstStyle/>
+                    <a:p>
+                      <a:r>
+                        <a:rPr lang="sr-Latn-RS" dirty="0" smtClean="0"/>
+                        <a:t>0.768</a:t>
+                      </a:r>
+                      <a:endParaRPr lang="en-GB" dirty="0"/>
+                    </a:p>
+                  </a:txBody>
+                  <a:tcPr/>
+                </a:tc>
+                <a:tc>
+                  <a:txBody>
+                    <a:bodyPr/>
+                    <a:lstStyle/>
+                    <a:p>
+                      <a:r>
+                        <a:rPr lang="sr-Latn-RS" dirty="0" smtClean="0"/>
+                        <a:t>0.830</a:t>
+                      </a:r>
+                      <a:endParaRPr lang="en-GB" dirty="0"/>
+                    </a:p>
+                  </a:txBody>
+                  <a:tcPr/>
+                </a:tc>
+                <a:tc>
+                  <a:txBody>
+                    <a:bodyPr/>
+                    <a:lstStyle/>
+                    <a:p>
+                      <a:r>
+                        <a:rPr lang="sr-Latn-RS" dirty="0" smtClean="0"/>
+                        <a:t>0.651</a:t>
+                      </a:r>
+                      <a:endParaRPr lang="en-GB" dirty="0"/>
+                    </a:p>
+                  </a:txBody>
+                  <a:tcPr/>
+                </a:tc>
+                <a:tc>
+                  <a:txBody>
+                    <a:bodyPr/>
+                    <a:lstStyle/>
+                    <a:p>
+                      <a:r>
+                        <a:rPr lang="sr-Latn-RS" dirty="0" smtClean="0"/>
+                        <a:t>0.788</a:t>
+                      </a:r>
+                      <a:endParaRPr lang="en-GB" dirty="0"/>
+                    </a:p>
+                  </a:txBody>
+                  <a:tcPr/>
+                </a:tc>
+                <a:tc>
+                  <a:txBody>
+                    <a:bodyPr/>
+                    <a:lstStyle/>
+                    <a:p>
+                      <a:r>
+                        <a:rPr lang="sr-Latn-RS" dirty="0" smtClean="0"/>
+                        <a:t>0.821</a:t>
+                      </a:r>
+                      <a:endParaRPr lang="en-GB" dirty="0"/>
+                    </a:p>
+                  </a:txBody>
+                  <a:tcPr/>
+                </a:tc>
+                <a:tc>
+                  <a:txBody>
+                    <a:bodyPr/>
+                    <a:lstStyle/>
+                    <a:p>
+                      <a:r>
+                        <a:rPr lang="sr-Latn-RS" dirty="0" smtClean="0"/>
+                        <a:t>0.633</a:t>
+                      </a:r>
+                      <a:endParaRPr lang="en-GB" dirty="0"/>
+                    </a:p>
+                  </a:txBody>
+                  <a:tcPr/>
+                </a:tc>
+                <a:tc>
+                  <a:txBody>
+                    <a:bodyPr/>
+                    <a:lstStyle/>
+                    <a:p>
+                      <a:r>
+                        <a:rPr lang="sr-Latn-RS" dirty="0" smtClean="0"/>
+                        <a:t>0.845</a:t>
+                      </a:r>
+                      <a:endParaRPr lang="en-GB" dirty="0"/>
+                    </a:p>
+                  </a:txBody>
+                  <a:tcPr/>
+                </a:tc>
+                <a:tc>
+                  <a:txBody>
+                    <a:bodyPr/>
+                    <a:lstStyle/>
+                    <a:p>
+                      <a:r>
+                        <a:rPr lang="sr-Latn-RS" dirty="0" smtClean="0"/>
+                        <a:t>0.795</a:t>
+                      </a:r>
+                      <a:endParaRPr lang="en-GB" dirty="0"/>
+                    </a:p>
+                  </a:txBody>
+                  <a:tcPr/>
+                </a:tc>
+                <a:tc>
+                  <a:txBody>
+                    <a:bodyPr/>
+                    <a:lstStyle/>
+                    <a:p>
+                      <a:r>
+                        <a:rPr lang="sr-Latn-RS" dirty="0" smtClean="0"/>
+                        <a:t>0.579</a:t>
+                      </a:r>
+                      <a:endParaRPr lang="en-GB" dirty="0"/>
+                    </a:p>
+                  </a:txBody>
+                  <a:tcPr/>
+                </a:tc>
+                <a:extLst>
+                  <a:ext uri="{0D108BD9-81ED-4DB2-BD59-A6C34878D82A}">
+                    <a16:rowId xmlns:a16="http://schemas.microsoft.com/office/drawing/2014/main" val="3594214847"/>
+                  </a:ext>
+                </a:extLst>
+              </a:tr>
+              <a:tr h="370840">
+                <a:tc>
+                  <a:txBody>
+                    <a:bodyPr/>
+                    <a:lstStyle/>
+                    <a:p>
+                      <a:r>
+                        <a:rPr lang="sr-Latn-RS" b="1" dirty="0" smtClean="0"/>
+                        <a:t>Ridge</a:t>
+                      </a:r>
+                      <a:endParaRPr lang="en-GB" b="1" dirty="0"/>
+                    </a:p>
+                  </a:txBody>
+                  <a:tcPr/>
+                </a:tc>
+                <a:tc>
+                  <a:txBody>
+                    <a:bodyPr/>
+                    <a:lstStyle/>
+                    <a:p>
+                      <a:r>
+                        <a:rPr lang="sr-Latn-RS" dirty="0" smtClean="0"/>
+                        <a:t>0.779</a:t>
+                      </a:r>
+                      <a:endParaRPr lang="en-GB" dirty="0"/>
+                    </a:p>
+                  </a:txBody>
+                  <a:tcPr/>
+                </a:tc>
+                <a:tc>
+                  <a:txBody>
+                    <a:bodyPr/>
+                    <a:lstStyle/>
+                    <a:p>
+                      <a:r>
+                        <a:rPr lang="sr-Latn-RS" dirty="0" smtClean="0"/>
+                        <a:t>0.825</a:t>
+                      </a:r>
+                      <a:endParaRPr lang="en-GB" dirty="0"/>
+                    </a:p>
+                  </a:txBody>
+                  <a:tcPr/>
+                </a:tc>
+                <a:tc>
+                  <a:txBody>
+                    <a:bodyPr/>
+                    <a:lstStyle/>
+                    <a:p>
+                      <a:r>
+                        <a:rPr lang="sr-Latn-RS" dirty="0" smtClean="0"/>
+                        <a:t>0.641</a:t>
+                      </a:r>
+                      <a:endParaRPr lang="en-GB" dirty="0"/>
+                    </a:p>
+                  </a:txBody>
+                  <a:tcPr/>
+                </a:tc>
+                <a:tc>
+                  <a:txBody>
+                    <a:bodyPr/>
+                    <a:lstStyle/>
+                    <a:p>
+                      <a:r>
+                        <a:rPr lang="sr-Latn-RS" dirty="0" smtClean="0"/>
+                        <a:t>0.781</a:t>
+                      </a:r>
+                      <a:endParaRPr lang="en-GB" dirty="0"/>
+                    </a:p>
+                  </a:txBody>
+                  <a:tcPr/>
+                </a:tc>
+                <a:tc>
+                  <a:txBody>
+                    <a:bodyPr/>
+                    <a:lstStyle/>
+                    <a:p>
+                      <a:r>
+                        <a:rPr lang="sr-Latn-RS" dirty="0" smtClean="0"/>
+                        <a:t>0.824</a:t>
+                      </a:r>
+                      <a:endParaRPr lang="en-GB" dirty="0"/>
+                    </a:p>
+                  </a:txBody>
+                  <a:tcPr/>
+                </a:tc>
+                <a:tc>
+                  <a:txBody>
+                    <a:bodyPr/>
+                    <a:lstStyle/>
+                    <a:p>
+                      <a:r>
+                        <a:rPr lang="sr-Latn-RS" dirty="0" smtClean="0"/>
+                        <a:t>0.639</a:t>
+                      </a:r>
+                      <a:endParaRPr lang="en-GB" dirty="0"/>
+                    </a:p>
+                  </a:txBody>
+                  <a:tcPr/>
+                </a:tc>
+                <a:tc>
+                  <a:txBody>
+                    <a:bodyPr/>
+                    <a:lstStyle/>
+                    <a:p>
+                      <a:r>
+                        <a:rPr lang="sr-Latn-RS" dirty="0" smtClean="0"/>
+                        <a:t>0.831</a:t>
+                      </a:r>
+                      <a:endParaRPr lang="en-GB" dirty="0"/>
+                    </a:p>
+                  </a:txBody>
+                  <a:tcPr/>
+                </a:tc>
+                <a:tc>
+                  <a:txBody>
+                    <a:bodyPr/>
+                    <a:lstStyle/>
+                    <a:p>
+                      <a:r>
+                        <a:rPr lang="sr-Latn-RS" dirty="0" smtClean="0"/>
+                        <a:t>0.801</a:t>
+                      </a:r>
+                      <a:endParaRPr lang="en-GB" dirty="0"/>
+                    </a:p>
+                  </a:txBody>
+                  <a:tcPr/>
+                </a:tc>
+                <a:tc>
+                  <a:txBody>
+                    <a:bodyPr/>
+                    <a:lstStyle/>
+                    <a:p>
+                      <a:r>
+                        <a:rPr lang="sr-Latn-RS" dirty="0" smtClean="0"/>
+                        <a:t>0.592</a:t>
+                      </a:r>
+                      <a:endParaRPr lang="en-GB" dirty="0"/>
+                    </a:p>
+                  </a:txBody>
+                  <a:tcPr/>
+                </a:tc>
+                <a:extLst>
+                  <a:ext uri="{0D108BD9-81ED-4DB2-BD59-A6C34878D82A}">
+                    <a16:rowId xmlns:a16="http://schemas.microsoft.com/office/drawing/2014/main" val="3645393795"/>
+                  </a:ext>
+                </a:extLst>
+              </a:tr>
+              <a:tr h="370840">
+                <a:tc>
+                  <a:txBody>
+                    <a:bodyPr/>
+                    <a:lstStyle/>
+                    <a:p>
+                      <a:r>
+                        <a:rPr lang="sr-Latn-RS" b="1" dirty="0" smtClean="0"/>
+                        <a:t>Elastic Net</a:t>
+                      </a:r>
+                    </a:p>
+                  </a:txBody>
+                  <a:tcPr/>
+                </a:tc>
+                <a:tc>
+                  <a:txBody>
+                    <a:bodyPr/>
+                    <a:lstStyle/>
+                    <a:p>
+                      <a:r>
+                        <a:rPr lang="sr-Latn-RS" dirty="0" smtClean="0"/>
+                        <a:t>0.770</a:t>
+                      </a:r>
+                      <a:endParaRPr lang="en-GB" dirty="0"/>
+                    </a:p>
+                  </a:txBody>
+                  <a:tcPr/>
+                </a:tc>
+                <a:tc>
+                  <a:txBody>
+                    <a:bodyPr/>
+                    <a:lstStyle/>
+                    <a:p>
+                      <a:r>
+                        <a:rPr lang="sr-Latn-RS" dirty="0" smtClean="0"/>
+                        <a:t>0.829</a:t>
+                      </a:r>
+                      <a:endParaRPr lang="en-GB" dirty="0"/>
+                    </a:p>
+                  </a:txBody>
+                  <a:tcPr/>
+                </a:tc>
+                <a:tc>
+                  <a:txBody>
+                    <a:bodyPr/>
+                    <a:lstStyle/>
+                    <a:p>
+                      <a:r>
+                        <a:rPr lang="sr-Latn-RS" dirty="0" smtClean="0"/>
+                        <a:t>0.649</a:t>
+                      </a:r>
+                      <a:endParaRPr lang="en-GB" dirty="0"/>
+                    </a:p>
+                  </a:txBody>
+                  <a:tcPr/>
+                </a:tc>
+                <a:tc>
+                  <a:txBody>
+                    <a:bodyPr/>
+                    <a:lstStyle/>
+                    <a:p>
+                      <a:r>
+                        <a:rPr lang="sr-Latn-RS" dirty="0" smtClean="0"/>
+                        <a:t>0.780</a:t>
+                      </a:r>
+                      <a:endParaRPr lang="en-GB" dirty="0"/>
+                    </a:p>
+                  </a:txBody>
+                  <a:tcPr/>
+                </a:tc>
+                <a:tc>
+                  <a:txBody>
+                    <a:bodyPr/>
+                    <a:lstStyle/>
+                    <a:p>
+                      <a:r>
+                        <a:rPr lang="sr-Latn-RS" dirty="0" smtClean="0"/>
+                        <a:t>0.825</a:t>
+                      </a:r>
+                      <a:endParaRPr lang="en-GB" dirty="0"/>
+                    </a:p>
+                  </a:txBody>
+                  <a:tcPr/>
+                </a:tc>
+                <a:tc>
+                  <a:txBody>
+                    <a:bodyPr/>
+                    <a:lstStyle/>
+                    <a:p>
+                      <a:r>
+                        <a:rPr lang="sr-Latn-RS" dirty="0" smtClean="0"/>
+                        <a:t>0.641</a:t>
+                      </a:r>
+                      <a:endParaRPr lang="en-GB" dirty="0"/>
+                    </a:p>
+                  </a:txBody>
+                  <a:tcPr/>
+                </a:tc>
+                <a:tc>
+                  <a:txBody>
+                    <a:bodyPr/>
+                    <a:lstStyle/>
+                    <a:p>
+                      <a:r>
+                        <a:rPr lang="sr-Latn-RS" dirty="0" smtClean="0"/>
+                        <a:t>0.835</a:t>
+                      </a:r>
+                      <a:endParaRPr lang="en-GB" dirty="0"/>
+                    </a:p>
+                  </a:txBody>
+                  <a:tcPr/>
+                </a:tc>
+                <a:tc>
+                  <a:txBody>
+                    <a:bodyPr/>
+                    <a:lstStyle/>
+                    <a:p>
+                      <a:r>
+                        <a:rPr lang="sr-Latn-RS" dirty="0" smtClean="0"/>
+                        <a:t>0.799</a:t>
+                      </a:r>
+                      <a:endParaRPr lang="en-GB" dirty="0"/>
+                    </a:p>
+                  </a:txBody>
+                  <a:tcPr/>
+                </a:tc>
+                <a:tc>
+                  <a:txBody>
+                    <a:bodyPr/>
+                    <a:lstStyle/>
+                    <a:p>
+                      <a:r>
+                        <a:rPr lang="sr-Latn-RS" dirty="0" smtClean="0"/>
+                        <a:t>0.588</a:t>
+                      </a:r>
+                      <a:endParaRPr lang="en-GB" dirty="0"/>
+                    </a:p>
+                  </a:txBody>
+                  <a:tcPr/>
+                </a:tc>
+                <a:extLst>
+                  <a:ext uri="{0D108BD9-81ED-4DB2-BD59-A6C34878D82A}">
+                    <a16:rowId xmlns:a16="http://schemas.microsoft.com/office/drawing/2014/main" val="1922517658"/>
+                  </a:ext>
+                </a:extLst>
+              </a:tr>
+              <a:tr h="370840">
+                <a:tc>
+                  <a:txBody>
+                    <a:bodyPr/>
+                    <a:lstStyle/>
+                    <a:p>
+                      <a:r>
+                        <a:rPr lang="sr-Latn-RS" b="1" dirty="0" smtClean="0"/>
+                        <a:t>Linearna regresija</a:t>
+                      </a:r>
+                      <a:endParaRPr lang="en-GB" b="1" dirty="0"/>
+                    </a:p>
+                  </a:txBody>
+                  <a:tcPr/>
+                </a:tc>
+                <a:tc>
+                  <a:txBody>
+                    <a:bodyPr/>
+                    <a:lstStyle/>
+                    <a:p>
+                      <a:r>
+                        <a:rPr lang="sr-Latn-RS" dirty="0" smtClean="0"/>
+                        <a:t>0.780</a:t>
+                      </a:r>
+                      <a:endParaRPr lang="en-GB" dirty="0"/>
+                    </a:p>
+                  </a:txBody>
+                  <a:tcPr/>
+                </a:tc>
+                <a:tc>
+                  <a:txBody>
+                    <a:bodyPr/>
+                    <a:lstStyle/>
+                    <a:p>
+                      <a:r>
+                        <a:rPr lang="sr-Latn-RS" dirty="0" smtClean="0"/>
+                        <a:t>0.825</a:t>
+                      </a:r>
+                      <a:endParaRPr lang="en-GB" dirty="0"/>
+                    </a:p>
+                  </a:txBody>
+                  <a:tcPr/>
+                </a:tc>
+                <a:tc>
+                  <a:txBody>
+                    <a:bodyPr/>
+                    <a:lstStyle/>
+                    <a:p>
+                      <a:r>
+                        <a:rPr lang="sr-Latn-RS" dirty="0" smtClean="0"/>
+                        <a:t>0.641</a:t>
+                      </a:r>
+                      <a:endParaRPr lang="en-GB" dirty="0"/>
+                    </a:p>
+                  </a:txBody>
+                  <a:tcPr/>
+                </a:tc>
+                <a:tc>
+                  <a:txBody>
+                    <a:bodyPr/>
+                    <a:lstStyle/>
+                    <a:p>
+                      <a:r>
+                        <a:rPr lang="sr-Latn-RS" dirty="0" smtClean="0"/>
+                        <a:t>0.781</a:t>
+                      </a:r>
+                      <a:endParaRPr lang="en-GB" dirty="0"/>
+                    </a:p>
+                  </a:txBody>
+                  <a:tcPr/>
+                </a:tc>
+                <a:tc>
+                  <a:txBody>
+                    <a:bodyPr/>
+                    <a:lstStyle/>
+                    <a:p>
+                      <a:r>
+                        <a:rPr lang="sr-Latn-RS" dirty="0" smtClean="0"/>
+                        <a:t>0.824</a:t>
+                      </a:r>
+                      <a:endParaRPr lang="en-GB" dirty="0"/>
+                    </a:p>
+                  </a:txBody>
+                  <a:tcPr/>
+                </a:tc>
+                <a:tc>
+                  <a:txBody>
+                    <a:bodyPr/>
+                    <a:lstStyle/>
+                    <a:p>
+                      <a:r>
+                        <a:rPr lang="sr-Latn-RS" dirty="0" smtClean="0"/>
+                        <a:t>0.639</a:t>
+                      </a:r>
+                      <a:endParaRPr lang="en-GB" dirty="0"/>
+                    </a:p>
+                  </a:txBody>
+                  <a:tcPr/>
+                </a:tc>
+                <a:tc>
+                  <a:txBody>
+                    <a:bodyPr/>
+                    <a:lstStyle/>
+                    <a:p>
+                      <a:r>
+                        <a:rPr lang="sr-Latn-RS" dirty="0" smtClean="0"/>
+                        <a:t>0.831</a:t>
+                      </a:r>
+                      <a:endParaRPr lang="en-GB" dirty="0"/>
+                    </a:p>
+                  </a:txBody>
+                  <a:tcPr/>
+                </a:tc>
+                <a:tc>
+                  <a:txBody>
+                    <a:bodyPr/>
+                    <a:lstStyle/>
+                    <a:p>
+                      <a:r>
+                        <a:rPr lang="sr-Latn-RS" dirty="0" smtClean="0"/>
+                        <a:t>0.801</a:t>
+                      </a:r>
+                      <a:endParaRPr lang="en-GB" dirty="0"/>
+                    </a:p>
+                  </a:txBody>
+                  <a:tcPr/>
+                </a:tc>
+                <a:tc>
+                  <a:txBody>
+                    <a:bodyPr/>
+                    <a:lstStyle/>
+                    <a:p>
+                      <a:r>
+                        <a:rPr lang="sr-Latn-RS" dirty="0" smtClean="0"/>
+                        <a:t>0.592</a:t>
+                      </a:r>
+                      <a:endParaRPr lang="en-GB" dirty="0"/>
+                    </a:p>
+                  </a:txBody>
+                  <a:tcPr/>
+                </a:tc>
+                <a:extLst>
+                  <a:ext uri="{0D108BD9-81ED-4DB2-BD59-A6C34878D82A}">
+                    <a16:rowId xmlns:a16="http://schemas.microsoft.com/office/drawing/2014/main" val="3722584757"/>
+                  </a:ext>
+                </a:extLst>
+              </a:tr>
+            </a:tbl>
+          </a:graphicData>
+        </a:graphic>
+      </p:graphicFrame>
       <p:sp>
         <p:nvSpPr>
-          <p:cNvPr id="3" name="Subtitle 2"/>
+          <p:cNvPr id="5" name="Subtitle 2"/>
           <p:cNvSpPr>
             <a:spLocks noGrp="1"/>
           </p:cNvSpPr>
@@ -9200,19 +16529,28 @@
             <p:ph type="subTitle" idx="1"/>
           </p:nvPr>
         </p:nvSpPr>
-        <p:spPr/>
+        <p:spPr>
+          <a:xfrm>
+            <a:off x="587352" y="4343383"/>
+            <a:ext cx="6500917" cy="602386"/>
+          </a:xfrm>
+        </p:spPr>
         <p:txBody>
           <a:bodyPr/>
           <a:lstStyle/>
           <a:p>
-            <a:endParaRPr lang="en-GB"/>
+            <a:r>
+              <a:rPr lang="sr-Latn-RS" sz="1600" dirty="0" smtClean="0"/>
+              <a:t>Random Forest je najbolji model u sva tri scenarija</a:t>
+            </a:r>
+            <a:endParaRPr lang="en-GB" sz="1600" dirty="0"/>
           </a:p>
         </p:txBody>
       </p:sp>
     </p:spTree>
     <p:extLst>
       <p:ext uri="{BB962C8B-B14F-4D97-AF65-F5344CB8AC3E}">
-        <p14:creationId xmlns:p14="http://schemas.microsoft.com/office/powerpoint/2010/main" val="1444401571"/>
+        <p14:creationId xmlns:p14="http://schemas.microsoft.com/office/powerpoint/2010/main" val="362390871"/>
       </p:ext>
     </p:extLst>
   </p:cSld>
